--- a/wwwroot/webCourse/Templates/Bitmap-Video-2D-PPT.pptx
+++ b/wwwroot/webCourse/Templates/Bitmap-Video-2D-PPT.pptx
@@ -239,7 +239,7 @@
           <a:p>
             <a:fld id="{0F9B84EA-7D68-4D60-9CB1-D50884785D1C}" type="datetimeFigureOut">
               <a:rPr lang="zh-CN" altLang="en-US" smtClean="0"/>
-              <a:t>2023/10/28</a:t>
+              <a:t>2023/10/29</a:t>
             </a:fld>
             <a:endParaRPr lang="zh-CN" altLang="en-US"/>
           </a:p>
@@ -404,7 +404,7 @@
           <a:p>
             <a:fld id="{D2A48B96-639E-45A3-A0BA-2464DFDB1FAA}" type="datetimeFigureOut">
               <a:rPr lang="zh-CN" altLang="en-US" smtClean="0"/>
-              <a:t>2023/10/28</a:t>
+              <a:t>2023/10/29</a:t>
             </a:fld>
             <a:endParaRPr lang="zh-CN" altLang="en-US"/>
           </a:p>
@@ -1833,7 +1833,7 @@
           <a:p>
             <a:fld id="{82F288E0-7875-42C4-84C8-98DBBD3BF4D2}" type="datetimeFigureOut">
               <a:rPr lang="zh-CN" altLang="en-US" smtClean="0"/>
-              <a:t>2023/10/28</a:t>
+              <a:t>2023/10/29</a:t>
             </a:fld>
             <a:endParaRPr lang="zh-CN" altLang="en-US"/>
           </a:p>
@@ -1991,7 +1991,7 @@
           <a:p>
             <a:fld id="{82F288E0-7875-42C4-84C8-98DBBD3BF4D2}" type="datetimeFigureOut">
               <a:rPr lang="zh-CN" altLang="en-US" smtClean="0"/>
-              <a:t>2023/10/28</a:t>
+              <a:t>2023/10/29</a:t>
             </a:fld>
             <a:endParaRPr lang="zh-CN" altLang="en-US"/>
           </a:p>
@@ -2330,7 +2330,7 @@
           <a:p>
             <a:fld id="{82F288E0-7875-42C4-84C8-98DBBD3BF4D2}" type="datetimeFigureOut">
               <a:rPr lang="zh-CN" altLang="en-US" smtClean="0"/>
-              <a:t>2023/10/28</a:t>
+              <a:t>2023/10/29</a:t>
             </a:fld>
             <a:endParaRPr lang="zh-CN" altLang="en-US"/>
           </a:p>
@@ -2566,7 +2566,7 @@
           <a:p>
             <a:fld id="{82F288E0-7875-42C4-84C8-98DBBD3BF4D2}" type="datetimeFigureOut">
               <a:rPr lang="zh-CN" altLang="en-US" smtClean="0"/>
-              <a:t>2023/10/28</a:t>
+              <a:t>2023/10/29</a:t>
             </a:fld>
             <a:endParaRPr lang="zh-CN" altLang="en-US"/>
           </a:p>
@@ -2937,7 +2937,7 @@
           <a:p>
             <a:fld id="{82F288E0-7875-42C4-84C8-98DBBD3BF4D2}" type="datetimeFigureOut">
               <a:rPr lang="zh-CN" altLang="en-US" smtClean="0"/>
-              <a:t>2023/10/28</a:t>
+              <a:t>2023/10/29</a:t>
             </a:fld>
             <a:endParaRPr lang="zh-CN" altLang="en-US"/>
           </a:p>
@@ -3061,7 +3061,7 @@
           <a:p>
             <a:fld id="{82F288E0-7875-42C4-84C8-98DBBD3BF4D2}" type="datetimeFigureOut">
               <a:rPr lang="zh-CN" altLang="en-US" smtClean="0"/>
-              <a:t>2023/10/28</a:t>
+              <a:t>2023/10/29</a:t>
             </a:fld>
             <a:endParaRPr lang="zh-CN" altLang="en-US"/>
           </a:p>
@@ -3163,7 +3163,7 @@
           <a:p>
             <a:fld id="{82F288E0-7875-42C4-84C8-98DBBD3BF4D2}" type="datetimeFigureOut">
               <a:rPr lang="zh-CN" altLang="en-US" smtClean="0"/>
-              <a:t>2023/10/28</a:t>
+              <a:t>2023/10/29</a:t>
             </a:fld>
             <a:endParaRPr lang="zh-CN" altLang="en-US"/>
           </a:p>
@@ -3422,7 +3422,7 @@
           <a:p>
             <a:fld id="{82F288E0-7875-42C4-84C8-98DBBD3BF4D2}" type="datetimeFigureOut">
               <a:rPr lang="zh-CN" altLang="en-US" smtClean="0"/>
-              <a:t>2023/10/28</a:t>
+              <a:t>2023/10/29</a:t>
             </a:fld>
             <a:endParaRPr lang="zh-CN" altLang="en-US"/>
           </a:p>
@@ -3607,7 +3607,7 @@
           <a:p>
             <a:fld id="{82F288E0-7875-42C4-84C8-98DBBD3BF4D2}" type="datetimeFigureOut">
               <a:rPr lang="zh-CN" altLang="en-US" smtClean="0"/>
-              <a:t>2023/10/28</a:t>
+              <a:t>2023/10/29</a:t>
             </a:fld>
             <a:endParaRPr lang="zh-CN" altLang="en-US"/>
           </a:p>
@@ -3834,7 +3834,7 @@
           <a:p>
             <a:fld id="{82F288E0-7875-42C4-84C8-98DBBD3BF4D2}" type="datetimeFigureOut">
               <a:rPr lang="zh-CN" altLang="en-US" smtClean="0"/>
-              <a:t>2023/10/28</a:t>
+              <a:t>2023/10/29</a:t>
             </a:fld>
             <a:endParaRPr lang="zh-CN" altLang="en-US"/>
           </a:p>
@@ -4247,7 +4247,9 @@
       </p:grpSpPr>
       <p:sp>
         <p:nvSpPr>
-          <p:cNvPr id="29" name="TextBox 28"/>
+          <p:cNvPr id="29" name="TextBox 28">
+            <a:hlinkClick r:id="rId5"/>
+          </p:cNvPr>
           <p:cNvSpPr txBox="1"/>
           <p:nvPr/>
         </p:nvSpPr>
@@ -4274,8 +4276,9 @@
                   <a:srgbClr val="33495E"/>
                 </a:solidFill>
                 <a:latin typeface="+mn-ea"/>
-              </a:rPr>
-              <a:t>教育软件与教育技术：计算思维教育、教育计算</a:t>
+                <a:hlinkClick r:id="rId5"/>
+              </a:rPr>
+              <a:t>教育软件与教育技术</a:t>
             </a:r>
             <a:r>
               <a:rPr lang="zh-CN" altLang="en-US" sz="3400" dirty="0" smtClean="0">
@@ -4283,6 +4286,67 @@
                   <a:srgbClr val="33495E"/>
                 </a:solidFill>
                 <a:latin typeface="+mn-ea"/>
+                <a:hlinkClick r:id="rId5"/>
+              </a:rPr>
+              <a:t>：</a:t>
+            </a:r>
+            <a:r>
+              <a:rPr lang="zh-CN" altLang="en-US" sz="3400" dirty="0">
+                <a:solidFill>
+                  <a:srgbClr val="33495E"/>
+                </a:solidFill>
+                <a:latin typeface="+mn-ea"/>
+                <a:hlinkClick r:id="rId5"/>
+              </a:rPr>
+              <a:t>数字</a:t>
+            </a:r>
+            <a:r>
+              <a:rPr lang="zh-CN" altLang="en-US" sz="3400" dirty="0" smtClean="0">
+                <a:solidFill>
+                  <a:srgbClr val="33495E"/>
+                </a:solidFill>
+                <a:latin typeface="+mn-ea"/>
+                <a:hlinkClick r:id="rId5"/>
+              </a:rPr>
+              <a:t>思维</a:t>
+            </a:r>
+            <a:r>
+              <a:rPr lang="zh-CN" altLang="en-US" sz="3400" dirty="0">
+                <a:solidFill>
+                  <a:srgbClr val="33495E"/>
+                </a:solidFill>
+                <a:latin typeface="+mn-ea"/>
+                <a:hlinkClick r:id="rId5"/>
+              </a:rPr>
+              <a:t>教育、</a:t>
+            </a:r>
+            <a:r>
+              <a:rPr lang="zh-CN" altLang="en-US" sz="3400" dirty="0" smtClean="0">
+                <a:solidFill>
+                  <a:srgbClr val="33495E"/>
+                </a:solidFill>
+                <a:latin typeface="+mn-ea"/>
+                <a:hlinkClick r:id="rId5"/>
+              </a:rPr>
+              <a:t>教育</a:t>
+            </a:r>
+            <a:r>
+              <a:rPr lang="zh-CN" altLang="en-US" sz="3400" dirty="0">
+                <a:solidFill>
+                  <a:srgbClr val="33495E"/>
+                </a:solidFill>
+                <a:latin typeface="+mn-ea"/>
+                <a:hlinkClick r:id="rId5"/>
+              </a:rPr>
+              <a:t>数字</a:t>
+            </a:r>
+            <a:r>
+              <a:rPr lang="zh-CN" altLang="en-US" sz="3400" dirty="0" smtClean="0">
+                <a:solidFill>
+                  <a:srgbClr val="33495E"/>
+                </a:solidFill>
+                <a:latin typeface="+mn-ea"/>
+                <a:hlinkClick r:id="rId5"/>
               </a:rPr>
               <a:t>思维</a:t>
             </a:r>
@@ -4295,6 +4359,86 @@
           </a:p>
         </p:txBody>
       </p:sp>
+      <p:sp>
+        <p:nvSpPr>
+          <p:cNvPr id="4" name="文本框 1"/>
+          <p:cNvSpPr txBox="1"/>
+          <p:nvPr/>
+        </p:nvSpPr>
+        <p:spPr>
+          <a:xfrm>
+            <a:off x="5868969" y="4312145"/>
+            <a:ext cx="2810563" cy="315471"/>
+          </a:xfrm>
+          <a:prstGeom prst="rect">
+            <a:avLst/>
+          </a:prstGeom>
+          <a:noFill/>
+        </p:spPr>
+        <p:txBody>
+          <a:bodyPr wrap="square" lIns="68580" tIns="34290" rIns="68580" bIns="34290" rtlCol="0">
+            <a:spAutoFit/>
+          </a:bodyPr>
+          <a:lstStyle/>
+          <a:p>
+            <a:pPr algn="ctr">
+              <a:defRPr/>
+            </a:pPr>
+            <a:r>
+              <a:rPr lang="en-US" altLang="zh-CN" sz="1600" dirty="0" smtClean="0">
+                <a:solidFill>
+                  <a:srgbClr val="00B050"/>
+                </a:solidFill>
+                <a:latin typeface="微软雅黑" panose="020B0503020204020204" pitchFamily="34" charset="-122"/>
+                <a:ea typeface="微软雅黑" panose="020B0503020204020204" pitchFamily="34" charset="-122"/>
+                <a:sym typeface="+mn-ea"/>
+              </a:rPr>
+              <a:t>yuqin9999@dingtalk.com</a:t>
+            </a:r>
+            <a:endParaRPr lang="zh-CN" altLang="en-US" sz="1600" dirty="0">
+              <a:solidFill>
+                <a:srgbClr val="00B050"/>
+              </a:solidFill>
+              <a:latin typeface="微软雅黑" panose="020B0503020204020204" pitchFamily="34" charset="-122"/>
+              <a:ea typeface="微软雅黑" panose="020B0503020204020204" pitchFamily="34" charset="-122"/>
+              <a:sym typeface="+mn-ea"/>
+            </a:endParaRPr>
+          </a:p>
+        </p:txBody>
+      </p:sp>
+      <p:pic>
+        <p:nvPicPr>
+          <p:cNvPr id="3" name="Audio 2">
+            <a:hlinkClick r:id="" action="ppaction://media"/>
+          </p:cNvPr>
+          <p:cNvPicPr>
+            <a:picLocks noChangeAspect="1"/>
+          </p:cNvPicPr>
+          <p:nvPr>
+            <a:audioFile r:link="rId2"/>
+            <p:extLst>
+              <p:ext uri="{DAA4B4D4-6D71-4841-9C94-3DE7FCFB9230}">
+                <p14:media xmlns:p14="http://schemas.microsoft.com/office/powerpoint/2010/main" r:embed="rId1"/>
+              </p:ext>
+            </p:extLst>
+          </p:nvPr>
+        </p:nvPicPr>
+        <p:blipFill>
+          <a:blip r:embed="rId6"/>
+          <a:stretch>
+            <a:fillRect/>
+          </a:stretch>
+        </p:blipFill>
+        <p:spPr>
+          <a:xfrm>
+            <a:off x="8521700" y="4521200"/>
+            <a:ext cx="406400" cy="406400"/>
+          </a:xfrm>
+          <a:prstGeom prst="rect">
+            <a:avLst/>
+          </a:prstGeom>
+        </p:spPr>
+      </p:pic>
     </p:spTree>
     <p:extLst>
       <p:ext uri="{BB962C8B-B14F-4D97-AF65-F5344CB8AC3E}">
@@ -4305,14 +4449,14 @@
   <p:clrMapOvr>
     <a:masterClrMapping/>
   </p:clrMapOvr>
-  <mc:AlternateContent xmlns:mc="http://schemas.openxmlformats.org/markup-compatibility/2006" xmlns:p14="http://schemas.microsoft.com/office/powerpoint/2010/main">
-    <mc:Choice Requires="p14">
-      <p:transition spd="slow" p14:dur="1500">
+  <mc:AlternateContent xmlns:mc="http://schemas.openxmlformats.org/markup-compatibility/2006">
+    <mc:Choice xmlns:p14="http://schemas.microsoft.com/office/powerpoint/2010/main" Requires="p14">
+      <p:transition spd="slow" p14:dur="1500" advTm="6057">
         <p14:ripple dir="lu"/>
       </p:transition>
     </mc:Choice>
-    <mc:Fallback xmlns="">
-      <p:transition spd="slow">
+    <mc:Fallback>
+      <p:transition spd="slow" advTm="6057">
         <p:fade/>
       </p:transition>
     </mc:Fallback>
@@ -4320,7 +4464,87 @@
   <p:timing>
     <p:tnLst>
       <p:par>
-        <p:cTn id="1" dur="indefinite" restart="never" nodeType="tmRoot"/>
+        <p:cTn id="1" dur="indefinite" restart="never" nodeType="tmRoot">
+          <p:childTnLst>
+            <p:seq concurrent="1" nextAc="seek">
+              <p:cTn id="2" dur="indefinite" nodeType="mainSeq">
+                <p:childTnLst>
+                  <p:par>
+                    <p:cTn id="3" fill="hold">
+                      <p:stCondLst>
+                        <p:cond delay="indefinite"/>
+                        <p:cond evt="onBegin" delay="0">
+                          <p:tn val="2"/>
+                        </p:cond>
+                      </p:stCondLst>
+                      <p:childTnLst>
+                        <p:par>
+                          <p:cTn id="4" fill="hold">
+                            <p:stCondLst>
+                              <p:cond delay="0"/>
+                            </p:stCondLst>
+                            <p:childTnLst>
+                              <p:par>
+                                <p:cTn id="5" presetID="1" presetClass="mediacall" presetSubtype="0" fill="hold" nodeType="afterEffect">
+                                  <p:stCondLst>
+                                    <p:cond delay="0"/>
+                                  </p:stCondLst>
+                                  <p:childTnLst>
+                                    <p:cmd type="call" cmd="playFrom(0.0)">
+                                      <p:cBhvr>
+                                        <p:cTn id="6" dur="1" fill="hold"/>
+                                        <p:tgtEl>
+                                          <p:spTgt spid="3"/>
+                                        </p:tgtEl>
+                                      </p:cBhvr>
+                                    </p:cmd>
+                                  </p:childTnLst>
+                                </p:cTn>
+                              </p:par>
+                            </p:childTnLst>
+                          </p:cTn>
+                        </p:par>
+                      </p:childTnLst>
+                    </p:cTn>
+                  </p:par>
+                </p:childTnLst>
+              </p:cTn>
+              <p:prevCondLst>
+                <p:cond evt="onPrev" delay="0">
+                  <p:tgtEl>
+                    <p:sldTgt/>
+                  </p:tgtEl>
+                </p:cond>
+              </p:prevCondLst>
+              <p:nextCondLst>
+                <p:cond evt="onNext" delay="0">
+                  <p:tgtEl>
+                    <p:sldTgt/>
+                  </p:tgtEl>
+                </p:cond>
+              </p:nextCondLst>
+            </p:seq>
+            <p:audio isNarration="1">
+              <p:cMediaNode vol="80000" showWhenStopped="0">
+                <p:cTn id="7" fill="hold" display="0">
+                  <p:stCondLst>
+                    <p:cond delay="indefinite"/>
+                  </p:stCondLst>
+                  <p:endCondLst>
+                    <p:cond evt="onStopAudio" delay="0">
+                      <p:tgtEl>
+                        <p:sldTgt/>
+                      </p:tgtEl>
+                    </p:cond>
+                  </p:endCondLst>
+                </p:cTn>
+                <p:tgtEl>
+                  <p:spTgt spid="3"/>
+                </p:tgtEl>
+              </p:cMediaNode>
+            </p:audio>
+          </p:childTnLst>
+        </p:cTn>
       </p:par>
     </p:tnLst>
   </p:timing>
@@ -4346,7 +4570,9 @@
       </p:grpSpPr>
       <p:sp>
         <p:nvSpPr>
-          <p:cNvPr id="10" name="文本框 9"/>
+          <p:cNvPr id="10" name="文本框 9">
+            <a:hlinkClick r:id="rId5"/>
+          </p:cNvPr>
           <p:cNvSpPr txBox="1"/>
           <p:nvPr/>
         </p:nvSpPr>
@@ -4377,9 +4603,18 @@
                 <a:latin typeface="微软雅黑" panose="020B0503020204020204" pitchFamily="34" charset="-122"/>
                 <a:ea typeface="微软雅黑" panose="020B0503020204020204" pitchFamily="34" charset="-122"/>
                 <a:sym typeface="+mn-ea"/>
+                <a:hlinkClick r:id="rId5"/>
               </a:rPr>
               <a:t>THANKS</a:t>
             </a:r>
+            <a:endParaRPr lang="en-US" altLang="zh-CN" sz="7200" dirty="0">
+              <a:solidFill>
+                <a:srgbClr val="33495E"/>
+              </a:solidFill>
+              <a:latin typeface="微软雅黑" panose="020B0503020204020204" pitchFamily="34" charset="-122"/>
+              <a:ea typeface="微软雅黑" panose="020B0503020204020204" pitchFamily="34" charset="-122"/>
+              <a:sym typeface="+mn-ea"/>
+            </a:endParaRPr>
           </a:p>
         </p:txBody>
       </p:sp>
@@ -4417,11 +4652,110 @@
                 <a:ea typeface="微软雅黑" panose="020B0503020204020204" pitchFamily="34" charset="-122"/>
                 <a:sym typeface="+mn-ea"/>
               </a:rPr>
-              <a:t>敬请批评指正</a:t>
-            </a:r>
-          </a:p>
-        </p:txBody>
-      </p:sp>
+              <a:t>敬请</a:t>
+            </a:r>
+            <a:r>
+              <a:rPr lang="zh-CN" altLang="en-US" sz="3200" dirty="0" smtClean="0">
+                <a:solidFill>
+                  <a:srgbClr val="33495E"/>
+                </a:solidFill>
+                <a:latin typeface="微软雅黑" panose="020B0503020204020204" pitchFamily="34" charset="-122"/>
+                <a:ea typeface="微软雅黑" panose="020B0503020204020204" pitchFamily="34" charset="-122"/>
+                <a:sym typeface="+mn-ea"/>
+              </a:rPr>
+              <a:t>批评指正</a:t>
+            </a:r>
+            <a:endParaRPr lang="zh-CN" altLang="en-US" sz="3200" dirty="0">
+              <a:solidFill>
+                <a:srgbClr val="33495E"/>
+              </a:solidFill>
+              <a:latin typeface="微软雅黑" panose="020B0503020204020204" pitchFamily="34" charset="-122"/>
+              <a:ea typeface="微软雅黑" panose="020B0503020204020204" pitchFamily="34" charset="-122"/>
+              <a:sym typeface="+mn-ea"/>
+            </a:endParaRPr>
+          </a:p>
+        </p:txBody>
+      </p:sp>
+      <p:sp>
+        <p:nvSpPr>
+          <p:cNvPr id="4" name="文本框 1"/>
+          <p:cNvSpPr txBox="1"/>
+          <p:nvPr/>
+        </p:nvSpPr>
+        <p:spPr>
+          <a:xfrm>
+            <a:off x="5868969" y="4312145"/>
+            <a:ext cx="2810563" cy="315471"/>
+          </a:xfrm>
+          <a:prstGeom prst="rect">
+            <a:avLst/>
+          </a:prstGeom>
+          <a:noFill/>
+        </p:spPr>
+        <p:txBody>
+          <a:bodyPr wrap="square" lIns="68580" tIns="34290" rIns="68580" bIns="34290" rtlCol="0">
+            <a:spAutoFit/>
+          </a:bodyPr>
+          <a:lstStyle/>
+          <a:p>
+            <a:pPr algn="ctr">
+              <a:defRPr/>
+            </a:pPr>
+            <a:r>
+              <a:rPr lang="en-US" altLang="zh-CN" sz="1600" dirty="0" smtClean="0">
+                <a:solidFill>
+                  <a:srgbClr val="00B050"/>
+                </a:solidFill>
+                <a:latin typeface="微软雅黑" panose="020B0503020204020204" pitchFamily="34" charset="-122"/>
+                <a:ea typeface="微软雅黑" panose="020B0503020204020204" pitchFamily="34" charset="-122"/>
+                <a:sym typeface="+mn-ea"/>
+              </a:rPr>
+              <a:t>yuqin9999@dingtalk.com</a:t>
+            </a:r>
+            <a:endParaRPr lang="zh-CN" altLang="en-US" sz="1600" dirty="0">
+              <a:solidFill>
+                <a:srgbClr val="00B050"/>
+              </a:solidFill>
+              <a:latin typeface="微软雅黑" panose="020B0503020204020204" pitchFamily="34" charset="-122"/>
+              <a:ea typeface="微软雅黑" panose="020B0503020204020204" pitchFamily="34" charset="-122"/>
+              <a:sym typeface="+mn-ea"/>
+            </a:endParaRPr>
+          </a:p>
+        </p:txBody>
+      </p:sp>
+      <p:pic>
+        <p:nvPicPr>
+          <p:cNvPr id="3" name="Audio 2">
+            <a:hlinkClick r:id="" action="ppaction://media"/>
+          </p:cNvPr>
+          <p:cNvPicPr>
+            <a:picLocks noChangeAspect="1"/>
+          </p:cNvPicPr>
+          <p:nvPr>
+            <a:audioFile r:link="rId2"/>
+            <p:extLst>
+              <p:ext uri="{DAA4B4D4-6D71-4841-9C94-3DE7FCFB9230}">
+                <p14:media xmlns:p14="http://schemas.microsoft.com/office/powerpoint/2010/main" r:embed="rId1"/>
+              </p:ext>
+            </p:extLst>
+          </p:nvPr>
+        </p:nvPicPr>
+        <p:blipFill>
+          <a:blip r:embed="rId6"/>
+          <a:stretch>
+            <a:fillRect/>
+          </a:stretch>
+        </p:blipFill>
+        <p:spPr>
+          <a:xfrm>
+            <a:off x="8521700" y="4521200"/>
+            <a:ext cx="406400" cy="406400"/>
+          </a:xfrm>
+          <a:prstGeom prst="rect">
+            <a:avLst/>
+          </a:prstGeom>
+        </p:spPr>
+      </p:pic>
     </p:spTree>
     <p:extLst>
       <p:ext uri="{BB962C8B-B14F-4D97-AF65-F5344CB8AC3E}">
@@ -4432,14 +4766,14 @@
   <p:clrMapOvr>
     <a:masterClrMapping/>
   </p:clrMapOvr>
-  <mc:AlternateContent xmlns:mc="http://schemas.openxmlformats.org/markup-compatibility/2006" xmlns:p14="http://schemas.microsoft.com/office/powerpoint/2010/main">
-    <mc:Choice Requires="p14">
-      <p:transition spd="slow" p14:dur="900">
+  <mc:AlternateContent xmlns:mc="http://schemas.openxmlformats.org/markup-compatibility/2006">
+    <mc:Choice xmlns:p14="http://schemas.microsoft.com/office/powerpoint/2010/main" Requires="p14">
+      <p:transition spd="slow" p14:dur="900" advTm="395">
         <p14:warp/>
       </p:transition>
     </mc:Choice>
-    <mc:Fallback xmlns="">
-      <p:transition spd="slow">
+    <mc:Fallback>
+      <p:transition spd="slow" advTm="395">
         <p:fade/>
       </p:transition>
     </mc:Fallback>
@@ -4447,7 +4781,87 @@
   <p:timing>
     <p:tnLst>
       <p:par>
-        <p:cTn id="1" dur="indefinite" restart="never" nodeType="tmRoot"/>
+        <p:cTn id="1" dur="indefinite" restart="never" nodeType="tmRoot">
+          <p:childTnLst>
+            <p:seq concurrent="1" nextAc="seek">
+              <p:cTn id="2" dur="indefinite" nodeType="mainSeq">
+                <p:childTnLst>
+                  <p:par>
+                    <p:cTn id="3" fill="hold">
+                      <p:stCondLst>
+                        <p:cond delay="indefinite"/>
+                        <p:cond evt="onBegin" delay="0">
+                          <p:tn val="2"/>
+                        </p:cond>
+                      </p:stCondLst>
+                      <p:childTnLst>
+                        <p:par>
+                          <p:cTn id="4" fill="hold">
+                            <p:stCondLst>
+                              <p:cond delay="0"/>
+                            </p:stCondLst>
+                            <p:childTnLst>
+                              <p:par>
+                                <p:cTn id="5" presetID="1" presetClass="mediacall" presetSubtype="0" fill="hold" nodeType="afterEffect">
+                                  <p:stCondLst>
+                                    <p:cond delay="0"/>
+                                  </p:stCondLst>
+                                  <p:childTnLst>
+                                    <p:cmd type="call" cmd="playFrom(0.0)">
+                                      <p:cBhvr>
+                                        <p:cTn id="6" dur="1" fill="hold"/>
+                                        <p:tgtEl>
+                                          <p:spTgt spid="3"/>
+                                        </p:tgtEl>
+                                      </p:cBhvr>
+                                    </p:cmd>
+                                  </p:childTnLst>
+                                </p:cTn>
+                              </p:par>
+                            </p:childTnLst>
+                          </p:cTn>
+                        </p:par>
+                      </p:childTnLst>
+                    </p:cTn>
+                  </p:par>
+                </p:childTnLst>
+              </p:cTn>
+              <p:prevCondLst>
+                <p:cond evt="onPrev" delay="0">
+                  <p:tgtEl>
+                    <p:sldTgt/>
+                  </p:tgtEl>
+                </p:cond>
+              </p:prevCondLst>
+              <p:nextCondLst>
+                <p:cond evt="onNext" delay="0">
+                  <p:tgtEl>
+                    <p:sldTgt/>
+                  </p:tgtEl>
+                </p:cond>
+              </p:nextCondLst>
+            </p:seq>
+            <p:audio isNarration="1">
+              <p:cMediaNode vol="80000" showWhenStopped="0">
+                <p:cTn id="7" fill="hold" display="0">
+                  <p:stCondLst>
+                    <p:cond delay="indefinite"/>
+                  </p:stCondLst>
+                  <p:endCondLst>
+                    <p:cond evt="onStopAudio" delay="0">
+                      <p:tgtEl>
+                        <p:sldTgt/>
+                      </p:tgtEl>
+                    </p:cond>
+                  </p:endCondLst>
+                </p:cTn>
+                <p:tgtEl>
+                  <p:spTgt spid="3"/>
+                </p:tgtEl>
+              </p:cMediaNode>
+            </p:audio>
+          </p:childTnLst>
+        </p:cTn>
       </p:par>
     </p:tnLst>
   </p:timing>
@@ -4480,7 +4894,7 @@
           <p:nvPr/>
         </p:nvPicPr>
         <p:blipFill>
-          <a:blip r:embed="rId3"/>
+          <a:blip r:embed="rId5"/>
           <a:stretch>
             <a:fillRect/>
           </a:stretch>
@@ -4558,7 +4972,7 @@
           <p:nvPr/>
         </p:nvPicPr>
         <p:blipFill>
-          <a:blip r:embed="rId4"/>
+          <a:blip r:embed="rId6"/>
           <a:stretch>
             <a:fillRect/>
           </a:stretch>
@@ -4643,6 +5057,39 @@
           </a:p>
         </p:txBody>
       </p:sp>
+      <p:pic>
+        <p:nvPicPr>
+          <p:cNvPr id="3" name="Audio 2">
+            <a:hlinkClick r:id="" action="ppaction://media"/>
+          </p:cNvPr>
+          <p:cNvPicPr>
+            <a:picLocks noChangeAspect="1"/>
+          </p:cNvPicPr>
+          <p:nvPr>
+            <a:audioFile r:link="rId2"/>
+            <p:extLst>
+              <p:ext uri="{DAA4B4D4-6D71-4841-9C94-3DE7FCFB9230}">
+                <p14:media xmlns:p14="http://schemas.microsoft.com/office/powerpoint/2010/main" r:embed="rId1"/>
+              </p:ext>
+            </p:extLst>
+          </p:nvPr>
+        </p:nvPicPr>
+        <p:blipFill>
+          <a:blip r:embed="rId7"/>
+          <a:stretch>
+            <a:fillRect/>
+          </a:stretch>
+        </p:blipFill>
+        <p:spPr>
+          <a:xfrm>
+            <a:off x="8521700" y="4521200"/>
+            <a:ext cx="406400" cy="406400"/>
+          </a:xfrm>
+          <a:prstGeom prst="rect">
+            <a:avLst/>
+          </a:prstGeom>
+        </p:spPr>
+      </p:pic>
     </p:spTree>
     <p:extLst>
       <p:ext uri="{BB962C8B-B14F-4D97-AF65-F5344CB8AC3E}">
@@ -4653,14 +5100,14 @@
   <p:clrMapOvr>
     <a:masterClrMapping/>
   </p:clrMapOvr>
-  <mc:AlternateContent xmlns:mc="http://schemas.openxmlformats.org/markup-compatibility/2006" xmlns:p15="http://schemas.microsoft.com/office/powerpoint/2012/main">
-    <mc:Choice Requires="p15">
-      <p:transition xmlns:p14="http://schemas.microsoft.com/office/powerpoint/2010/main" spd="slow" p14:dur="1250">
+  <mc:AlternateContent xmlns:mc="http://schemas.openxmlformats.org/markup-compatibility/2006">
+    <mc:Choice xmlns:p15="http://schemas.microsoft.com/office/powerpoint/2012/main" Requires="p15">
+      <p:transition xmlns:p14="http://schemas.microsoft.com/office/powerpoint/2010/main" spd="slow" p14:dur="1250" advTm="448">
         <p15:prstTrans prst="peelOff"/>
       </p:transition>
     </mc:Choice>
-    <mc:Fallback xmlns="">
-      <p:transition spd="slow">
+    <mc:Fallback>
+      <p:transition spd="slow" advTm="448">
         <p:fade/>
       </p:transition>
     </mc:Fallback>
@@ -4668,7 +5115,87 @@
   <p:timing>
     <p:tnLst>
       <p:par>
-        <p:cTn id="1" dur="indefinite" restart="never" nodeType="tmRoot"/>
+        <p:cTn id="1" dur="indefinite" restart="never" nodeType="tmRoot">
+          <p:childTnLst>
+            <p:seq concurrent="1" nextAc="seek">
+              <p:cTn id="2" dur="indefinite" nodeType="mainSeq">
+                <p:childTnLst>
+                  <p:par>
+                    <p:cTn id="3" fill="hold">
+                      <p:stCondLst>
+                        <p:cond delay="indefinite"/>
+                        <p:cond evt="onBegin" delay="0">
+                          <p:tn val="2"/>
+                        </p:cond>
+                      </p:stCondLst>
+                      <p:childTnLst>
+                        <p:par>
+                          <p:cTn id="4" fill="hold">
+                            <p:stCondLst>
+                              <p:cond delay="0"/>
+                            </p:stCondLst>
+                            <p:childTnLst>
+                              <p:par>
+                                <p:cTn id="5" presetID="1" presetClass="mediacall" presetSubtype="0" fill="hold" nodeType="afterEffect">
+                                  <p:stCondLst>
+                                    <p:cond delay="0"/>
+                                  </p:stCondLst>
+                                  <p:childTnLst>
+                                    <p:cmd type="call" cmd="playFrom(0.0)">
+                                      <p:cBhvr>
+                                        <p:cTn id="6" dur="1" fill="hold"/>
+                                        <p:tgtEl>
+                                          <p:spTgt spid="3"/>
+                                        </p:tgtEl>
+                                      </p:cBhvr>
+                                    </p:cmd>
+                                  </p:childTnLst>
+                                </p:cTn>
+                              </p:par>
+                            </p:childTnLst>
+                          </p:cTn>
+                        </p:par>
+                      </p:childTnLst>
+                    </p:cTn>
+                  </p:par>
+                </p:childTnLst>
+              </p:cTn>
+              <p:prevCondLst>
+                <p:cond evt="onPrev" delay="0">
+                  <p:tgtEl>
+                    <p:sldTgt/>
+                  </p:tgtEl>
+                </p:cond>
+              </p:prevCondLst>
+              <p:nextCondLst>
+                <p:cond evt="onNext" delay="0">
+                  <p:tgtEl>
+                    <p:sldTgt/>
+                  </p:tgtEl>
+                </p:cond>
+              </p:nextCondLst>
+            </p:seq>
+            <p:audio isNarration="1">
+              <p:cMediaNode vol="80000" showWhenStopped="0">
+                <p:cTn id="7" fill="hold" display="0">
+                  <p:stCondLst>
+                    <p:cond delay="indefinite"/>
+                  </p:stCondLst>
+                  <p:endCondLst>
+                    <p:cond evt="onStopAudio" delay="0">
+                      <p:tgtEl>
+                        <p:sldTgt/>
+                      </p:tgtEl>
+                    </p:cond>
+                  </p:endCondLst>
+                </p:cTn>
+                <p:tgtEl>
+                  <p:spTgt spid="3"/>
+                </p:tgtEl>
+              </p:cMediaNode>
+            </p:audio>
+          </p:childTnLst>
+        </p:cTn>
       </p:par>
     </p:tnLst>
   </p:timing>
@@ -4701,7 +5228,7 @@
           <p:nvPr/>
         </p:nvPicPr>
         <p:blipFill>
-          <a:blip r:embed="rId3">
+          <a:blip r:embed="rId5">
             <a:extLst>
               <a:ext uri="{28A0092B-C50C-407E-A947-70E740481C1C}">
                 <a14:useLocalDpi xmlns:a14="http://schemas.microsoft.com/office/drawing/2010/main" val="0"/>
@@ -4799,6 +5326,39 @@
           </a:p>
         </p:txBody>
       </p:sp>
+      <p:pic>
+        <p:nvPicPr>
+          <p:cNvPr id="3" name="Audio 2">
+            <a:hlinkClick r:id="" action="ppaction://media"/>
+          </p:cNvPr>
+          <p:cNvPicPr>
+            <a:picLocks noChangeAspect="1"/>
+          </p:cNvPicPr>
+          <p:nvPr>
+            <a:audioFile r:link="rId2"/>
+            <p:extLst>
+              <p:ext uri="{DAA4B4D4-6D71-4841-9C94-3DE7FCFB9230}">
+                <p14:media xmlns:p14="http://schemas.microsoft.com/office/powerpoint/2010/main" r:embed="rId1"/>
+              </p:ext>
+            </p:extLst>
+          </p:nvPr>
+        </p:nvPicPr>
+        <p:blipFill>
+          <a:blip r:embed="rId6"/>
+          <a:stretch>
+            <a:fillRect/>
+          </a:stretch>
+        </p:blipFill>
+        <p:spPr>
+          <a:xfrm>
+            <a:off x="8521700" y="4521200"/>
+            <a:ext cx="406400" cy="406400"/>
+          </a:xfrm>
+          <a:prstGeom prst="rect">
+            <a:avLst/>
+          </a:prstGeom>
+        </p:spPr>
+      </p:pic>
     </p:spTree>
     <p:extLst>
       <p:ext uri="{BB962C8B-B14F-4D97-AF65-F5344CB8AC3E}">
@@ -4809,14 +5369,14 @@
   <p:clrMapOvr>
     <a:masterClrMapping/>
   </p:clrMapOvr>
-  <mc:AlternateContent xmlns:mc="http://schemas.openxmlformats.org/markup-compatibility/2006" xmlns:p14="http://schemas.microsoft.com/office/powerpoint/2010/main">
-    <mc:Choice Requires="p14">
-      <p:transition spd="slow" p14:dur="1500">
+  <mc:AlternateContent xmlns:mc="http://schemas.openxmlformats.org/markup-compatibility/2006">
+    <mc:Choice xmlns:p14="http://schemas.microsoft.com/office/powerpoint/2010/main" Requires="p14">
+      <p:transition spd="slow" p14:dur="1500" advTm="271">
         <p14:ripple dir="lu"/>
       </p:transition>
     </mc:Choice>
-    <mc:Fallback xmlns="">
-      <p:transition spd="slow">
+    <mc:Fallback>
+      <p:transition spd="slow" advTm="271">
         <p:fade/>
       </p:transition>
     </mc:Fallback>
@@ -4824,7 +5384,87 @@
   <p:timing>
     <p:tnLst>
       <p:par>
-        <p:cTn id="1" dur="indefinite" restart="never" nodeType="tmRoot"/>
+        <p:cTn id="1" dur="indefinite" restart="never" nodeType="tmRoot">
+          <p:childTnLst>
+            <p:seq concurrent="1" nextAc="seek">
+              <p:cTn id="2" dur="indefinite" nodeType="mainSeq">
+                <p:childTnLst>
+                  <p:par>
+                    <p:cTn id="3" fill="hold">
+                      <p:stCondLst>
+                        <p:cond delay="indefinite"/>
+                        <p:cond evt="onBegin" delay="0">
+                          <p:tn val="2"/>
+                        </p:cond>
+                      </p:stCondLst>
+                      <p:childTnLst>
+                        <p:par>
+                          <p:cTn id="4" fill="hold">
+                            <p:stCondLst>
+                              <p:cond delay="0"/>
+                            </p:stCondLst>
+                            <p:childTnLst>
+                              <p:par>
+                                <p:cTn id="5" presetID="1" presetClass="mediacall" presetSubtype="0" fill="hold" nodeType="afterEffect">
+                                  <p:stCondLst>
+                                    <p:cond delay="0"/>
+                                  </p:stCondLst>
+                                  <p:childTnLst>
+                                    <p:cmd type="call" cmd="playFrom(0.0)">
+                                      <p:cBhvr>
+                                        <p:cTn id="6" dur="1" fill="hold"/>
+                                        <p:tgtEl>
+                                          <p:spTgt spid="3"/>
+                                        </p:tgtEl>
+                                      </p:cBhvr>
+                                    </p:cmd>
+                                  </p:childTnLst>
+                                </p:cTn>
+                              </p:par>
+                            </p:childTnLst>
+                          </p:cTn>
+                        </p:par>
+                      </p:childTnLst>
+                    </p:cTn>
+                  </p:par>
+                </p:childTnLst>
+              </p:cTn>
+              <p:prevCondLst>
+                <p:cond evt="onPrev" delay="0">
+                  <p:tgtEl>
+                    <p:sldTgt/>
+                  </p:tgtEl>
+                </p:cond>
+              </p:prevCondLst>
+              <p:nextCondLst>
+                <p:cond evt="onNext" delay="0">
+                  <p:tgtEl>
+                    <p:sldTgt/>
+                  </p:tgtEl>
+                </p:cond>
+              </p:nextCondLst>
+            </p:seq>
+            <p:audio isNarration="1">
+              <p:cMediaNode vol="80000" showWhenStopped="0">
+                <p:cTn id="7" fill="hold" display="0">
+                  <p:stCondLst>
+                    <p:cond delay="indefinite"/>
+                  </p:stCondLst>
+                  <p:endCondLst>
+                    <p:cond evt="onStopAudio" delay="0">
+                      <p:tgtEl>
+                        <p:sldTgt/>
+                      </p:tgtEl>
+                    </p:cond>
+                  </p:endCondLst>
+                </p:cTn>
+                <p:tgtEl>
+                  <p:spTgt spid="3"/>
+                </p:tgtEl>
+              </p:cMediaNode>
+            </p:audio>
+          </p:childTnLst>
+        </p:cTn>
       </p:par>
     </p:tnLst>
   </p:timing>
@@ -4871,6 +5511,17 @@
           <a:lstStyle/>
           <a:p>
             <a:r>
+              <a:rPr lang="zh-CN" altLang="en-US" sz="1800" dirty="0" smtClean="0">
+                <a:solidFill>
+                  <a:srgbClr val="33495E"/>
+                </a:solidFill>
+                <a:latin typeface="微软雅黑" panose="020B0503020204020204" pitchFamily="34" charset="-122"/>
+                <a:ea typeface="微软雅黑" panose="020B0503020204020204" pitchFamily="34" charset="-122"/>
+                <a:sym typeface="+mn-ea"/>
+              </a:rPr>
+              <a:t>教育</a:t>
+            </a:r>
+            <a:r>
               <a:rPr lang="zh-CN" altLang="en-US" sz="1800" dirty="0">
                 <a:solidFill>
                   <a:srgbClr val="33495E"/>
@@ -4879,7 +5530,29 @@
                 <a:ea typeface="微软雅黑" panose="020B0503020204020204" pitchFamily="34" charset="-122"/>
                 <a:sym typeface="+mn-ea"/>
               </a:rPr>
-              <a:t>教育计算思维的具体案例</a:t>
+              <a:t>数字</a:t>
+            </a:r>
+            <a:r>
+              <a:rPr lang="zh-CN" altLang="en-US" sz="1800" dirty="0" smtClean="0">
+                <a:solidFill>
+                  <a:srgbClr val="33495E"/>
+                </a:solidFill>
+                <a:latin typeface="微软雅黑" panose="020B0503020204020204" pitchFamily="34" charset="-122"/>
+                <a:ea typeface="微软雅黑" panose="020B0503020204020204" pitchFamily="34" charset="-122"/>
+                <a:sym typeface="+mn-ea"/>
+              </a:rPr>
+              <a:t>思维</a:t>
+            </a:r>
+            <a:r>
+              <a:rPr lang="zh-CN" altLang="en-US" sz="1800" dirty="0">
+                <a:solidFill>
+                  <a:srgbClr val="33495E"/>
+                </a:solidFill>
+                <a:latin typeface="微软雅黑" panose="020B0503020204020204" pitchFamily="34" charset="-122"/>
+                <a:ea typeface="微软雅黑" panose="020B0503020204020204" pitchFamily="34" charset="-122"/>
+                <a:sym typeface="+mn-ea"/>
+              </a:rPr>
+              <a:t>的具体案例</a:t>
             </a:r>
           </a:p>
         </p:txBody>
@@ -4893,7 +5566,7 @@
         <p:spPr>
           <a:xfrm>
             <a:off x="580032" y="1138048"/>
-            <a:ext cx="8132168" cy="3901068"/>
+            <a:ext cx="8132168" cy="4239622"/>
           </a:xfrm>
           <a:prstGeom prst="rect">
             <a:avLst/>
@@ -4923,7 +5596,27 @@
                 <a:latin typeface="微软雅黑" panose="020B0503020204020204" pitchFamily="34" charset="-122"/>
                 <a:ea typeface="微软雅黑" panose="020B0503020204020204" pitchFamily="34" charset="-122"/>
               </a:rPr>
-              <a:t>计算思维教育，即，“计算机</a:t>
+              <a:t>数字</a:t>
+            </a:r>
+            <a:r>
+              <a:rPr lang="zh-CN" altLang="en-US" sz="2200" dirty="0" smtClean="0">
+                <a:solidFill>
+                  <a:srgbClr val="00B0F0"/>
+                </a:solidFill>
+                <a:latin typeface="微软雅黑" panose="020B0503020204020204" pitchFamily="34" charset="-122"/>
+                <a:ea typeface="微软雅黑" panose="020B0503020204020204" pitchFamily="34" charset="-122"/>
+              </a:rPr>
+              <a:t>思维</a:t>
+            </a:r>
+            <a:r>
+              <a:rPr lang="zh-CN" altLang="en-US" sz="2200" dirty="0">
+                <a:solidFill>
+                  <a:srgbClr val="00B0F0"/>
+                </a:solidFill>
+                <a:latin typeface="微软雅黑" panose="020B0503020204020204" pitchFamily="34" charset="-122"/>
+                <a:ea typeface="微软雅黑" panose="020B0503020204020204" pitchFamily="34" charset="-122"/>
+              </a:rPr>
+              <a:t>教育，即，“计算机</a:t>
             </a:r>
             <a:r>
               <a:rPr lang="en-US" altLang="zh-CN" sz="2200" dirty="0">
@@ -4963,7 +5656,27 @@
                 <a:latin typeface="微软雅黑" panose="020B0503020204020204" pitchFamily="34" charset="-122"/>
                 <a:ea typeface="微软雅黑" panose="020B0503020204020204" pitchFamily="34" charset="-122"/>
               </a:rPr>
-              <a:t>的语言”隐喻“人脑平台的字符</a:t>
+              <a:t>的</a:t>
+            </a:r>
+            <a:r>
+              <a:rPr lang="zh-CN" altLang="en-US" sz="2200" dirty="0" smtClean="0">
+                <a:solidFill>
+                  <a:srgbClr val="00B0F0"/>
+                </a:solidFill>
+                <a:latin typeface="微软雅黑" panose="020B0503020204020204" pitchFamily="34" charset="-122"/>
+                <a:ea typeface="微软雅黑" panose="020B0503020204020204" pitchFamily="34" charset="-122"/>
+              </a:rPr>
+              <a:t>语言计算”</a:t>
+            </a:r>
+            <a:r>
+              <a:rPr lang="zh-CN" altLang="en-US" sz="2200" dirty="0">
+                <a:solidFill>
+                  <a:srgbClr val="00B0F0"/>
+                </a:solidFill>
+                <a:latin typeface="微软雅黑" panose="020B0503020204020204" pitchFamily="34" charset="-122"/>
+                <a:ea typeface="微软雅黑" panose="020B0503020204020204" pitchFamily="34" charset="-122"/>
+              </a:rPr>
+              <a:t>隐喻“人脑平台的字符</a:t>
             </a:r>
             <a:r>
               <a:rPr lang="en-US" altLang="zh-CN" sz="2200" dirty="0">
@@ -4983,7 +5696,47 @@
                 <a:latin typeface="微软雅黑" panose="020B0503020204020204" pitchFamily="34" charset="-122"/>
                 <a:ea typeface="微软雅黑" panose="020B0503020204020204" pitchFamily="34" charset="-122"/>
               </a:rPr>
-              <a:t>非字符的语言”这一计算思维本质及其扩展，被用作教育的内容。</a:t>
+              <a:t>非字符的</a:t>
+            </a:r>
+            <a:r>
+              <a:rPr lang="zh-CN" altLang="en-US" sz="2200" dirty="0" smtClean="0">
+                <a:solidFill>
+                  <a:srgbClr val="00B0F0"/>
+                </a:solidFill>
+                <a:latin typeface="微软雅黑" panose="020B0503020204020204" pitchFamily="34" charset="-122"/>
+                <a:ea typeface="微软雅黑" panose="020B0503020204020204" pitchFamily="34" charset="-122"/>
+              </a:rPr>
+              <a:t>语言计算”</a:t>
+            </a:r>
+            <a:r>
+              <a:rPr lang="zh-CN" altLang="en-US" sz="2200" dirty="0">
+                <a:solidFill>
+                  <a:srgbClr val="00B0F0"/>
+                </a:solidFill>
+                <a:latin typeface="微软雅黑" panose="020B0503020204020204" pitchFamily="34" charset="-122"/>
+                <a:ea typeface="微软雅黑" panose="020B0503020204020204" pitchFamily="34" charset="-122"/>
+              </a:rPr>
+              <a:t>这</a:t>
+            </a:r>
+            <a:r>
+              <a:rPr lang="zh-CN" altLang="en-US" sz="2200" dirty="0" smtClean="0">
+                <a:solidFill>
+                  <a:srgbClr val="00B0F0"/>
+                </a:solidFill>
+                <a:latin typeface="微软雅黑" panose="020B0503020204020204" pitchFamily="34" charset="-122"/>
+                <a:ea typeface="微软雅黑" panose="020B0503020204020204" pitchFamily="34" charset="-122"/>
+              </a:rPr>
+              <a:t>一数字思维本质</a:t>
+            </a:r>
+            <a:r>
+              <a:rPr lang="zh-CN" altLang="en-US" sz="2200" dirty="0">
+                <a:solidFill>
+                  <a:srgbClr val="00B0F0"/>
+                </a:solidFill>
+                <a:latin typeface="微软雅黑" panose="020B0503020204020204" pitchFamily="34" charset="-122"/>
+                <a:ea typeface="微软雅黑" panose="020B0503020204020204" pitchFamily="34" charset="-122"/>
+              </a:rPr>
+              <a:t>及其扩展，被用作教育的内容。</a:t>
             </a:r>
             <a:endParaRPr lang="en-US" altLang="zh-CN" sz="2200" dirty="0">
               <a:solidFill>
@@ -5022,7 +5775,27 @@
                 <a:latin typeface="微软雅黑" panose="020B0503020204020204" pitchFamily="34" charset="-122"/>
                 <a:ea typeface="微软雅黑" panose="020B0503020204020204" pitchFamily="34" charset="-122"/>
               </a:rPr>
-              <a:t>计算思维，即，“计算机</a:t>
+              <a:t>数字</a:t>
+            </a:r>
+            <a:r>
+              <a:rPr lang="zh-CN" altLang="en-US" sz="2200" dirty="0" smtClean="0">
+                <a:solidFill>
+                  <a:srgbClr val="0070C0"/>
+                </a:solidFill>
+                <a:latin typeface="微软雅黑" panose="020B0503020204020204" pitchFamily="34" charset="-122"/>
+                <a:ea typeface="微软雅黑" panose="020B0503020204020204" pitchFamily="34" charset="-122"/>
+              </a:rPr>
+              <a:t>思维</a:t>
+            </a:r>
+            <a:r>
+              <a:rPr lang="zh-CN" altLang="en-US" sz="2200" dirty="0">
+                <a:solidFill>
+                  <a:srgbClr val="0070C0"/>
+                </a:solidFill>
+                <a:latin typeface="微软雅黑" panose="020B0503020204020204" pitchFamily="34" charset="-122"/>
+                <a:ea typeface="微软雅黑" panose="020B0503020204020204" pitchFamily="34" charset="-122"/>
+              </a:rPr>
+              <a:t>，即，“计算机</a:t>
             </a:r>
             <a:r>
               <a:rPr lang="en-US" altLang="zh-CN" sz="2200" dirty="0">
@@ -5062,7 +5835,27 @@
                 <a:latin typeface="微软雅黑" panose="020B0503020204020204" pitchFamily="34" charset="-122"/>
                 <a:ea typeface="微软雅黑" panose="020B0503020204020204" pitchFamily="34" charset="-122"/>
               </a:rPr>
-              <a:t>序列的语言”隐喻“人脑平台的字符</a:t>
+              <a:t>序列的</a:t>
+            </a:r>
+            <a:r>
+              <a:rPr lang="zh-CN" altLang="en-US" sz="2200" dirty="0" smtClean="0">
+                <a:solidFill>
+                  <a:srgbClr val="0070C0"/>
+                </a:solidFill>
+                <a:latin typeface="微软雅黑" panose="020B0503020204020204" pitchFamily="34" charset="-122"/>
+                <a:ea typeface="微软雅黑" panose="020B0503020204020204" pitchFamily="34" charset="-122"/>
+              </a:rPr>
+              <a:t>语言计算”</a:t>
+            </a:r>
+            <a:r>
+              <a:rPr lang="zh-CN" altLang="en-US" sz="2200" dirty="0">
+                <a:solidFill>
+                  <a:srgbClr val="0070C0"/>
+                </a:solidFill>
+                <a:latin typeface="微软雅黑" panose="020B0503020204020204" pitchFamily="34" charset="-122"/>
+                <a:ea typeface="微软雅黑" panose="020B0503020204020204" pitchFamily="34" charset="-122"/>
+              </a:rPr>
+              <a:t>隐喻“人脑平台的字符</a:t>
             </a:r>
             <a:r>
               <a:rPr lang="en-US" altLang="zh-CN" sz="2200" dirty="0">
@@ -5082,7 +5875,47 @@
                 <a:latin typeface="微软雅黑" panose="020B0503020204020204" pitchFamily="34" charset="-122"/>
                 <a:ea typeface="微软雅黑" panose="020B0503020204020204" pitchFamily="34" charset="-122"/>
               </a:rPr>
-              <a:t>非字符的语言”这一计算思维本质及其扩展，被用作教育的方法</a:t>
+              <a:t>非字符的</a:t>
+            </a:r>
+            <a:r>
+              <a:rPr lang="zh-CN" altLang="en-US" sz="2200" dirty="0" smtClean="0">
+                <a:solidFill>
+                  <a:srgbClr val="0070C0"/>
+                </a:solidFill>
+                <a:latin typeface="微软雅黑" panose="020B0503020204020204" pitchFamily="34" charset="-122"/>
+                <a:ea typeface="微软雅黑" panose="020B0503020204020204" pitchFamily="34" charset="-122"/>
+              </a:rPr>
+              <a:t>语言计算”</a:t>
+            </a:r>
+            <a:r>
+              <a:rPr lang="zh-CN" altLang="en-US" sz="2200" dirty="0">
+                <a:solidFill>
+                  <a:srgbClr val="0070C0"/>
+                </a:solidFill>
+                <a:latin typeface="微软雅黑" panose="020B0503020204020204" pitchFamily="34" charset="-122"/>
+                <a:ea typeface="微软雅黑" panose="020B0503020204020204" pitchFamily="34" charset="-122"/>
+              </a:rPr>
+              <a:t>这</a:t>
+            </a:r>
+            <a:r>
+              <a:rPr lang="zh-CN" altLang="en-US" sz="2200" dirty="0" smtClean="0">
+                <a:solidFill>
+                  <a:srgbClr val="0070C0"/>
+                </a:solidFill>
+                <a:latin typeface="微软雅黑" panose="020B0503020204020204" pitchFamily="34" charset="-122"/>
+                <a:ea typeface="微软雅黑" panose="020B0503020204020204" pitchFamily="34" charset="-122"/>
+              </a:rPr>
+              <a:t>一数字思维本质</a:t>
+            </a:r>
+            <a:r>
+              <a:rPr lang="zh-CN" altLang="en-US" sz="2200" dirty="0">
+                <a:solidFill>
+                  <a:srgbClr val="0070C0"/>
+                </a:solidFill>
+                <a:latin typeface="微软雅黑" panose="020B0503020204020204" pitchFamily="34" charset="-122"/>
+                <a:ea typeface="微软雅黑" panose="020B0503020204020204" pitchFamily="34" charset="-122"/>
+              </a:rPr>
+              <a:t>及其扩展，被用作教育的方法</a:t>
             </a:r>
             <a:r>
               <a:rPr lang="zh-CN" altLang="en-US" sz="2200" dirty="0" smtClean="0">
@@ -5114,6 +5947,16 @@
               <a:buChar char="•"/>
             </a:pPr>
             <a:r>
+              <a:rPr lang="zh-CN" altLang="en-US" sz="2200" dirty="0" smtClean="0">
+                <a:solidFill>
+                  <a:srgbClr val="19B49B"/>
+                </a:solidFill>
+                <a:latin typeface="微软雅黑" panose="020B0503020204020204" pitchFamily="34" charset="-122"/>
+                <a:ea typeface="微软雅黑" panose="020B0503020204020204" pitchFamily="34" charset="-122"/>
+              </a:rPr>
+              <a:t>“教育数字思维”</a:t>
+            </a:r>
+            <a:r>
               <a:rPr lang="zh-CN" altLang="en-US" sz="2200" dirty="0">
                 <a:solidFill>
                   <a:srgbClr val="19B49B"/>
@@ -5121,7 +5964,7 @@
                 <a:latin typeface="微软雅黑" panose="020B0503020204020204" pitchFamily="34" charset="-122"/>
                 <a:ea typeface="微软雅黑" panose="020B0503020204020204" pitchFamily="34" charset="-122"/>
               </a:rPr>
-              <a:t>“教育计算思维”是当前数字化计算时代所需的教育思维。研究“教育计算思维”，在教育领域具有现实意义</a:t>
+              <a:t>是当前数字化计算时代所需的教育思维。研究</a:t>
             </a:r>
             <a:r>
               <a:rPr lang="zh-CN" altLang="en-US" sz="2200" dirty="0" smtClean="0">
@@ -5131,6 +5974,26 @@
                 <a:latin typeface="微软雅黑" panose="020B0503020204020204" pitchFamily="34" charset="-122"/>
                 <a:ea typeface="微软雅黑" panose="020B0503020204020204" pitchFamily="34" charset="-122"/>
               </a:rPr>
+              <a:t>“教育数字思维”</a:t>
+            </a:r>
+            <a:r>
+              <a:rPr lang="zh-CN" altLang="en-US" sz="2200" dirty="0">
+                <a:solidFill>
+                  <a:srgbClr val="19B49B"/>
+                </a:solidFill>
+                <a:latin typeface="微软雅黑" panose="020B0503020204020204" pitchFamily="34" charset="-122"/>
+                <a:ea typeface="微软雅黑" panose="020B0503020204020204" pitchFamily="34" charset="-122"/>
+              </a:rPr>
+              <a:t>，在教育领域具有现实意义</a:t>
+            </a:r>
+            <a:r>
+              <a:rPr lang="zh-CN" altLang="en-US" sz="2200" dirty="0" smtClean="0">
+                <a:solidFill>
+                  <a:srgbClr val="19B49B"/>
+                </a:solidFill>
+                <a:latin typeface="微软雅黑" panose="020B0503020204020204" pitchFamily="34" charset="-122"/>
+                <a:ea typeface="微软雅黑" panose="020B0503020204020204" pitchFamily="34" charset="-122"/>
+              </a:rPr>
               <a:t>。可提升</a:t>
             </a:r>
             <a:r>
@@ -5141,7 +6004,27 @@
                 <a:latin typeface="微软雅黑" panose="020B0503020204020204" pitchFamily="34" charset="-122"/>
                 <a:ea typeface="微软雅黑" panose="020B0503020204020204" pitchFamily="34" charset="-122"/>
               </a:rPr>
-              <a:t>教育思维的时代性、数字化、计算性，提升全民数字素养与</a:t>
+              <a:t>教育思维的时代性、数字化、计算</a:t>
+            </a:r>
+            <a:r>
+              <a:rPr lang="zh-CN" altLang="en-US" sz="2200" dirty="0" smtClean="0">
+                <a:solidFill>
+                  <a:srgbClr val="19B49B"/>
+                </a:solidFill>
+                <a:latin typeface="微软雅黑" panose="020B0503020204020204" pitchFamily="34" charset="-122"/>
+                <a:ea typeface="微软雅黑" panose="020B0503020204020204" pitchFamily="34" charset="-122"/>
+              </a:rPr>
+              <a:t>性、人工智能特性，</a:t>
+            </a:r>
+            <a:r>
+              <a:rPr lang="zh-CN" altLang="en-US" sz="2200" dirty="0">
+                <a:solidFill>
+                  <a:srgbClr val="19B49B"/>
+                </a:solidFill>
+                <a:latin typeface="微软雅黑" panose="020B0503020204020204" pitchFamily="34" charset="-122"/>
+                <a:ea typeface="微软雅黑" panose="020B0503020204020204" pitchFamily="34" charset="-122"/>
+              </a:rPr>
+              <a:t>提升全民数字素养与</a:t>
             </a:r>
             <a:r>
               <a:rPr lang="zh-CN" altLang="en-US" sz="2200" dirty="0" smtClean="0">
@@ -5228,6 +6111,39 @@
           </a:p>
         </p:txBody>
       </p:sp>
+      <p:pic>
+        <p:nvPicPr>
+          <p:cNvPr id="4" name="Audio 3">
+            <a:hlinkClick r:id="" action="ppaction://media"/>
+          </p:cNvPr>
+          <p:cNvPicPr>
+            <a:picLocks noChangeAspect="1"/>
+          </p:cNvPicPr>
+          <p:nvPr>
+            <a:audioFile r:link="rId2"/>
+            <p:extLst>
+              <p:ext uri="{DAA4B4D4-6D71-4841-9C94-3DE7FCFB9230}">
+                <p14:media xmlns:p14="http://schemas.microsoft.com/office/powerpoint/2010/main" r:embed="rId1"/>
+              </p:ext>
+            </p:extLst>
+          </p:nvPr>
+        </p:nvPicPr>
+        <p:blipFill>
+          <a:blip r:embed="rId5"/>
+          <a:stretch>
+            <a:fillRect/>
+          </a:stretch>
+        </p:blipFill>
+        <p:spPr>
+          <a:xfrm>
+            <a:off x="8521700" y="4521200"/>
+            <a:ext cx="406400" cy="406400"/>
+          </a:xfrm>
+          <a:prstGeom prst="rect">
+            <a:avLst/>
+          </a:prstGeom>
+        </p:spPr>
+      </p:pic>
     </p:spTree>
     <p:extLst>
       <p:ext uri="{BB962C8B-B14F-4D97-AF65-F5344CB8AC3E}">
@@ -5238,14 +6154,14 @@
   <p:clrMapOvr>
     <a:masterClrMapping/>
   </p:clrMapOvr>
-  <mc:AlternateContent xmlns:mc="http://schemas.openxmlformats.org/markup-compatibility/2006" xmlns:p15="http://schemas.microsoft.com/office/powerpoint/2012/main">
-    <mc:Choice Requires="p15">
-      <p:transition xmlns:p14="http://schemas.microsoft.com/office/powerpoint/2010/main" spd="slow" p14:dur="1250">
+  <mc:AlternateContent xmlns:mc="http://schemas.openxmlformats.org/markup-compatibility/2006">
+    <mc:Choice xmlns:p15="http://schemas.microsoft.com/office/powerpoint/2012/main" Requires="p15">
+      <p:transition xmlns:p14="http://schemas.microsoft.com/office/powerpoint/2010/main" spd="slow" p14:dur="1250" advTm="221">
         <p15:prstTrans prst="peelOff"/>
       </p:transition>
     </mc:Choice>
-    <mc:Fallback xmlns="">
-      <p:transition spd="slow">
+    <mc:Fallback>
+      <p:transition spd="slow" advTm="221">
         <p:fade/>
       </p:transition>
     </mc:Fallback>
@@ -5253,7 +6169,87 @@
   <p:timing>
     <p:tnLst>
       <p:par>
-        <p:cTn id="1" dur="indefinite" restart="never" nodeType="tmRoot"/>
+        <p:cTn id="1" dur="indefinite" restart="never" nodeType="tmRoot">
+          <p:childTnLst>
+            <p:seq concurrent="1" nextAc="seek">
+              <p:cTn id="2" dur="indefinite" nodeType="mainSeq">
+                <p:childTnLst>
+                  <p:par>
+                    <p:cTn id="3" fill="hold">
+                      <p:stCondLst>
+                        <p:cond delay="indefinite"/>
+                        <p:cond evt="onBegin" delay="0">
+                          <p:tn val="2"/>
+                        </p:cond>
+                      </p:stCondLst>
+                      <p:childTnLst>
+                        <p:par>
+                          <p:cTn id="4" fill="hold">
+                            <p:stCondLst>
+                              <p:cond delay="0"/>
+                            </p:stCondLst>
+                            <p:childTnLst>
+                              <p:par>
+                                <p:cTn id="5" presetID="1" presetClass="mediacall" presetSubtype="0" fill="hold" nodeType="afterEffect">
+                                  <p:stCondLst>
+                                    <p:cond delay="0"/>
+                                  </p:stCondLst>
+                                  <p:childTnLst>
+                                    <p:cmd type="call" cmd="playFrom(0.0)">
+                                      <p:cBhvr>
+                                        <p:cTn id="6" dur="1" fill="hold"/>
+                                        <p:tgtEl>
+                                          <p:spTgt spid="4"/>
+                                        </p:tgtEl>
+                                      </p:cBhvr>
+                                    </p:cmd>
+                                  </p:childTnLst>
+                                </p:cTn>
+                              </p:par>
+                            </p:childTnLst>
+                          </p:cTn>
+                        </p:par>
+                      </p:childTnLst>
+                    </p:cTn>
+                  </p:par>
+                </p:childTnLst>
+              </p:cTn>
+              <p:prevCondLst>
+                <p:cond evt="onPrev" delay="0">
+                  <p:tgtEl>
+                    <p:sldTgt/>
+                  </p:tgtEl>
+                </p:cond>
+              </p:prevCondLst>
+              <p:nextCondLst>
+                <p:cond evt="onNext" delay="0">
+                  <p:tgtEl>
+                    <p:sldTgt/>
+                  </p:tgtEl>
+                </p:cond>
+              </p:nextCondLst>
+            </p:seq>
+            <p:audio isNarration="1">
+              <p:cMediaNode vol="80000" showWhenStopped="0">
+                <p:cTn id="7" fill="hold" display="0">
+                  <p:stCondLst>
+                    <p:cond delay="indefinite"/>
+                  </p:stCondLst>
+                  <p:endCondLst>
+                    <p:cond evt="onStopAudio" delay="0">
+                      <p:tgtEl>
+                        <p:sldTgt/>
+                      </p:tgtEl>
+                    </p:cond>
+                  </p:endCondLst>
+                </p:cTn>
+                <p:tgtEl>
+                  <p:spTgt spid="4"/>
+                </p:tgtEl>
+              </p:cMediaNode>
+            </p:audio>
+          </p:childTnLst>
+        </p:cTn>
       </p:par>
     </p:tnLst>
   </p:timing>
@@ -5300,6 +6296,17 @@
           <a:lstStyle/>
           <a:p>
             <a:r>
+              <a:rPr lang="zh-CN" altLang="en-US" sz="1800" dirty="0" smtClean="0">
+                <a:solidFill>
+                  <a:srgbClr val="33495E"/>
+                </a:solidFill>
+                <a:latin typeface="微软雅黑" panose="020B0503020204020204" pitchFamily="34" charset="-122"/>
+                <a:ea typeface="微软雅黑" panose="020B0503020204020204" pitchFamily="34" charset="-122"/>
+                <a:sym typeface="+mn-ea"/>
+              </a:rPr>
+              <a:t>教育数字思维的</a:t>
+            </a:r>
+            <a:r>
               <a:rPr lang="zh-CN" altLang="en-US" sz="1800" dirty="0">
                 <a:solidFill>
                   <a:srgbClr val="33495E"/>
@@ -5308,7 +6315,7 @@
                 <a:ea typeface="微软雅黑" panose="020B0503020204020204" pitchFamily="34" charset="-122"/>
                 <a:sym typeface="+mn-ea"/>
               </a:rPr>
-              <a:t>教育计算思维的本质、科学原理</a:t>
+              <a:t>本质、科学原理</a:t>
             </a:r>
           </a:p>
         </p:txBody>
@@ -5365,7 +6372,27 @@
                 <a:latin typeface="微软雅黑" panose="020B0503020204020204" pitchFamily="34" charset="-122"/>
                 <a:ea typeface="微软雅黑" panose="020B0503020204020204" pitchFamily="34" charset="-122"/>
               </a:rPr>
-              <a:t>面向远古时代的）计算思维本质，即 ：“人脑的字符</a:t>
+              <a:t>面向远古时代的</a:t>
+            </a:r>
+            <a:r>
+              <a:rPr lang="zh-CN" altLang="en-US" sz="2700" dirty="0" smtClean="0">
+                <a:solidFill>
+                  <a:srgbClr val="19B49B"/>
+                </a:solidFill>
+                <a:latin typeface="微软雅黑" panose="020B0503020204020204" pitchFamily="34" charset="-122"/>
+                <a:ea typeface="微软雅黑" panose="020B0503020204020204" pitchFamily="34" charset="-122"/>
+              </a:rPr>
+              <a:t>）数字思维本质</a:t>
+            </a:r>
+            <a:r>
+              <a:rPr lang="zh-CN" altLang="en-US" sz="2700" dirty="0">
+                <a:solidFill>
+                  <a:srgbClr val="19B49B"/>
+                </a:solidFill>
+                <a:latin typeface="微软雅黑" panose="020B0503020204020204" pitchFamily="34" charset="-122"/>
+                <a:ea typeface="微软雅黑" panose="020B0503020204020204" pitchFamily="34" charset="-122"/>
+              </a:rPr>
+              <a:t>，即 ：“人脑的字符</a:t>
             </a:r>
             <a:r>
               <a:rPr lang="en-US" sz="2700" dirty="0">
@@ -5385,7 +6412,17 @@
                 <a:latin typeface="微软雅黑" panose="020B0503020204020204" pitchFamily="34" charset="-122"/>
                 <a:ea typeface="微软雅黑" panose="020B0503020204020204" pitchFamily="34" charset="-122"/>
               </a:rPr>
-              <a:t>非字符的语言”</a:t>
+              <a:t>非字符</a:t>
+            </a:r>
+            <a:r>
+              <a:rPr lang="zh-CN" altLang="en-US" sz="2700" dirty="0" smtClean="0">
+                <a:solidFill>
+                  <a:srgbClr val="19B49B"/>
+                </a:solidFill>
+                <a:latin typeface="微软雅黑" panose="020B0503020204020204" pitchFamily="34" charset="-122"/>
+                <a:ea typeface="微软雅黑" panose="020B0503020204020204" pitchFamily="34" charset="-122"/>
+              </a:rPr>
+              <a:t>的多重进制的多媒体语言计算”</a:t>
             </a:r>
             <a:r>
               <a:rPr lang="zh-CN" altLang="en-US" sz="2700" dirty="0" smtClean="0">
@@ -5427,7 +6464,27 @@
                 <a:latin typeface="微软雅黑" panose="020B0503020204020204" pitchFamily="34" charset="-122"/>
                 <a:ea typeface="微软雅黑" panose="020B0503020204020204" pitchFamily="34" charset="-122"/>
               </a:rPr>
-              <a:t>（面向图灵数字化计算时代的）计算思维本质，即：“计算机的</a:t>
+              <a:t>（面向图灵数字化计算时代的</a:t>
+            </a:r>
+            <a:r>
+              <a:rPr lang="zh-CN" altLang="en-US" sz="2700" dirty="0" smtClean="0">
+                <a:solidFill>
+                  <a:srgbClr val="0070C0"/>
+                </a:solidFill>
+                <a:latin typeface="微软雅黑" panose="020B0503020204020204" pitchFamily="34" charset="-122"/>
+                <a:ea typeface="微软雅黑" panose="020B0503020204020204" pitchFamily="34" charset="-122"/>
+              </a:rPr>
+              <a:t>）数字思维本质</a:t>
+            </a:r>
+            <a:r>
+              <a:rPr lang="zh-CN" altLang="en-US" sz="2700" dirty="0">
+                <a:solidFill>
+                  <a:srgbClr val="0070C0"/>
+                </a:solidFill>
+                <a:latin typeface="微软雅黑" panose="020B0503020204020204" pitchFamily="34" charset="-122"/>
+                <a:ea typeface="微软雅黑" panose="020B0503020204020204" pitchFamily="34" charset="-122"/>
+              </a:rPr>
+              <a:t>，即：“计算机的</a:t>
             </a:r>
             <a:r>
               <a:rPr lang="en-US" altLang="zh-CN" sz="2700" dirty="0">
@@ -5440,6 +6497,16 @@
               <a:t>0/1</a:t>
             </a:r>
             <a:r>
+              <a:rPr lang="zh-CN" altLang="en-US" sz="2700" dirty="0" smtClean="0">
+                <a:solidFill>
+                  <a:srgbClr val="0070C0"/>
+                </a:solidFill>
+                <a:latin typeface="微软雅黑" panose="020B0503020204020204" pitchFamily="34" charset="-122"/>
+                <a:ea typeface="微软雅黑" panose="020B0503020204020204" pitchFamily="34" charset="-122"/>
+              </a:rPr>
+              <a:t>的二进制的数字语言计算”</a:t>
+            </a:r>
+            <a:r>
               <a:rPr lang="zh-CN" altLang="en-US" sz="2700" dirty="0">
                 <a:solidFill>
                   <a:srgbClr val="0070C0"/>
@@ -5447,7 +6514,7 @@
                 <a:latin typeface="微软雅黑" panose="020B0503020204020204" pitchFamily="34" charset="-122"/>
                 <a:ea typeface="微软雅黑" panose="020B0503020204020204" pitchFamily="34" charset="-122"/>
               </a:rPr>
-              <a:t>的语言”。</a:t>
+              <a:t>。</a:t>
             </a:r>
             <a:endParaRPr lang="en-US" altLang="zh-CN" sz="2700" dirty="0">
               <a:solidFill>
@@ -5479,7 +6546,27 @@
                 <a:latin typeface="微软雅黑" panose="020B0503020204020204" pitchFamily="34" charset="-122"/>
                 <a:ea typeface="微软雅黑" panose="020B0503020204020204" pitchFamily="34" charset="-122"/>
               </a:rPr>
-              <a:t>（面向当前数字化计算时代的）计算思维的本质，即：“计算机</a:t>
+              <a:t>（面向当前数字化计算时代的</a:t>
+            </a:r>
+            <a:r>
+              <a:rPr lang="zh-CN" altLang="en-US" sz="2700" dirty="0" smtClean="0">
+                <a:solidFill>
+                  <a:srgbClr val="00B0F0"/>
+                </a:solidFill>
+                <a:latin typeface="微软雅黑" panose="020B0503020204020204" pitchFamily="34" charset="-122"/>
+                <a:ea typeface="微软雅黑" panose="020B0503020204020204" pitchFamily="34" charset="-122"/>
+              </a:rPr>
+              <a:t>）数字思维的</a:t>
+            </a:r>
+            <a:r>
+              <a:rPr lang="zh-CN" altLang="en-US" sz="2700" dirty="0">
+                <a:solidFill>
+                  <a:srgbClr val="00B0F0"/>
+                </a:solidFill>
+                <a:latin typeface="微软雅黑" panose="020B0503020204020204" pitchFamily="34" charset="-122"/>
+                <a:ea typeface="微软雅黑" panose="020B0503020204020204" pitchFamily="34" charset="-122"/>
+              </a:rPr>
+              <a:t>本质，即：“计算机</a:t>
             </a:r>
             <a:r>
               <a:rPr lang="en-US" altLang="zh-CN" sz="2700" dirty="0">
@@ -5512,6 +6599,16 @@
               <a:t>0/1</a:t>
             </a:r>
             <a:r>
+              <a:rPr lang="zh-CN" altLang="en-US" sz="2700" dirty="0" smtClean="0">
+                <a:solidFill>
+                  <a:srgbClr val="00B0F0"/>
+                </a:solidFill>
+                <a:latin typeface="微软雅黑" panose="020B0503020204020204" pitchFamily="34" charset="-122"/>
+                <a:ea typeface="微软雅黑" panose="020B0503020204020204" pitchFamily="34" charset="-122"/>
+              </a:rPr>
+              <a:t>语言计算”</a:t>
+            </a:r>
+            <a:r>
               <a:rPr lang="zh-CN" altLang="en-US" sz="2700" dirty="0">
                 <a:solidFill>
                   <a:srgbClr val="00B0F0"/>
@@ -5519,7 +6616,7 @@
                 <a:latin typeface="微软雅黑" panose="020B0503020204020204" pitchFamily="34" charset="-122"/>
                 <a:ea typeface="微软雅黑" panose="020B0503020204020204" pitchFamily="34" charset="-122"/>
               </a:rPr>
-              <a:t>语言”隐喻“人脑平台的字符</a:t>
+              <a:t>隐喻“人脑平台的字符</a:t>
             </a:r>
             <a:r>
               <a:rPr lang="en-US" altLang="zh-CN" sz="2700" dirty="0">
@@ -5539,7 +6636,27 @@
                 <a:latin typeface="微软雅黑" panose="020B0503020204020204" pitchFamily="34" charset="-122"/>
                 <a:ea typeface="微软雅黑" panose="020B0503020204020204" pitchFamily="34" charset="-122"/>
               </a:rPr>
-              <a:t>非字符语言”。</a:t>
+              <a:t>非字符</a:t>
+            </a:r>
+            <a:r>
+              <a:rPr lang="zh-CN" altLang="en-US" sz="2700" dirty="0" smtClean="0">
+                <a:solidFill>
+                  <a:srgbClr val="00B0F0"/>
+                </a:solidFill>
+                <a:latin typeface="微软雅黑" panose="020B0503020204020204" pitchFamily="34" charset="-122"/>
+                <a:ea typeface="微软雅黑" panose="020B0503020204020204" pitchFamily="34" charset="-122"/>
+              </a:rPr>
+              <a:t>语言计算”</a:t>
+            </a:r>
+            <a:r>
+              <a:rPr lang="zh-CN" altLang="en-US" sz="2700" dirty="0">
+                <a:solidFill>
+                  <a:srgbClr val="00B0F0"/>
+                </a:solidFill>
+                <a:latin typeface="微软雅黑" panose="020B0503020204020204" pitchFamily="34" charset="-122"/>
+                <a:ea typeface="微软雅黑" panose="020B0503020204020204" pitchFamily="34" charset="-122"/>
+              </a:rPr>
+              <a:t>。</a:t>
             </a:r>
             <a:endParaRPr lang="en-US" sz="2700" dirty="0">
               <a:solidFill>
@@ -5606,6 +6723,39 @@
           </a:p>
         </p:txBody>
       </p:sp>
+      <p:pic>
+        <p:nvPicPr>
+          <p:cNvPr id="2" name="Audio 1">
+            <a:hlinkClick r:id="" action="ppaction://media"/>
+          </p:cNvPr>
+          <p:cNvPicPr>
+            <a:picLocks noChangeAspect="1"/>
+          </p:cNvPicPr>
+          <p:nvPr>
+            <a:audioFile r:link="rId2"/>
+            <p:extLst>
+              <p:ext uri="{DAA4B4D4-6D71-4841-9C94-3DE7FCFB9230}">
+                <p14:media xmlns:p14="http://schemas.microsoft.com/office/powerpoint/2010/main" r:embed="rId1"/>
+              </p:ext>
+            </p:extLst>
+          </p:nvPr>
+        </p:nvPicPr>
+        <p:blipFill>
+          <a:blip r:embed="rId5"/>
+          <a:stretch>
+            <a:fillRect/>
+          </a:stretch>
+        </p:blipFill>
+        <p:spPr>
+          <a:xfrm>
+            <a:off x="8521700" y="4521200"/>
+            <a:ext cx="406400" cy="406400"/>
+          </a:xfrm>
+          <a:prstGeom prst="rect">
+            <a:avLst/>
+          </a:prstGeom>
+        </p:spPr>
+      </p:pic>
     </p:spTree>
     <p:extLst>
       <p:ext uri="{BB962C8B-B14F-4D97-AF65-F5344CB8AC3E}">
@@ -5616,14 +6766,14 @@
   <p:clrMapOvr>
     <a:masterClrMapping/>
   </p:clrMapOvr>
-  <mc:AlternateContent xmlns:mc="http://schemas.openxmlformats.org/markup-compatibility/2006" xmlns:p15="http://schemas.microsoft.com/office/powerpoint/2012/main">
-    <mc:Choice Requires="p15">
-      <p:transition xmlns:p14="http://schemas.microsoft.com/office/powerpoint/2010/main" spd="slow" p14:dur="1250">
+  <mc:AlternateContent xmlns:mc="http://schemas.openxmlformats.org/markup-compatibility/2006">
+    <mc:Choice xmlns:p15="http://schemas.microsoft.com/office/powerpoint/2012/main" Requires="p15">
+      <p:transition xmlns:p14="http://schemas.microsoft.com/office/powerpoint/2010/main" spd="slow" p14:dur="1250" advTm="3148">
         <p15:prstTrans prst="peelOff"/>
       </p:transition>
     </mc:Choice>
-    <mc:Fallback xmlns="">
-      <p:transition spd="slow">
+    <mc:Fallback>
+      <p:transition spd="slow" advTm="3148">
         <p:fade/>
       </p:transition>
     </mc:Fallback>
@@ -5631,7 +6781,87 @@
   <p:timing>
     <p:tnLst>
       <p:par>
-        <p:cTn id="1" dur="indefinite" restart="never" nodeType="tmRoot"/>
+        <p:cTn id="1" dur="indefinite" restart="never" nodeType="tmRoot">
+          <p:childTnLst>
+            <p:seq concurrent="1" nextAc="seek">
+              <p:cTn id="2" dur="indefinite" nodeType="mainSeq">
+                <p:childTnLst>
+                  <p:par>
+                    <p:cTn id="3" fill="hold">
+                      <p:stCondLst>
+                        <p:cond delay="indefinite"/>
+                        <p:cond evt="onBegin" delay="0">
+                          <p:tn val="2"/>
+                        </p:cond>
+                      </p:stCondLst>
+                      <p:childTnLst>
+                        <p:par>
+                          <p:cTn id="4" fill="hold">
+                            <p:stCondLst>
+                              <p:cond delay="0"/>
+                            </p:stCondLst>
+                            <p:childTnLst>
+                              <p:par>
+                                <p:cTn id="5" presetID="1" presetClass="mediacall" presetSubtype="0" fill="hold" nodeType="afterEffect">
+                                  <p:stCondLst>
+                                    <p:cond delay="0"/>
+                                  </p:stCondLst>
+                                  <p:childTnLst>
+                                    <p:cmd type="call" cmd="playFrom(0.0)">
+                                      <p:cBhvr>
+                                        <p:cTn id="6" dur="1" fill="hold"/>
+                                        <p:tgtEl>
+                                          <p:spTgt spid="2"/>
+                                        </p:tgtEl>
+                                      </p:cBhvr>
+                                    </p:cmd>
+                                  </p:childTnLst>
+                                </p:cTn>
+                              </p:par>
+                            </p:childTnLst>
+                          </p:cTn>
+                        </p:par>
+                      </p:childTnLst>
+                    </p:cTn>
+                  </p:par>
+                </p:childTnLst>
+              </p:cTn>
+              <p:prevCondLst>
+                <p:cond evt="onPrev" delay="0">
+                  <p:tgtEl>
+                    <p:sldTgt/>
+                  </p:tgtEl>
+                </p:cond>
+              </p:prevCondLst>
+              <p:nextCondLst>
+                <p:cond evt="onNext" delay="0">
+                  <p:tgtEl>
+                    <p:sldTgt/>
+                  </p:tgtEl>
+                </p:cond>
+              </p:nextCondLst>
+            </p:seq>
+            <p:audio isNarration="1">
+              <p:cMediaNode vol="80000" showWhenStopped="0">
+                <p:cTn id="7" fill="hold" display="0">
+                  <p:stCondLst>
+                    <p:cond delay="indefinite"/>
+                  </p:stCondLst>
+                  <p:endCondLst>
+                    <p:cond evt="onStopAudio" delay="0">
+                      <p:tgtEl>
+                        <p:sldTgt/>
+                      </p:tgtEl>
+                    </p:cond>
+                  </p:endCondLst>
+                </p:cTn>
+                <p:tgtEl>
+                  <p:spTgt spid="2"/>
+                </p:tgtEl>
+              </p:cMediaNode>
+            </p:audio>
+          </p:childTnLst>
+        </p:cTn>
       </p:par>
     </p:tnLst>
   </p:timing>
@@ -5686,7 +6916,7 @@
                 <a:ea typeface="微软雅黑" panose="020B0503020204020204" pitchFamily="34" charset="-122"/>
                 <a:sym typeface="+mn-ea"/>
               </a:rPr>
-              <a:t>“教育</a:t>
+              <a:t>“教育数字思维”</a:t>
             </a:r>
             <a:r>
               <a:rPr lang="zh-CN" altLang="en-US" sz="1800" dirty="0">
@@ -5697,7 +6927,7 @@
                 <a:ea typeface="微软雅黑" panose="020B0503020204020204" pitchFamily="34" charset="-122"/>
                 <a:sym typeface="+mn-ea"/>
               </a:rPr>
-              <a:t>计算思维”在教育教学中的应用</a:t>
+              <a:t>在教育教学中的应用</a:t>
             </a:r>
           </a:p>
         </p:txBody>
@@ -5710,8 +6940,8 @@
         </p:nvSpPr>
         <p:spPr>
           <a:xfrm>
-            <a:off x="580031" y="1243189"/>
-            <a:ext cx="3010054" cy="3170099"/>
+            <a:off x="580031" y="1195778"/>
+            <a:ext cx="3010054" cy="3477875"/>
           </a:xfrm>
           <a:prstGeom prst="rect">
             <a:avLst/>
@@ -5805,6 +7035,16 @@
               <a:t>MVC”</a:t>
             </a:r>
             <a:r>
+              <a:rPr lang="zh-CN" altLang="en-US" sz="2000" dirty="0" smtClean="0">
+                <a:solidFill>
+                  <a:srgbClr val="19B49B"/>
+                </a:solidFill>
+                <a:latin typeface="微软雅黑" panose="020B0503020204020204" pitchFamily="34" charset="-122"/>
+                <a:ea typeface="微软雅黑" panose="020B0503020204020204" pitchFamily="34" charset="-122"/>
+              </a:rPr>
+              <a:t>的</a:t>
+            </a:r>
+            <a:r>
               <a:rPr lang="zh-CN" altLang="en-US" sz="2000" dirty="0">
                 <a:solidFill>
                   <a:srgbClr val="19B49B"/>
@@ -5812,7 +7052,7 @@
                 <a:latin typeface="微软雅黑" panose="020B0503020204020204" pitchFamily="34" charset="-122"/>
                 <a:ea typeface="微软雅黑" panose="020B0503020204020204" pitchFamily="34" charset="-122"/>
               </a:rPr>
-              <a:t>的实现可以选用</a:t>
+              <a:t>计算</a:t>
             </a:r>
             <a:r>
               <a:rPr lang="zh-CN" altLang="en-US" sz="2000" dirty="0" smtClean="0">
@@ -5822,6 +7062,26 @@
                 <a:latin typeface="微软雅黑" panose="020B0503020204020204" pitchFamily="34" charset="-122"/>
                 <a:ea typeface="微软雅黑" panose="020B0503020204020204" pitchFamily="34" charset="-122"/>
               </a:rPr>
+              <a:t>可以</a:t>
+            </a:r>
+            <a:r>
+              <a:rPr lang="zh-CN" altLang="en-US" sz="2000" dirty="0">
+                <a:solidFill>
+                  <a:srgbClr val="19B49B"/>
+                </a:solidFill>
+                <a:latin typeface="微软雅黑" panose="020B0503020204020204" pitchFamily="34" charset="-122"/>
+                <a:ea typeface="微软雅黑" panose="020B0503020204020204" pitchFamily="34" charset="-122"/>
+              </a:rPr>
+              <a:t>选用</a:t>
+            </a:r>
+            <a:r>
+              <a:rPr lang="zh-CN" altLang="en-US" sz="2000" dirty="0" smtClean="0">
+                <a:solidFill>
+                  <a:srgbClr val="19B49B"/>
+                </a:solidFill>
+                <a:latin typeface="微软雅黑" panose="020B0503020204020204" pitchFamily="34" charset="-122"/>
+                <a:ea typeface="微软雅黑" panose="020B0503020204020204" pitchFamily="34" charset="-122"/>
+              </a:rPr>
               <a:t>的“四个</a:t>
             </a:r>
             <a:r>
@@ -5862,7 +7122,7 @@
                 <a:latin typeface="微软雅黑" panose="020B0503020204020204" pitchFamily="34" charset="-122"/>
                 <a:ea typeface="微软雅黑" panose="020B0503020204020204" pitchFamily="34" charset="-122"/>
               </a:rPr>
-              <a:t>语言、</a:t>
+              <a:t>语言计算、</a:t>
             </a:r>
             <a:r>
               <a:rPr lang="zh-CN" altLang="en-US" sz="2000" dirty="0">
@@ -5882,7 +7142,7 @@
                 <a:latin typeface="微软雅黑" panose="020B0503020204020204" pitchFamily="34" charset="-122"/>
                 <a:ea typeface="微软雅黑" panose="020B0503020204020204" pitchFamily="34" charset="-122"/>
               </a:rPr>
-              <a:t>语言、</a:t>
+              <a:t>语言计算、</a:t>
             </a:r>
             <a:r>
               <a:rPr lang="zh-CN" altLang="en-US" sz="2000" dirty="0">
@@ -5902,7 +7162,7 @@
                 <a:latin typeface="微软雅黑" panose="020B0503020204020204" pitchFamily="34" charset="-122"/>
                 <a:ea typeface="微软雅黑" panose="020B0503020204020204" pitchFamily="34" charset="-122"/>
               </a:rPr>
-              <a:t>语言、</a:t>
+              <a:t>语言计算、</a:t>
             </a:r>
             <a:r>
               <a:rPr lang="zh-CN" altLang="en-US" sz="2000" dirty="0">
@@ -5922,7 +7182,7 @@
                 <a:latin typeface="微软雅黑" panose="020B0503020204020204" pitchFamily="34" charset="-122"/>
                 <a:ea typeface="微软雅黑" panose="020B0503020204020204" pitchFamily="34" charset="-122"/>
               </a:rPr>
-              <a:t>语言</a:t>
+              <a:t>语言计算</a:t>
             </a:r>
             <a:r>
               <a:rPr lang="en-US" altLang="zh-CN" sz="2000" dirty="0" smtClean="0">
@@ -6131,7 +7391,11 @@
             <a:graphicFrameLocks noChangeAspect="1"/>
           </p:cNvGraphicFramePr>
           <p:nvPr>
-            <p:extLst/>
+            <p:extLst>
+              <p:ext uri="{D42A27DB-BD31-4B8C-83A1-F6EECF244321}">
+                <p14:modId xmlns:p14="http://schemas.microsoft.com/office/powerpoint/2010/main" val="2737079407"/>
+              </p:ext>
+            </p:extLst>
           </p:nvPr>
         </p:nvGraphicFramePr>
         <p:xfrm>
@@ -6142,12 +7406,12 @@
           <a:graphicData uri="http://schemas.openxmlformats.org/presentationml/2006/ole">
             <mc:AlternateContent xmlns:mc="http://schemas.openxmlformats.org/markup-compatibility/2006">
               <mc:Choice xmlns:v="urn:schemas-microsoft-com:vml" Requires="v">
-                <p:oleObj spid="_x0000_s5123" name="Picture" r:id="rId4" imgW="4061520" imgH="4699800" progId="Word.Picture.8">
+                <p:oleObj spid="_x0000_s5137" name="Picture" r:id="rId6" imgW="4061520" imgH="4699800" progId="Word.Picture.8">
                   <p:embed/>
                 </p:oleObj>
               </mc:Choice>
               <mc:Fallback>
-                <p:oleObj name="Picture" r:id="rId4" imgW="4061520" imgH="4699800" progId="Word.Picture.8">
+                <p:oleObj name="Picture" r:id="rId6" imgW="4061520" imgH="4699800" progId="Word.Picture.8">
                   <p:embed/>
                   <p:pic>
                     <p:nvPicPr>
@@ -6158,7 +7422,7 @@
                       <p:nvPr/>
                     </p:nvPicPr>
                     <p:blipFill>
-                      <a:blip r:embed="rId5"/>
+                      <a:blip r:embed="rId7"/>
                       <a:srcRect/>
                       <a:stretch>
                         <a:fillRect/>
@@ -6182,6 +7446,39 @@
           </a:graphicData>
         </a:graphic>
       </p:graphicFrame>
+      <p:pic>
+        <p:nvPicPr>
+          <p:cNvPr id="2" name="Audio 1">
+            <a:hlinkClick r:id="" action="ppaction://media"/>
+          </p:cNvPr>
+          <p:cNvPicPr>
+            <a:picLocks noChangeAspect="1"/>
+          </p:cNvPicPr>
+          <p:nvPr>
+            <a:audioFile r:link="rId3"/>
+            <p:extLst>
+              <p:ext uri="{DAA4B4D4-6D71-4841-9C94-3DE7FCFB9230}">
+                <p14:media xmlns:p14="http://schemas.microsoft.com/office/powerpoint/2010/main" r:embed="rId2"/>
+              </p:ext>
+            </p:extLst>
+          </p:nvPr>
+        </p:nvPicPr>
+        <p:blipFill>
+          <a:blip r:embed="rId8"/>
+          <a:stretch>
+            <a:fillRect/>
+          </a:stretch>
+        </p:blipFill>
+        <p:spPr>
+          <a:xfrm>
+            <a:off x="8521700" y="4521200"/>
+            <a:ext cx="406400" cy="406400"/>
+          </a:xfrm>
+          <a:prstGeom prst="rect">
+            <a:avLst/>
+          </a:prstGeom>
+        </p:spPr>
+      </p:pic>
     </p:spTree>
     <p:extLst>
       <p:ext uri="{BB962C8B-B14F-4D97-AF65-F5344CB8AC3E}">
@@ -6192,14 +7489,14 @@
   <p:clrMapOvr>
     <a:masterClrMapping/>
   </p:clrMapOvr>
-  <mc:AlternateContent xmlns:mc="http://schemas.openxmlformats.org/markup-compatibility/2006" xmlns:p15="http://schemas.microsoft.com/office/powerpoint/2012/main">
-    <mc:Choice Requires="p15">
-      <p:transition xmlns:p14="http://schemas.microsoft.com/office/powerpoint/2010/main" spd="slow" p14:dur="1250">
+  <mc:AlternateContent xmlns:mc="http://schemas.openxmlformats.org/markup-compatibility/2006">
+    <mc:Choice xmlns:p15="http://schemas.microsoft.com/office/powerpoint/2012/main" Requires="p15">
+      <p:transition xmlns:p14="http://schemas.microsoft.com/office/powerpoint/2010/main" spd="slow" p14:dur="1250" advTm="2659">
         <p15:prstTrans prst="peelOff"/>
       </p:transition>
     </mc:Choice>
-    <mc:Fallback xmlns="">
-      <p:transition spd="slow">
+    <mc:Fallback>
+      <p:transition spd="slow" advTm="2659">
         <p:fade/>
       </p:transition>
     </mc:Fallback>
@@ -6207,7 +7504,87 @@
   <p:timing>
     <p:tnLst>
       <p:par>
-        <p:cTn id="1" dur="indefinite" restart="never" nodeType="tmRoot"/>
+        <p:cTn id="1" dur="indefinite" restart="never" nodeType="tmRoot">
+          <p:childTnLst>
+            <p:seq concurrent="1" nextAc="seek">
+              <p:cTn id="2" dur="indefinite" nodeType="mainSeq">
+                <p:childTnLst>
+                  <p:par>
+                    <p:cTn id="3" fill="hold">
+                      <p:stCondLst>
+                        <p:cond delay="indefinite"/>
+                        <p:cond evt="onBegin" delay="0">
+                          <p:tn val="2"/>
+                        </p:cond>
+                      </p:stCondLst>
+                      <p:childTnLst>
+                        <p:par>
+                          <p:cTn id="4" fill="hold">
+                            <p:stCondLst>
+                              <p:cond delay="0"/>
+                            </p:stCondLst>
+                            <p:childTnLst>
+                              <p:par>
+                                <p:cTn id="5" presetID="1" presetClass="mediacall" presetSubtype="0" fill="hold" nodeType="afterEffect">
+                                  <p:stCondLst>
+                                    <p:cond delay="0"/>
+                                  </p:stCondLst>
+                                  <p:childTnLst>
+                                    <p:cmd type="call" cmd="playFrom(0.0)">
+                                      <p:cBhvr>
+                                        <p:cTn id="6" dur="1" fill="hold"/>
+                                        <p:tgtEl>
+                                          <p:spTgt spid="2"/>
+                                        </p:tgtEl>
+                                      </p:cBhvr>
+                                    </p:cmd>
+                                  </p:childTnLst>
+                                </p:cTn>
+                              </p:par>
+                            </p:childTnLst>
+                          </p:cTn>
+                        </p:par>
+                      </p:childTnLst>
+                    </p:cTn>
+                  </p:par>
+                </p:childTnLst>
+              </p:cTn>
+              <p:prevCondLst>
+                <p:cond evt="onPrev" delay="0">
+                  <p:tgtEl>
+                    <p:sldTgt/>
+                  </p:tgtEl>
+                </p:cond>
+              </p:prevCondLst>
+              <p:nextCondLst>
+                <p:cond evt="onNext" delay="0">
+                  <p:tgtEl>
+                    <p:sldTgt/>
+                  </p:tgtEl>
+                </p:cond>
+              </p:nextCondLst>
+            </p:seq>
+            <p:audio isNarration="1">
+              <p:cMediaNode vol="80000" showWhenStopped="0">
+                <p:cTn id="7" fill="hold" display="0">
+                  <p:stCondLst>
+                    <p:cond delay="indefinite"/>
+                  </p:stCondLst>
+                  <p:endCondLst>
+                    <p:cond evt="onStopAudio" delay="0">
+                      <p:tgtEl>
+                        <p:sldTgt/>
+                      </p:tgtEl>
+                    </p:cond>
+                  </p:endCondLst>
+                </p:cTn>
+                <p:tgtEl>
+                  <p:spTgt spid="2"/>
+                </p:tgtEl>
+              </p:cMediaNode>
+            </p:audio>
+          </p:childTnLst>
+        </p:cTn>
       </p:par>
     </p:tnLst>
   </p:timing>
@@ -6254,8 +7631,12 @@
           <a:lstStyle/>
           <a:p>
             <a:r>
+              <a:rPr lang="zh-CN" altLang="en-US" sz="1800" dirty="0" smtClean="0"/>
+              <a:t>教育数字思维的</a:t>
+            </a:r>
+            <a:r>
               <a:rPr lang="zh-CN" altLang="en-US" sz="1800" dirty="0"/>
-              <a:t>教育计算思维的自然与人文的统一观</a:t>
+              <a:t>自然与人文的统一观</a:t>
             </a:r>
             <a:endParaRPr lang="zh-CN" altLang="en-US" sz="1800" dirty="0">
               <a:solidFill>
@@ -6271,13 +7652,13 @@
       <p:pic>
         <p:nvPicPr>
           <p:cNvPr id="5" name="Picture 4">
-            <a:hlinkClick r:id="rId3"/>
+            <a:hlinkClick r:id="rId5"/>
           </p:cNvPr>
           <p:cNvPicPr/>
           <p:nvPr/>
         </p:nvPicPr>
         <p:blipFill>
-          <a:blip r:embed="rId4">
+          <a:blip r:embed="rId6">
             <a:extLst>
               <a:ext uri="{28A0092B-C50C-407E-A947-70E740481C1C}">
                 <a14:useLocalDpi xmlns:a14="http://schemas.microsoft.com/office/drawing/2010/main" val="0"/>
@@ -6325,7 +7706,7 @@
           <a:lstStyle/>
           <a:p>
             <a:r>
-              <a:rPr lang="zh-CN" altLang="en-US" sz="1800" b="1" kern="100" dirty="0">
+              <a:rPr lang="zh-CN" altLang="en-US" sz="1800" b="1" kern="100" dirty="0" smtClean="0">
                 <a:solidFill>
                   <a:srgbClr val="00B050"/>
                 </a:solidFill>
@@ -6333,10 +7714,10 @@
                 <a:ea typeface="宋体" panose="02010600030101010101" pitchFamily="2" charset="-122"/>
                 <a:cs typeface="Times New Roman" panose="02020603050405020304" pitchFamily="18" charset="0"/>
               </a:rPr>
-              <a:t>“计算思维的</a:t>
-            </a:r>
-            <a:r>
-              <a:rPr lang="en-US" sz="1800" b="1" kern="100" dirty="0">
+              <a:t>“数字思维的</a:t>
+            </a:r>
+            <a:r>
+              <a:rPr lang="en-US" sz="1800" b="1" kern="100" dirty="0" smtClean="0">
                 <a:solidFill>
                   <a:srgbClr val="00B050"/>
                 </a:solidFill>
@@ -6344,7 +7725,18 @@
                 <a:ea typeface="宋体" panose="02010600030101010101" pitchFamily="2" charset="-122"/>
                 <a:cs typeface="Times New Roman" panose="02020603050405020304" pitchFamily="18" charset="0"/>
               </a:rPr>
-              <a:t> 6 </a:t>
+              <a:t> </a:t>
+            </a:r>
+            <a:r>
+              <a:rPr lang="en-US" sz="1800" b="1" kern="100" dirty="0">
+                <a:solidFill>
+                  <a:srgbClr val="00B050"/>
+                </a:solidFill>
+                <a:latin typeface="Calibri" panose="020F0502020204030204" pitchFamily="34" charset="0"/>
+                <a:ea typeface="宋体" panose="02010600030101010101" pitchFamily="2" charset="-122"/>
+                <a:cs typeface="Times New Roman" panose="02020603050405020304" pitchFamily="18" charset="0"/>
+              </a:rPr>
+              <a:t>6 </a:t>
             </a:r>
             <a:r>
               <a:rPr lang="zh-CN" altLang="en-US" sz="1800" b="1" kern="100" dirty="0">
@@ -6537,6 +7929,39 @@
           </a:p>
         </p:txBody>
       </p:sp>
+      <p:pic>
+        <p:nvPicPr>
+          <p:cNvPr id="3" name="Audio 2">
+            <a:hlinkClick r:id="" action="ppaction://media"/>
+          </p:cNvPr>
+          <p:cNvPicPr>
+            <a:picLocks noChangeAspect="1"/>
+          </p:cNvPicPr>
+          <p:nvPr>
+            <a:audioFile r:link="rId2"/>
+            <p:extLst>
+              <p:ext uri="{DAA4B4D4-6D71-4841-9C94-3DE7FCFB9230}">
+                <p14:media xmlns:p14="http://schemas.microsoft.com/office/powerpoint/2010/main" r:embed="rId1"/>
+              </p:ext>
+            </p:extLst>
+          </p:nvPr>
+        </p:nvPicPr>
+        <p:blipFill>
+          <a:blip r:embed="rId7"/>
+          <a:stretch>
+            <a:fillRect/>
+          </a:stretch>
+        </p:blipFill>
+        <p:spPr>
+          <a:xfrm>
+            <a:off x="8521700" y="4521200"/>
+            <a:ext cx="406400" cy="406400"/>
+          </a:xfrm>
+          <a:prstGeom prst="rect">
+            <a:avLst/>
+          </a:prstGeom>
+        </p:spPr>
+      </p:pic>
     </p:spTree>
     <p:extLst>
       <p:ext uri="{BB962C8B-B14F-4D97-AF65-F5344CB8AC3E}">
@@ -6547,14 +7972,14 @@
   <p:clrMapOvr>
     <a:masterClrMapping/>
   </p:clrMapOvr>
-  <mc:AlternateContent xmlns:mc="http://schemas.openxmlformats.org/markup-compatibility/2006" xmlns:p15="http://schemas.microsoft.com/office/powerpoint/2012/main">
-    <mc:Choice Requires="p15">
-      <p:transition xmlns:p14="http://schemas.microsoft.com/office/powerpoint/2010/main" spd="slow" p14:dur="1250">
+  <mc:AlternateContent xmlns:mc="http://schemas.openxmlformats.org/markup-compatibility/2006">
+    <mc:Choice xmlns:p15="http://schemas.microsoft.com/office/powerpoint/2012/main" Requires="p15">
+      <p:transition xmlns:p14="http://schemas.microsoft.com/office/powerpoint/2010/main" spd="slow" p14:dur="1250" advTm="1739">
         <p15:prstTrans prst="peelOff"/>
       </p:transition>
     </mc:Choice>
-    <mc:Fallback xmlns="">
-      <p:transition spd="slow">
+    <mc:Fallback>
+      <p:transition spd="slow" advTm="1739">
         <p:fade/>
       </p:transition>
     </mc:Fallback>
@@ -6562,7 +7987,87 @@
   <p:timing>
     <p:tnLst>
       <p:par>
-        <p:cTn id="1" dur="indefinite" restart="never" nodeType="tmRoot"/>
+        <p:cTn id="1" dur="indefinite" restart="never" nodeType="tmRoot">
+          <p:childTnLst>
+            <p:seq concurrent="1" nextAc="seek">
+              <p:cTn id="2" dur="indefinite" nodeType="mainSeq">
+                <p:childTnLst>
+                  <p:par>
+                    <p:cTn id="3" fill="hold">
+                      <p:stCondLst>
+                        <p:cond delay="indefinite"/>
+                        <p:cond evt="onBegin" delay="0">
+                          <p:tn val="2"/>
+                        </p:cond>
+                      </p:stCondLst>
+                      <p:childTnLst>
+                        <p:par>
+                          <p:cTn id="4" fill="hold">
+                            <p:stCondLst>
+                              <p:cond delay="0"/>
+                            </p:stCondLst>
+                            <p:childTnLst>
+                              <p:par>
+                                <p:cTn id="5" presetID="1" presetClass="mediacall" presetSubtype="0" fill="hold" nodeType="afterEffect">
+                                  <p:stCondLst>
+                                    <p:cond delay="0"/>
+                                  </p:stCondLst>
+                                  <p:childTnLst>
+                                    <p:cmd type="call" cmd="playFrom(0.0)">
+                                      <p:cBhvr>
+                                        <p:cTn id="6" dur="1" fill="hold"/>
+                                        <p:tgtEl>
+                                          <p:spTgt spid="3"/>
+                                        </p:tgtEl>
+                                      </p:cBhvr>
+                                    </p:cmd>
+                                  </p:childTnLst>
+                                </p:cTn>
+                              </p:par>
+                            </p:childTnLst>
+                          </p:cTn>
+                        </p:par>
+                      </p:childTnLst>
+                    </p:cTn>
+                  </p:par>
+                </p:childTnLst>
+              </p:cTn>
+              <p:prevCondLst>
+                <p:cond evt="onPrev" delay="0">
+                  <p:tgtEl>
+                    <p:sldTgt/>
+                  </p:tgtEl>
+                </p:cond>
+              </p:prevCondLst>
+              <p:nextCondLst>
+                <p:cond evt="onNext" delay="0">
+                  <p:tgtEl>
+                    <p:sldTgt/>
+                  </p:tgtEl>
+                </p:cond>
+              </p:nextCondLst>
+            </p:seq>
+            <p:audio isNarration="1">
+              <p:cMediaNode vol="80000" showWhenStopped="0">
+                <p:cTn id="7" fill="hold" display="0">
+                  <p:stCondLst>
+                    <p:cond delay="indefinite"/>
+                  </p:stCondLst>
+                  <p:endCondLst>
+                    <p:cond evt="onStopAudio" delay="0">
+                      <p:tgtEl>
+                        <p:sldTgt/>
+                      </p:tgtEl>
+                    </p:cond>
+                  </p:endCondLst>
+                </p:cTn>
+                <p:tgtEl>
+                  <p:spTgt spid="3"/>
+                </p:tgtEl>
+              </p:cMediaNode>
+            </p:audio>
+          </p:childTnLst>
+        </p:cTn>
       </p:par>
     </p:tnLst>
   </p:timing>
@@ -6595,7 +8100,7 @@
           <p:nvPr/>
         </p:nvPicPr>
         <p:blipFill rotWithShape="1">
-          <a:blip r:embed="rId3"/>
+          <a:blip r:embed="rId5"/>
           <a:srcRect l="16078" t="8528" r="14488" b="16904"/>
           <a:stretch/>
         </p:blipFill>
@@ -6618,7 +8123,7 @@
           <p:nvPr/>
         </p:nvPicPr>
         <p:blipFill>
-          <a:blip r:embed="rId4">
+          <a:blip r:embed="rId6">
             <a:extLst>
               <a:ext uri="{28A0092B-C50C-407E-A947-70E740481C1C}">
                 <a14:useLocalDpi xmlns:a14="http://schemas.microsoft.com/office/drawing/2010/main" val="0"/>
@@ -6673,6 +8178,17 @@
           <a:lstStyle/>
           <a:p>
             <a:r>
+              <a:rPr lang="zh-CN" altLang="en-US" sz="1800" dirty="0" smtClean="0">
+                <a:solidFill>
+                  <a:srgbClr val="33495E"/>
+                </a:solidFill>
+                <a:latin typeface="微软雅黑" panose="020B0503020204020204" pitchFamily="34" charset="-122"/>
+                <a:ea typeface="微软雅黑" panose="020B0503020204020204" pitchFamily="34" charset="-122"/>
+                <a:sym typeface="+mn-ea"/>
+              </a:rPr>
+              <a:t>教育数字思维的</a:t>
+            </a:r>
+            <a:r>
               <a:rPr lang="zh-CN" altLang="en-US" sz="1800" dirty="0">
                 <a:solidFill>
                   <a:srgbClr val="33495E"/>
@@ -6681,7 +8197,7 @@
                 <a:ea typeface="微软雅黑" panose="020B0503020204020204" pitchFamily="34" charset="-122"/>
                 <a:sym typeface="+mn-ea"/>
               </a:rPr>
-              <a:t>教育计算思维的优缺点</a:t>
+              <a:t>优缺点</a:t>
             </a:r>
           </a:p>
         </p:txBody>
@@ -6776,7 +8292,27 @@
                 <a:latin typeface="微软雅黑" panose="020B0503020204020204" pitchFamily="34" charset="-122"/>
                 <a:ea typeface="微软雅黑" panose="020B0503020204020204" pitchFamily="34" charset="-122"/>
               </a:rPr>
-              <a:t>非字符语言”的神经系统组成的人性的生物体，所以，“计算思维本质”必须物性与人性统一。</a:t>
+              <a:t>非字符语言”的神经系统组成的人性的生物体，所以，</a:t>
+            </a:r>
+            <a:r>
+              <a:rPr lang="zh-CN" altLang="en-US" sz="2600" dirty="0" smtClean="0">
+                <a:solidFill>
+                  <a:srgbClr val="19B49B"/>
+                </a:solidFill>
+                <a:latin typeface="微软雅黑" panose="020B0503020204020204" pitchFamily="34" charset="-122"/>
+                <a:ea typeface="微软雅黑" panose="020B0503020204020204" pitchFamily="34" charset="-122"/>
+              </a:rPr>
+              <a:t>“数字思维本质”</a:t>
+            </a:r>
+            <a:r>
+              <a:rPr lang="zh-CN" altLang="en-US" sz="2600" dirty="0">
+                <a:solidFill>
+                  <a:srgbClr val="19B49B"/>
+                </a:solidFill>
+                <a:latin typeface="微软雅黑" panose="020B0503020204020204" pitchFamily="34" charset="-122"/>
+                <a:ea typeface="微软雅黑" panose="020B0503020204020204" pitchFamily="34" charset="-122"/>
+              </a:rPr>
+              <a:t>必须物性与人性统一。</a:t>
             </a:r>
             <a:endParaRPr lang="en-US" sz="2600" dirty="0">
               <a:solidFill>
@@ -6856,6 +8392,39 @@
           </a:p>
         </p:txBody>
       </p:sp>
+      <p:pic>
+        <p:nvPicPr>
+          <p:cNvPr id="4" name="Audio 3">
+            <a:hlinkClick r:id="" action="ppaction://media"/>
+          </p:cNvPr>
+          <p:cNvPicPr>
+            <a:picLocks noChangeAspect="1"/>
+          </p:cNvPicPr>
+          <p:nvPr>
+            <a:audioFile r:link="rId2"/>
+            <p:extLst>
+              <p:ext uri="{DAA4B4D4-6D71-4841-9C94-3DE7FCFB9230}">
+                <p14:media xmlns:p14="http://schemas.microsoft.com/office/powerpoint/2010/main" r:embed="rId1"/>
+              </p:ext>
+            </p:extLst>
+          </p:nvPr>
+        </p:nvPicPr>
+        <p:blipFill>
+          <a:blip r:embed="rId7"/>
+          <a:stretch>
+            <a:fillRect/>
+          </a:stretch>
+        </p:blipFill>
+        <p:spPr>
+          <a:xfrm>
+            <a:off x="8521700" y="4521200"/>
+            <a:ext cx="406400" cy="406400"/>
+          </a:xfrm>
+          <a:prstGeom prst="rect">
+            <a:avLst/>
+          </a:prstGeom>
+        </p:spPr>
+      </p:pic>
     </p:spTree>
     <p:extLst>
       <p:ext uri="{BB962C8B-B14F-4D97-AF65-F5344CB8AC3E}">
@@ -6866,14 +8435,14 @@
   <p:clrMapOvr>
     <a:masterClrMapping/>
   </p:clrMapOvr>
-  <mc:AlternateContent xmlns:mc="http://schemas.openxmlformats.org/markup-compatibility/2006" xmlns:p15="http://schemas.microsoft.com/office/powerpoint/2012/main">
-    <mc:Choice Requires="p15">
-      <p:transition xmlns:p14="http://schemas.microsoft.com/office/powerpoint/2010/main" spd="slow" p14:dur="1250">
+  <mc:AlternateContent xmlns:mc="http://schemas.openxmlformats.org/markup-compatibility/2006">
+    <mc:Choice xmlns:p15="http://schemas.microsoft.com/office/powerpoint/2012/main" Requires="p15">
+      <p:transition xmlns:p14="http://schemas.microsoft.com/office/powerpoint/2010/main" spd="slow" p14:dur="1250" advTm="328">
         <p15:prstTrans prst="peelOff"/>
       </p:transition>
     </mc:Choice>
-    <mc:Fallback xmlns="">
-      <p:transition spd="slow">
+    <mc:Fallback>
+      <p:transition spd="slow" advTm="328">
         <p:fade/>
       </p:transition>
     </mc:Fallback>
@@ -6881,7 +8450,87 @@
   <p:timing>
     <p:tnLst>
       <p:par>
-        <p:cTn id="1" dur="indefinite" restart="never" nodeType="tmRoot"/>
+        <p:cTn id="1" dur="indefinite" restart="never" nodeType="tmRoot">
+          <p:childTnLst>
+            <p:seq concurrent="1" nextAc="seek">
+              <p:cTn id="2" dur="indefinite" nodeType="mainSeq">
+                <p:childTnLst>
+                  <p:par>
+                    <p:cTn id="3" fill="hold">
+                      <p:stCondLst>
+                        <p:cond delay="indefinite"/>
+                        <p:cond evt="onBegin" delay="0">
+                          <p:tn val="2"/>
+                        </p:cond>
+                      </p:stCondLst>
+                      <p:childTnLst>
+                        <p:par>
+                          <p:cTn id="4" fill="hold">
+                            <p:stCondLst>
+                              <p:cond delay="0"/>
+                            </p:stCondLst>
+                            <p:childTnLst>
+                              <p:par>
+                                <p:cTn id="5" presetID="1" presetClass="mediacall" presetSubtype="0" fill="hold" nodeType="afterEffect">
+                                  <p:stCondLst>
+                                    <p:cond delay="0"/>
+                                  </p:stCondLst>
+                                  <p:childTnLst>
+                                    <p:cmd type="call" cmd="playFrom(0.0)">
+                                      <p:cBhvr>
+                                        <p:cTn id="6" dur="1" fill="hold"/>
+                                        <p:tgtEl>
+                                          <p:spTgt spid="4"/>
+                                        </p:tgtEl>
+                                      </p:cBhvr>
+                                    </p:cmd>
+                                  </p:childTnLst>
+                                </p:cTn>
+                              </p:par>
+                            </p:childTnLst>
+                          </p:cTn>
+                        </p:par>
+                      </p:childTnLst>
+                    </p:cTn>
+                  </p:par>
+                </p:childTnLst>
+              </p:cTn>
+              <p:prevCondLst>
+                <p:cond evt="onPrev" delay="0">
+                  <p:tgtEl>
+                    <p:sldTgt/>
+                  </p:tgtEl>
+                </p:cond>
+              </p:prevCondLst>
+              <p:nextCondLst>
+                <p:cond evt="onNext" delay="0">
+                  <p:tgtEl>
+                    <p:sldTgt/>
+                  </p:tgtEl>
+                </p:cond>
+              </p:nextCondLst>
+            </p:seq>
+            <p:audio isNarration="1">
+              <p:cMediaNode vol="80000" showWhenStopped="0">
+                <p:cTn id="7" fill="hold" display="0">
+                  <p:stCondLst>
+                    <p:cond delay="indefinite"/>
+                  </p:stCondLst>
+                  <p:endCondLst>
+                    <p:cond evt="onStopAudio" delay="0">
+                      <p:tgtEl>
+                        <p:sldTgt/>
+                      </p:tgtEl>
+                    </p:cond>
+                  </p:endCondLst>
+                </p:cTn>
+                <p:tgtEl>
+                  <p:spTgt spid="4"/>
+                </p:tgtEl>
+              </p:cMediaNode>
+            </p:audio>
+          </p:childTnLst>
+        </p:cTn>
       </p:par>
     </p:tnLst>
   </p:timing>
@@ -6946,7 +8595,7 @@
           <p:cNvPr id="2" name="文本框 1">
             <a:extLst>
               <a:ext uri="{FF2B5EF4-FFF2-40B4-BE49-F238E27FC236}">
-                <a16:creationId xmlns="" xmlns:a16="http://schemas.microsoft.com/office/drawing/2014/main" id="{438813D7-676E-4BB1-8BD1-AA790C109740}"/>
+                <a16:creationId xmlns:a16="http://schemas.microsoft.com/office/drawing/2014/main" xmlns="" id="{438813D7-676E-4BB1-8BD1-AA790C109740}"/>
               </a:ext>
             </a:extLst>
           </p:cNvPr>
@@ -7017,7 +8666,27 @@
                 <a:latin typeface="微软雅黑" panose="020B0503020204020204" pitchFamily="34" charset="-122"/>
                 <a:ea typeface="微软雅黑" panose="020B0503020204020204" pitchFamily="34" charset="-122"/>
               </a:rPr>
-              <a:t>关于教育计算思维的说法，错误的是（）：</a:t>
+              <a:t>关于</a:t>
+            </a:r>
+            <a:r>
+              <a:rPr lang="zh-CN" altLang="en-US" sz="3200" dirty="0" smtClean="0">
+                <a:solidFill>
+                  <a:srgbClr val="19B49B"/>
+                </a:solidFill>
+                <a:latin typeface="微软雅黑" panose="020B0503020204020204" pitchFamily="34" charset="-122"/>
+                <a:ea typeface="微软雅黑" panose="020B0503020204020204" pitchFamily="34" charset="-122"/>
+              </a:rPr>
+              <a:t>教育数字思维的</a:t>
+            </a:r>
+            <a:r>
+              <a:rPr lang="zh-CN" altLang="en-US" sz="3200" dirty="0" smtClean="0">
+                <a:solidFill>
+                  <a:srgbClr val="19B49B"/>
+                </a:solidFill>
+                <a:latin typeface="微软雅黑" panose="020B0503020204020204" pitchFamily="34" charset="-122"/>
+                <a:ea typeface="微软雅黑" panose="020B0503020204020204" pitchFamily="34" charset="-122"/>
+              </a:rPr>
+              <a:t>说法，错误的是（）：</a:t>
             </a:r>
             <a:endParaRPr lang="en-US" altLang="zh-CN" sz="3200" dirty="0">
               <a:solidFill>
@@ -7094,6 +8763,16 @@
               <a:t>B</a:t>
             </a:r>
             <a:r>
+              <a:rPr lang="zh-CN" altLang="en-US" sz="2400" dirty="0" smtClean="0">
+                <a:solidFill>
+                  <a:srgbClr val="00B050"/>
+                </a:solidFill>
+                <a:latin typeface="微软雅黑" panose="020B0503020204020204" pitchFamily="34" charset="-122"/>
+                <a:ea typeface="微软雅黑" panose="020B0503020204020204" pitchFamily="34" charset="-122"/>
+              </a:rPr>
+              <a:t>．数字思维在</a:t>
+            </a:r>
+            <a:r>
               <a:rPr lang="zh-CN" altLang="en-US" sz="2400" dirty="0">
                 <a:solidFill>
                   <a:srgbClr val="00B050"/>
@@ -7101,7 +8780,7 @@
                 <a:latin typeface="微软雅黑" panose="020B0503020204020204" pitchFamily="34" charset="-122"/>
                 <a:ea typeface="微软雅黑" panose="020B0503020204020204" pitchFamily="34" charset="-122"/>
               </a:rPr>
-              <a:t>．计算思维在教育领域的应用</a:t>
+              <a:t>教育领域的应用</a:t>
             </a:r>
             <a:endParaRPr lang="en-US" altLang="zh-CN" sz="2400" dirty="0">
               <a:solidFill>
@@ -7143,8 +8822,25 @@
                 <a:latin typeface="微软雅黑" panose="020B0503020204020204" pitchFamily="34" charset="-122"/>
                 <a:ea typeface="微软雅黑" panose="020B0503020204020204" pitchFamily="34" charset="-122"/>
               </a:rPr>
-              <a:t>．教育领域的计算思维</a:t>
-            </a:r>
+              <a:t>．教育领域</a:t>
+            </a:r>
+            <a:r>
+              <a:rPr lang="zh-CN" altLang="en-US" sz="2400" dirty="0" smtClean="0">
+                <a:solidFill>
+                  <a:srgbClr val="00B050"/>
+                </a:solidFill>
+                <a:latin typeface="微软雅黑" panose="020B0503020204020204" pitchFamily="34" charset="-122"/>
+                <a:ea typeface="微软雅黑" panose="020B0503020204020204" pitchFamily="34" charset="-122"/>
+              </a:rPr>
+              <a:t>的数字思维</a:t>
+            </a:r>
+            <a:endParaRPr lang="zh-CN" altLang="en-US" sz="2400" dirty="0">
+              <a:solidFill>
+                <a:srgbClr val="00B050"/>
+              </a:solidFill>
+              <a:latin typeface="微软雅黑" panose="020B0503020204020204" pitchFamily="34" charset="-122"/>
+              <a:ea typeface="微软雅黑" panose="020B0503020204020204" pitchFamily="34" charset="-122"/>
+            </a:endParaRPr>
           </a:p>
           <a:p>
             <a:pPr marL="339528" indent="-339528" algn="just">
@@ -7187,6 +8883,39 @@
           </a:p>
         </p:txBody>
       </p:sp>
+      <p:pic>
+        <p:nvPicPr>
+          <p:cNvPr id="4" name="Audio 3">
+            <a:hlinkClick r:id="" action="ppaction://media"/>
+          </p:cNvPr>
+          <p:cNvPicPr>
+            <a:picLocks noChangeAspect="1"/>
+          </p:cNvPicPr>
+          <p:nvPr>
+            <a:audioFile r:link="rId2"/>
+            <p:extLst>
+              <p:ext uri="{DAA4B4D4-6D71-4841-9C94-3DE7FCFB9230}">
+                <p14:media xmlns:p14="http://schemas.microsoft.com/office/powerpoint/2010/main" r:embed="rId1"/>
+              </p:ext>
+            </p:extLst>
+          </p:nvPr>
+        </p:nvPicPr>
+        <p:blipFill>
+          <a:blip r:embed="rId5"/>
+          <a:stretch>
+            <a:fillRect/>
+          </a:stretch>
+        </p:blipFill>
+        <p:spPr>
+          <a:xfrm>
+            <a:off x="8521700" y="4521200"/>
+            <a:ext cx="406400" cy="406400"/>
+          </a:xfrm>
+          <a:prstGeom prst="rect">
+            <a:avLst/>
+          </a:prstGeom>
+        </p:spPr>
+      </p:pic>
     </p:spTree>
     <p:extLst>
       <p:ext uri="{BB962C8B-B14F-4D97-AF65-F5344CB8AC3E}">
@@ -7197,14 +8926,14 @@
   <p:clrMapOvr>
     <a:masterClrMapping/>
   </p:clrMapOvr>
-  <mc:AlternateContent xmlns:mc="http://schemas.openxmlformats.org/markup-compatibility/2006" xmlns:p15="http://schemas.microsoft.com/office/powerpoint/2012/main">
-    <mc:Choice Requires="p15">
-      <p:transition xmlns:p14="http://schemas.microsoft.com/office/powerpoint/2010/main" spd="slow" p14:dur="1250">
+  <mc:AlternateContent xmlns:mc="http://schemas.openxmlformats.org/markup-compatibility/2006">
+    <mc:Choice xmlns:p15="http://schemas.microsoft.com/office/powerpoint/2012/main" Requires="p15">
+      <p:transition xmlns:p14="http://schemas.microsoft.com/office/powerpoint/2010/main" spd="slow" p14:dur="1250" advTm="33">
         <p15:prstTrans prst="peelOff"/>
       </p:transition>
     </mc:Choice>
-    <mc:Fallback xmlns="">
-      <p:transition spd="slow">
+    <mc:Fallback>
+      <p:transition spd="slow" advTm="33">
         <p:fade/>
       </p:transition>
     </mc:Fallback>
@@ -7212,7 +8941,87 @@
   <p:timing>
     <p:tnLst>
       <p:par>
-        <p:cTn id="1" dur="indefinite" restart="never" nodeType="tmRoot"/>
+        <p:cTn id="1" dur="indefinite" restart="never" nodeType="tmRoot">
+          <p:childTnLst>
+            <p:seq concurrent="1" nextAc="seek">
+              <p:cTn id="2" dur="indefinite" nodeType="mainSeq">
+                <p:childTnLst>
+                  <p:par>
+                    <p:cTn id="3" fill="hold">
+                      <p:stCondLst>
+                        <p:cond delay="indefinite"/>
+                        <p:cond evt="onBegin" delay="0">
+                          <p:tn val="2"/>
+                        </p:cond>
+                      </p:stCondLst>
+                      <p:childTnLst>
+                        <p:par>
+                          <p:cTn id="4" fill="hold">
+                            <p:stCondLst>
+                              <p:cond delay="0"/>
+                            </p:stCondLst>
+                            <p:childTnLst>
+                              <p:par>
+                                <p:cTn id="5" presetID="1" presetClass="mediacall" presetSubtype="0" fill="hold" nodeType="afterEffect">
+                                  <p:stCondLst>
+                                    <p:cond delay="0"/>
+                                  </p:stCondLst>
+                                  <p:childTnLst>
+                                    <p:cmd type="call" cmd="playFrom(0.0)">
+                                      <p:cBhvr>
+                                        <p:cTn id="6" dur="1" fill="hold"/>
+                                        <p:tgtEl>
+                                          <p:spTgt spid="4"/>
+                                        </p:tgtEl>
+                                      </p:cBhvr>
+                                    </p:cmd>
+                                  </p:childTnLst>
+                                </p:cTn>
+                              </p:par>
+                            </p:childTnLst>
+                          </p:cTn>
+                        </p:par>
+                      </p:childTnLst>
+                    </p:cTn>
+                  </p:par>
+                </p:childTnLst>
+              </p:cTn>
+              <p:prevCondLst>
+                <p:cond evt="onPrev" delay="0">
+                  <p:tgtEl>
+                    <p:sldTgt/>
+                  </p:tgtEl>
+                </p:cond>
+              </p:prevCondLst>
+              <p:nextCondLst>
+                <p:cond evt="onNext" delay="0">
+                  <p:tgtEl>
+                    <p:sldTgt/>
+                  </p:tgtEl>
+                </p:cond>
+              </p:nextCondLst>
+            </p:seq>
+            <p:audio isNarration="1">
+              <p:cMediaNode vol="80000" showWhenStopped="0">
+                <p:cTn id="7" fill="hold" display="0">
+                  <p:stCondLst>
+                    <p:cond delay="indefinite"/>
+                  </p:stCondLst>
+                  <p:endCondLst>
+                    <p:cond evt="onStopAudio" delay="0">
+                      <p:tgtEl>
+                        <p:sldTgt/>
+                      </p:tgtEl>
+                    </p:cond>
+                  </p:endCondLst>
+                </p:cTn>
+                <p:tgtEl>
+                  <p:spTgt spid="4"/>
+                </p:tgtEl>
+              </p:cMediaNode>
+            </p:audio>
+          </p:childTnLst>
+        </p:cTn>
       </p:par>
     </p:tnLst>
   </p:timing>

--- a/wwwroot/webCourse/Templates/Bitmap-Video-2D-PPT.pptx
+++ b/wwwroot/webCourse/Templates/Bitmap-Video-2D-PPT.pptx
@@ -1901,164 +1901,6 @@
 </p:sldLayout>
 </file>
 
-<file path=ppt/slideLayouts/slideLayout10.xml><?xml version="1.0" encoding="utf-8"?>
-<p:sldLayout xmlns:a="http://schemas.openxmlformats.org/drawingml/2006/main" xmlns:r="http://schemas.openxmlformats.org/officeDocument/2006/relationships" xmlns:p="http://schemas.openxmlformats.org/presentationml/2006/main" type="objOnly" preserve="1">
-  <p:cSld name="内容">
-    <p:spTree>
-      <p:nvGrpSpPr>
-        <p:cNvPr id="1" name=""/>
-        <p:cNvGrpSpPr/>
-        <p:nvPr/>
-      </p:nvGrpSpPr>
-      <p:grpSpPr>
-        <a:xfrm>
-          <a:off x="0" y="0"/>
-          <a:ext cx="0" cy="0"/>
-          <a:chOff x="0" y="0"/>
-          <a:chExt cx="0" cy="0"/>
-        </a:xfrm>
-      </p:grpSpPr>
-      <p:sp>
-        <p:nvSpPr>
-          <p:cNvPr id="2" name="内容占位符 1"/>
-          <p:cNvSpPr>
-            <a:spLocks noGrp="1"/>
-          </p:cNvSpPr>
-          <p:nvPr>
-            <p:ph/>
-          </p:nvPr>
-        </p:nvSpPr>
-        <p:spPr>
-          <a:xfrm>
-            <a:off x="628650" y="273844"/>
-            <a:ext cx="7886700" cy="4358879"/>
-          </a:xfrm>
-        </p:spPr>
-        <p:txBody>
-          <a:bodyPr/>
-          <a:lstStyle/>
-          <a:p>
-            <a:pPr lvl="0"/>
-            <a:r>
-              <a:rPr lang="zh-CN" altLang="en-US"/>
-              <a:t>单击此处编辑母版文本样式</a:t>
-            </a:r>
-          </a:p>
-          <a:p>
-            <a:pPr lvl="1"/>
-            <a:r>
-              <a:rPr lang="zh-CN" altLang="en-US"/>
-              <a:t>第二级</a:t>
-            </a:r>
-          </a:p>
-          <a:p>
-            <a:pPr lvl="2"/>
-            <a:r>
-              <a:rPr lang="zh-CN" altLang="en-US"/>
-              <a:t>第三级</a:t>
-            </a:r>
-          </a:p>
-          <a:p>
-            <a:pPr lvl="3"/>
-            <a:r>
-              <a:rPr lang="zh-CN" altLang="en-US"/>
-              <a:t>第四级</a:t>
-            </a:r>
-          </a:p>
-          <a:p>
-            <a:pPr lvl="4"/>
-            <a:r>
-              <a:rPr lang="zh-CN" altLang="en-US"/>
-              <a:t>第五级</a:t>
-            </a:r>
-          </a:p>
-        </p:txBody>
-      </p:sp>
-      <p:sp>
-        <p:nvSpPr>
-          <p:cNvPr id="3" name="日期占位符 2"/>
-          <p:cNvSpPr>
-            <a:spLocks noGrp="1"/>
-          </p:cNvSpPr>
-          <p:nvPr>
-            <p:ph type="dt" sz="half" idx="10"/>
-          </p:nvPr>
-        </p:nvSpPr>
-        <p:spPr/>
-        <p:txBody>
-          <a:bodyPr/>
-          <a:lstStyle/>
-          <a:p>
-            <a:fld id="{82F288E0-7875-42C4-84C8-98DBBD3BF4D2}" type="datetimeFigureOut">
-              <a:rPr lang="zh-CN" altLang="en-US" smtClean="0"/>
-              <a:t>2023/10/29</a:t>
-            </a:fld>
-            <a:endParaRPr lang="zh-CN" altLang="en-US"/>
-          </a:p>
-        </p:txBody>
-      </p:sp>
-      <p:sp>
-        <p:nvSpPr>
-          <p:cNvPr id="4" name="页脚占位符 3"/>
-          <p:cNvSpPr>
-            <a:spLocks noGrp="1"/>
-          </p:cNvSpPr>
-          <p:nvPr>
-            <p:ph type="ftr" sz="quarter" idx="11"/>
-          </p:nvPr>
-        </p:nvSpPr>
-        <p:spPr/>
-        <p:txBody>
-          <a:bodyPr/>
-          <a:lstStyle/>
-          <a:p>
-            <a:endParaRPr lang="zh-CN" altLang="en-US"/>
-          </a:p>
-        </p:txBody>
-      </p:sp>
-      <p:sp>
-        <p:nvSpPr>
-          <p:cNvPr id="5" name="灯片编号占位符 4"/>
-          <p:cNvSpPr>
-            <a:spLocks noGrp="1"/>
-          </p:cNvSpPr>
-          <p:nvPr>
-            <p:ph type="sldNum" sz="quarter" idx="12"/>
-          </p:nvPr>
-        </p:nvSpPr>
-        <p:spPr/>
-        <p:txBody>
-          <a:bodyPr/>
-          <a:lstStyle/>
-          <a:p>
-            <a:fld id="{7D9BB5D0-35E4-459D-AEF3-FE4D7C45CC19}" type="slidenum">
-              <a:rPr lang="zh-CN" altLang="en-US" smtClean="0"/>
-              <a:t>‹#›</a:t>
-            </a:fld>
-            <a:endParaRPr lang="zh-CN" altLang="en-US"/>
-          </a:p>
-        </p:txBody>
-      </p:sp>
-    </p:spTree>
-  </p:cSld>
-  <p:clrMapOvr>
-    <a:masterClrMapping/>
-  </p:clrMapOvr>
-  <mc:AlternateContent xmlns:mc="http://schemas.openxmlformats.org/markup-compatibility/2006" xmlns:p15="http://schemas.microsoft.com/office/powerpoint/2012/main">
-    <mc:Choice Requires="p15">
-      <p:transition xmlns:p14="http://schemas.microsoft.com/office/powerpoint/2010/main" spd="slow" p14:dur="1250">
-        <p15:prstTrans prst="peelOff"/>
-      </p:transition>
-    </mc:Choice>
-    <mc:Fallback xmlns="">
-      <p:transition spd="slow">
-        <p:fade/>
-      </p:transition>
-    </mc:Fallback>
-  </mc:AlternateContent>
-</p:sldLayout>
-</file>
-
 <file path=ppt/slideLayouts/slideLayout2.xml><?xml version="1.0" encoding="utf-8"?>
 <p:sldLayout xmlns:a="http://schemas.openxmlformats.org/drawingml/2006/main" xmlns:r="http://schemas.openxmlformats.org/officeDocument/2006/relationships" xmlns:p="http://schemas.openxmlformats.org/presentationml/2006/main" preserve="1" userDrawn="1">
   <p:cSld name="标题和内容">
@@ -2126,6 +1968,53 @@
           </a:p>
         </p:txBody>
       </p:sp>
+      <p:sp>
+        <p:nvSpPr>
+          <p:cNvPr id="3" name="文本框 1"/>
+          <p:cNvSpPr txBox="1"/>
+          <p:nvPr userDrawn="1"/>
+        </p:nvSpPr>
+        <p:spPr>
+          <a:xfrm>
+            <a:off x="5976174" y="4589618"/>
+            <a:ext cx="2810563" cy="315471"/>
+          </a:xfrm>
+          <a:prstGeom prst="rect">
+            <a:avLst/>
+          </a:prstGeom>
+          <a:noFill/>
+        </p:spPr>
+        <p:txBody>
+          <a:bodyPr wrap="square" lIns="68580" tIns="34290" rIns="68580" bIns="34290" rtlCol="0">
+            <a:spAutoFit/>
+          </a:bodyPr>
+          <a:lstStyle/>
+          <a:p>
+            <a:pPr algn="ctr">
+              <a:defRPr/>
+            </a:pPr>
+            <a:r>
+              <a:rPr lang="en-US" altLang="zh-CN" sz="1600" dirty="0" smtClean="0">
+                <a:solidFill>
+                  <a:srgbClr val="00B050"/>
+                </a:solidFill>
+                <a:latin typeface="微软雅黑" panose="020B0503020204020204" pitchFamily="34" charset="-122"/>
+                <a:ea typeface="微软雅黑" panose="020B0503020204020204" pitchFamily="34" charset="-122"/>
+                <a:sym typeface="+mn-ea"/>
+              </a:rPr>
+              <a:t>yuqin9999@dingtalk.com</a:t>
+            </a:r>
+            <a:endParaRPr lang="zh-CN" altLang="en-US" sz="1600" dirty="0">
+              <a:solidFill>
+                <a:srgbClr val="00B050"/>
+              </a:solidFill>
+              <a:latin typeface="微软雅黑" panose="020B0503020204020204" pitchFamily="34" charset="-122"/>
+              <a:ea typeface="微软雅黑" panose="020B0503020204020204" pitchFamily="34" charset="-122"/>
+              <a:sym typeface="+mn-ea"/>
+            </a:endParaRPr>
+          </a:p>
+        </p:txBody>
+      </p:sp>
     </p:spTree>
   </p:cSld>
   <p:clrMapOvr>
@@ -2147,8 +2036,8 @@
 </file>
 
 <file path=ppt/slideLayouts/slideLayout3.xml><?xml version="1.0" encoding="utf-8"?>
-<p:sldLayout xmlns:a="http://schemas.openxmlformats.org/drawingml/2006/main" xmlns:r="http://schemas.openxmlformats.org/officeDocument/2006/relationships" xmlns:p="http://schemas.openxmlformats.org/presentationml/2006/main" type="secHead" preserve="1">
-  <p:cSld name="节标题">
+<p:sldLayout xmlns:a="http://schemas.openxmlformats.org/drawingml/2006/main" xmlns:r="http://schemas.openxmlformats.org/officeDocument/2006/relationships" xmlns:p="http://schemas.openxmlformats.org/presentationml/2006/main" type="titleOnly" preserve="1">
+  <p:cSld name="仅标题">
     <p:spTree>
       <p:nvGrpSpPr>
         <p:cNvPr id="1" name=""/>
@@ -2173,19 +2062,10 @@
             <p:ph type="title"/>
           </p:nvPr>
         </p:nvSpPr>
-        <p:spPr>
-          <a:xfrm>
-            <a:off x="623888" y="1282304"/>
-            <a:ext cx="7886700" cy="2139553"/>
-          </a:xfrm>
-        </p:spPr>
-        <p:txBody>
-          <a:bodyPr anchor="b"/>
-          <a:lstStyle>
-            <a:lvl1pPr>
-              <a:defRPr sz="4500"/>
-            </a:lvl1pPr>
-          </a:lstStyle>
+        <p:spPr/>
+        <p:txBody>
+          <a:bodyPr/>
+          <a:lstStyle/>
           <a:p>
             <a:r>
               <a:rPr lang="zh-CN" altLang="en-US"/>
@@ -2196,126 +2076,7 @@
       </p:sp>
       <p:sp>
         <p:nvSpPr>
-          <p:cNvPr id="3" name="文本占位符 2"/>
-          <p:cNvSpPr>
-            <a:spLocks noGrp="1"/>
-          </p:cNvSpPr>
-          <p:nvPr>
-            <p:ph type="body" idx="1"/>
-          </p:nvPr>
-        </p:nvSpPr>
-        <p:spPr>
-          <a:xfrm>
-            <a:off x="623888" y="3442098"/>
-            <a:ext cx="7886700" cy="1125140"/>
-          </a:xfrm>
-        </p:spPr>
-        <p:txBody>
-          <a:bodyPr/>
-          <a:lstStyle>
-            <a:lvl1pPr marL="0" indent="0">
-              <a:buNone/>
-              <a:defRPr sz="1800">
-                <a:solidFill>
-                  <a:schemeClr val="tx1">
-                    <a:tint val="75000"/>
-                  </a:schemeClr>
-                </a:solidFill>
-              </a:defRPr>
-            </a:lvl1pPr>
-            <a:lvl2pPr marL="342900" indent="0">
-              <a:buNone/>
-              <a:defRPr sz="1500">
-                <a:solidFill>
-                  <a:schemeClr val="tx1">
-                    <a:tint val="75000"/>
-                  </a:schemeClr>
-                </a:solidFill>
-              </a:defRPr>
-            </a:lvl2pPr>
-            <a:lvl3pPr marL="685800" indent="0">
-              <a:buNone/>
-              <a:defRPr sz="1400">
-                <a:solidFill>
-                  <a:schemeClr val="tx1">
-                    <a:tint val="75000"/>
-                  </a:schemeClr>
-                </a:solidFill>
-              </a:defRPr>
-            </a:lvl3pPr>
-            <a:lvl4pPr marL="1028700" indent="0">
-              <a:buNone/>
-              <a:defRPr sz="1200">
-                <a:solidFill>
-                  <a:schemeClr val="tx1">
-                    <a:tint val="75000"/>
-                  </a:schemeClr>
-                </a:solidFill>
-              </a:defRPr>
-            </a:lvl4pPr>
-            <a:lvl5pPr marL="1371600" indent="0">
-              <a:buNone/>
-              <a:defRPr sz="1200">
-                <a:solidFill>
-                  <a:schemeClr val="tx1">
-                    <a:tint val="75000"/>
-                  </a:schemeClr>
-                </a:solidFill>
-              </a:defRPr>
-            </a:lvl5pPr>
-            <a:lvl6pPr marL="1714500" indent="0">
-              <a:buNone/>
-              <a:defRPr sz="1200">
-                <a:solidFill>
-                  <a:schemeClr val="tx1">
-                    <a:tint val="75000"/>
-                  </a:schemeClr>
-                </a:solidFill>
-              </a:defRPr>
-            </a:lvl6pPr>
-            <a:lvl7pPr marL="2057400" indent="0">
-              <a:buNone/>
-              <a:defRPr sz="1200">
-                <a:solidFill>
-                  <a:schemeClr val="tx1">
-                    <a:tint val="75000"/>
-                  </a:schemeClr>
-                </a:solidFill>
-              </a:defRPr>
-            </a:lvl7pPr>
-            <a:lvl8pPr marL="2400300" indent="0">
-              <a:buNone/>
-              <a:defRPr sz="1200">
-                <a:solidFill>
-                  <a:schemeClr val="tx1">
-                    <a:tint val="75000"/>
-                  </a:schemeClr>
-                </a:solidFill>
-              </a:defRPr>
-            </a:lvl8pPr>
-            <a:lvl9pPr marL="2743200" indent="0">
-              <a:buNone/>
-              <a:defRPr sz="1200">
-                <a:solidFill>
-                  <a:schemeClr val="tx1">
-                    <a:tint val="75000"/>
-                  </a:schemeClr>
-                </a:solidFill>
-              </a:defRPr>
-            </a:lvl9pPr>
-          </a:lstStyle>
-          <a:p>
-            <a:pPr lvl="0"/>
-            <a:r>
-              <a:rPr lang="zh-CN" altLang="en-US"/>
-              <a:t>单击此处编辑母版文本样式</a:t>
-            </a:r>
-          </a:p>
-        </p:txBody>
-      </p:sp>
-      <p:sp>
-        <p:nvSpPr>
-          <p:cNvPr id="4" name="日期占位符 3"/>
+          <p:cNvPr id="3" name="日期占位符 2"/>
           <p:cNvSpPr>
             <a:spLocks noGrp="1"/>
           </p:cNvSpPr>
@@ -2338,7 +2099,7 @@
       </p:sp>
       <p:sp>
         <p:nvSpPr>
-          <p:cNvPr id="5" name="页脚占位符 4"/>
+          <p:cNvPr id="4" name="页脚占位符 3"/>
           <p:cNvSpPr>
             <a:spLocks noGrp="1"/>
           </p:cNvSpPr>
@@ -2357,7 +2118,7 @@
       </p:sp>
       <p:sp>
         <p:nvSpPr>
-          <p:cNvPr id="6" name="灯片编号占位符 5"/>
+          <p:cNvPr id="5" name="灯片编号占位符 4"/>
           <p:cNvSpPr>
             <a:spLocks noGrp="1"/>
           </p:cNvSpPr>
@@ -2399,737 +2160,6 @@
 </file>
 
 <file path=ppt/slideLayouts/slideLayout4.xml><?xml version="1.0" encoding="utf-8"?>
-<p:sldLayout xmlns:a="http://schemas.openxmlformats.org/drawingml/2006/main" xmlns:r="http://schemas.openxmlformats.org/officeDocument/2006/relationships" xmlns:p="http://schemas.openxmlformats.org/presentationml/2006/main" type="twoObj" preserve="1">
-  <p:cSld name="两栏内容">
-    <p:spTree>
-      <p:nvGrpSpPr>
-        <p:cNvPr id="1" name=""/>
-        <p:cNvGrpSpPr/>
-        <p:nvPr/>
-      </p:nvGrpSpPr>
-      <p:grpSpPr>
-        <a:xfrm>
-          <a:off x="0" y="0"/>
-          <a:ext cx="0" cy="0"/>
-          <a:chOff x="0" y="0"/>
-          <a:chExt cx="0" cy="0"/>
-        </a:xfrm>
-      </p:grpSpPr>
-      <p:sp>
-        <p:nvSpPr>
-          <p:cNvPr id="2" name="标题 1"/>
-          <p:cNvSpPr>
-            <a:spLocks noGrp="1"/>
-          </p:cNvSpPr>
-          <p:nvPr>
-            <p:ph type="title"/>
-          </p:nvPr>
-        </p:nvSpPr>
-        <p:spPr/>
-        <p:txBody>
-          <a:bodyPr/>
-          <a:lstStyle/>
-          <a:p>
-            <a:r>
-              <a:rPr lang="zh-CN" altLang="en-US"/>
-              <a:t>单击此处编辑母版标题样式</a:t>
-            </a:r>
-          </a:p>
-        </p:txBody>
-      </p:sp>
-      <p:sp>
-        <p:nvSpPr>
-          <p:cNvPr id="3" name="内容占位符 2"/>
-          <p:cNvSpPr>
-            <a:spLocks noGrp="1"/>
-          </p:cNvSpPr>
-          <p:nvPr>
-            <p:ph sz="half" idx="1"/>
-          </p:nvPr>
-        </p:nvSpPr>
-        <p:spPr>
-          <a:xfrm>
-            <a:off x="628650" y="1369219"/>
-            <a:ext cx="3886200" cy="3263504"/>
-          </a:xfrm>
-        </p:spPr>
-        <p:txBody>
-          <a:bodyPr/>
-          <a:lstStyle/>
-          <a:p>
-            <a:pPr lvl="0"/>
-            <a:r>
-              <a:rPr lang="zh-CN" altLang="en-US"/>
-              <a:t>单击此处编辑母版文本样式</a:t>
-            </a:r>
-          </a:p>
-          <a:p>
-            <a:pPr lvl="1"/>
-            <a:r>
-              <a:rPr lang="zh-CN" altLang="en-US"/>
-              <a:t>第二级</a:t>
-            </a:r>
-          </a:p>
-          <a:p>
-            <a:pPr lvl="2"/>
-            <a:r>
-              <a:rPr lang="zh-CN" altLang="en-US"/>
-              <a:t>第三级</a:t>
-            </a:r>
-          </a:p>
-          <a:p>
-            <a:pPr lvl="3"/>
-            <a:r>
-              <a:rPr lang="zh-CN" altLang="en-US"/>
-              <a:t>第四级</a:t>
-            </a:r>
-          </a:p>
-          <a:p>
-            <a:pPr lvl="4"/>
-            <a:r>
-              <a:rPr lang="zh-CN" altLang="en-US"/>
-              <a:t>第五级</a:t>
-            </a:r>
-          </a:p>
-        </p:txBody>
-      </p:sp>
-      <p:sp>
-        <p:nvSpPr>
-          <p:cNvPr id="4" name="内容占位符 3"/>
-          <p:cNvSpPr>
-            <a:spLocks noGrp="1"/>
-          </p:cNvSpPr>
-          <p:nvPr>
-            <p:ph sz="half" idx="2"/>
-          </p:nvPr>
-        </p:nvSpPr>
-        <p:spPr>
-          <a:xfrm>
-            <a:off x="4629150" y="1369219"/>
-            <a:ext cx="3886200" cy="3263504"/>
-          </a:xfrm>
-        </p:spPr>
-        <p:txBody>
-          <a:bodyPr/>
-          <a:lstStyle/>
-          <a:p>
-            <a:pPr lvl="0"/>
-            <a:r>
-              <a:rPr lang="zh-CN" altLang="en-US"/>
-              <a:t>单击此处编辑母版文本样式</a:t>
-            </a:r>
-          </a:p>
-          <a:p>
-            <a:pPr lvl="1"/>
-            <a:r>
-              <a:rPr lang="zh-CN" altLang="en-US"/>
-              <a:t>第二级</a:t>
-            </a:r>
-          </a:p>
-          <a:p>
-            <a:pPr lvl="2"/>
-            <a:r>
-              <a:rPr lang="zh-CN" altLang="en-US"/>
-              <a:t>第三级</a:t>
-            </a:r>
-          </a:p>
-          <a:p>
-            <a:pPr lvl="3"/>
-            <a:r>
-              <a:rPr lang="zh-CN" altLang="en-US"/>
-              <a:t>第四级</a:t>
-            </a:r>
-          </a:p>
-          <a:p>
-            <a:pPr lvl="4"/>
-            <a:r>
-              <a:rPr lang="zh-CN" altLang="en-US"/>
-              <a:t>第五级</a:t>
-            </a:r>
-          </a:p>
-        </p:txBody>
-      </p:sp>
-      <p:sp>
-        <p:nvSpPr>
-          <p:cNvPr id="5" name="日期占位符 4"/>
-          <p:cNvSpPr>
-            <a:spLocks noGrp="1"/>
-          </p:cNvSpPr>
-          <p:nvPr>
-            <p:ph type="dt" sz="half" idx="10"/>
-          </p:nvPr>
-        </p:nvSpPr>
-        <p:spPr/>
-        <p:txBody>
-          <a:bodyPr/>
-          <a:lstStyle/>
-          <a:p>
-            <a:fld id="{82F288E0-7875-42C4-84C8-98DBBD3BF4D2}" type="datetimeFigureOut">
-              <a:rPr lang="zh-CN" altLang="en-US" smtClean="0"/>
-              <a:t>2023/10/29</a:t>
-            </a:fld>
-            <a:endParaRPr lang="zh-CN" altLang="en-US"/>
-          </a:p>
-        </p:txBody>
-      </p:sp>
-      <p:sp>
-        <p:nvSpPr>
-          <p:cNvPr id="6" name="页脚占位符 5"/>
-          <p:cNvSpPr>
-            <a:spLocks noGrp="1"/>
-          </p:cNvSpPr>
-          <p:nvPr>
-            <p:ph type="ftr" sz="quarter" idx="11"/>
-          </p:nvPr>
-        </p:nvSpPr>
-        <p:spPr/>
-        <p:txBody>
-          <a:bodyPr/>
-          <a:lstStyle/>
-          <a:p>
-            <a:endParaRPr lang="zh-CN" altLang="en-US"/>
-          </a:p>
-        </p:txBody>
-      </p:sp>
-      <p:sp>
-        <p:nvSpPr>
-          <p:cNvPr id="7" name="灯片编号占位符 6"/>
-          <p:cNvSpPr>
-            <a:spLocks noGrp="1"/>
-          </p:cNvSpPr>
-          <p:nvPr>
-            <p:ph type="sldNum" sz="quarter" idx="12"/>
-          </p:nvPr>
-        </p:nvSpPr>
-        <p:spPr/>
-        <p:txBody>
-          <a:bodyPr/>
-          <a:lstStyle/>
-          <a:p>
-            <a:fld id="{7D9BB5D0-35E4-459D-AEF3-FE4D7C45CC19}" type="slidenum">
-              <a:rPr lang="zh-CN" altLang="en-US" smtClean="0"/>
-              <a:t>‹#›</a:t>
-            </a:fld>
-            <a:endParaRPr lang="zh-CN" altLang="en-US"/>
-          </a:p>
-        </p:txBody>
-      </p:sp>
-    </p:spTree>
-  </p:cSld>
-  <p:clrMapOvr>
-    <a:masterClrMapping/>
-  </p:clrMapOvr>
-  <mc:AlternateContent xmlns:mc="http://schemas.openxmlformats.org/markup-compatibility/2006" xmlns:p15="http://schemas.microsoft.com/office/powerpoint/2012/main">
-    <mc:Choice Requires="p15">
-      <p:transition xmlns:p14="http://schemas.microsoft.com/office/powerpoint/2010/main" spd="slow" p14:dur="1250">
-        <p15:prstTrans prst="peelOff"/>
-      </p:transition>
-    </mc:Choice>
-    <mc:Fallback xmlns="">
-      <p:transition spd="slow">
-        <p:fade/>
-      </p:transition>
-    </mc:Fallback>
-  </mc:AlternateContent>
-</p:sldLayout>
-</file>
-
-<file path=ppt/slideLayouts/slideLayout5.xml><?xml version="1.0" encoding="utf-8"?>
-<p:sldLayout xmlns:a="http://schemas.openxmlformats.org/drawingml/2006/main" xmlns:r="http://schemas.openxmlformats.org/officeDocument/2006/relationships" xmlns:p="http://schemas.openxmlformats.org/presentationml/2006/main" type="twoTxTwoObj" preserve="1">
-  <p:cSld name="比较">
-    <p:spTree>
-      <p:nvGrpSpPr>
-        <p:cNvPr id="1" name=""/>
-        <p:cNvGrpSpPr/>
-        <p:nvPr/>
-      </p:nvGrpSpPr>
-      <p:grpSpPr>
-        <a:xfrm>
-          <a:off x="0" y="0"/>
-          <a:ext cx="0" cy="0"/>
-          <a:chOff x="0" y="0"/>
-          <a:chExt cx="0" cy="0"/>
-        </a:xfrm>
-      </p:grpSpPr>
-      <p:sp>
-        <p:nvSpPr>
-          <p:cNvPr id="2" name="标题 1"/>
-          <p:cNvSpPr>
-            <a:spLocks noGrp="1"/>
-          </p:cNvSpPr>
-          <p:nvPr>
-            <p:ph type="title"/>
-          </p:nvPr>
-        </p:nvSpPr>
-        <p:spPr>
-          <a:xfrm>
-            <a:off x="629841" y="273844"/>
-            <a:ext cx="7886700" cy="994172"/>
-          </a:xfrm>
-        </p:spPr>
-        <p:txBody>
-          <a:bodyPr/>
-          <a:lstStyle/>
-          <a:p>
-            <a:r>
-              <a:rPr lang="zh-CN" altLang="en-US"/>
-              <a:t>单击此处编辑母版标题样式</a:t>
-            </a:r>
-          </a:p>
-        </p:txBody>
-      </p:sp>
-      <p:sp>
-        <p:nvSpPr>
-          <p:cNvPr id="3" name="文本占位符 2"/>
-          <p:cNvSpPr>
-            <a:spLocks noGrp="1"/>
-          </p:cNvSpPr>
-          <p:nvPr>
-            <p:ph type="body" idx="1"/>
-          </p:nvPr>
-        </p:nvSpPr>
-        <p:spPr>
-          <a:xfrm>
-            <a:off x="890080" y="1333829"/>
-            <a:ext cx="3655181" cy="617934"/>
-          </a:xfrm>
-        </p:spPr>
-        <p:txBody>
-          <a:bodyPr anchor="ctr" anchorCtr="0"/>
-          <a:lstStyle>
-            <a:lvl1pPr marL="0" indent="0">
-              <a:buNone/>
-              <a:defRPr sz="2100"/>
-            </a:lvl1pPr>
-            <a:lvl2pPr marL="342900" indent="0">
-              <a:buNone/>
-              <a:defRPr sz="1800"/>
-            </a:lvl2pPr>
-            <a:lvl3pPr marL="685800" indent="0">
-              <a:buNone/>
-              <a:defRPr sz="1500"/>
-            </a:lvl3pPr>
-            <a:lvl4pPr marL="1028700" indent="0">
-              <a:buNone/>
-              <a:defRPr sz="1400"/>
-            </a:lvl4pPr>
-            <a:lvl5pPr marL="1371600" indent="0">
-              <a:buNone/>
-              <a:defRPr sz="1400"/>
-            </a:lvl5pPr>
-            <a:lvl6pPr marL="1714500" indent="0">
-              <a:buNone/>
-              <a:defRPr sz="1400"/>
-            </a:lvl6pPr>
-            <a:lvl7pPr marL="2057400" indent="0">
-              <a:buNone/>
-              <a:defRPr sz="1400"/>
-            </a:lvl7pPr>
-            <a:lvl8pPr marL="2400300" indent="0">
-              <a:buNone/>
-              <a:defRPr sz="1400"/>
-            </a:lvl8pPr>
-            <a:lvl9pPr marL="2743200" indent="0">
-              <a:buNone/>
-              <a:defRPr sz="1400"/>
-            </a:lvl9pPr>
-          </a:lstStyle>
-          <a:p>
-            <a:pPr lvl="0"/>
-            <a:r>
-              <a:rPr lang="zh-CN" altLang="en-US"/>
-              <a:t>单击此处编辑母版文本样式</a:t>
-            </a:r>
-          </a:p>
-        </p:txBody>
-      </p:sp>
-      <p:sp>
-        <p:nvSpPr>
-          <p:cNvPr id="4" name="内容占位符 3"/>
-          <p:cNvSpPr>
-            <a:spLocks noGrp="1"/>
-          </p:cNvSpPr>
-          <p:nvPr>
-            <p:ph sz="half" idx="2"/>
-          </p:nvPr>
-        </p:nvSpPr>
-        <p:spPr>
-          <a:xfrm>
-            <a:off x="890080" y="1999034"/>
-            <a:ext cx="3655181" cy="2643213"/>
-          </a:xfrm>
-        </p:spPr>
-        <p:txBody>
-          <a:bodyPr/>
-          <a:lstStyle/>
-          <a:p>
-            <a:pPr lvl="0"/>
-            <a:r>
-              <a:rPr lang="zh-CN" altLang="en-US"/>
-              <a:t>单击此处编辑母版文本样式</a:t>
-            </a:r>
-          </a:p>
-          <a:p>
-            <a:pPr lvl="1"/>
-            <a:r>
-              <a:rPr lang="zh-CN" altLang="en-US"/>
-              <a:t>第二级</a:t>
-            </a:r>
-          </a:p>
-          <a:p>
-            <a:pPr lvl="2"/>
-            <a:r>
-              <a:rPr lang="zh-CN" altLang="en-US"/>
-              <a:t>第三级</a:t>
-            </a:r>
-          </a:p>
-          <a:p>
-            <a:pPr lvl="3"/>
-            <a:r>
-              <a:rPr lang="zh-CN" altLang="en-US"/>
-              <a:t>第四级</a:t>
-            </a:r>
-          </a:p>
-          <a:p>
-            <a:pPr lvl="4"/>
-            <a:r>
-              <a:rPr lang="zh-CN" altLang="en-US"/>
-              <a:t>第五级</a:t>
-            </a:r>
-          </a:p>
-        </p:txBody>
-      </p:sp>
-      <p:sp>
-        <p:nvSpPr>
-          <p:cNvPr id="5" name="文本占位符 4"/>
-          <p:cNvSpPr>
-            <a:spLocks noGrp="1"/>
-          </p:cNvSpPr>
-          <p:nvPr>
-            <p:ph type="body" sz="quarter" idx="3"/>
-          </p:nvPr>
-        </p:nvSpPr>
-        <p:spPr>
-          <a:xfrm>
-            <a:off x="4692704" y="1333829"/>
-            <a:ext cx="3673182" cy="617934"/>
-          </a:xfrm>
-        </p:spPr>
-        <p:txBody>
-          <a:bodyPr anchor="ctr" anchorCtr="0"/>
-          <a:lstStyle>
-            <a:lvl1pPr marL="0" indent="0">
-              <a:buNone/>
-              <a:defRPr sz="2100"/>
-            </a:lvl1pPr>
-            <a:lvl2pPr marL="342900" indent="0">
-              <a:buNone/>
-              <a:defRPr sz="1800"/>
-            </a:lvl2pPr>
-            <a:lvl3pPr marL="685800" indent="0">
-              <a:buNone/>
-              <a:defRPr sz="1500"/>
-            </a:lvl3pPr>
-            <a:lvl4pPr marL="1028700" indent="0">
-              <a:buNone/>
-              <a:defRPr sz="1400"/>
-            </a:lvl4pPr>
-            <a:lvl5pPr marL="1371600" indent="0">
-              <a:buNone/>
-              <a:defRPr sz="1400"/>
-            </a:lvl5pPr>
-            <a:lvl6pPr marL="1714500" indent="0">
-              <a:buNone/>
-              <a:defRPr sz="1400"/>
-            </a:lvl6pPr>
-            <a:lvl7pPr marL="2057400" indent="0">
-              <a:buNone/>
-              <a:defRPr sz="1400"/>
-            </a:lvl7pPr>
-            <a:lvl8pPr marL="2400300" indent="0">
-              <a:buNone/>
-              <a:defRPr sz="1400"/>
-            </a:lvl8pPr>
-            <a:lvl9pPr marL="2743200" indent="0">
-              <a:buNone/>
-              <a:defRPr sz="1400"/>
-            </a:lvl9pPr>
-          </a:lstStyle>
-          <a:p>
-            <a:pPr lvl="0"/>
-            <a:r>
-              <a:rPr lang="zh-CN" altLang="en-US"/>
-              <a:t>单击此处编辑母版文本样式</a:t>
-            </a:r>
-          </a:p>
-        </p:txBody>
-      </p:sp>
-      <p:sp>
-        <p:nvSpPr>
-          <p:cNvPr id="6" name="内容占位符 5"/>
-          <p:cNvSpPr>
-            <a:spLocks noGrp="1"/>
-          </p:cNvSpPr>
-          <p:nvPr>
-            <p:ph sz="quarter" idx="4"/>
-          </p:nvPr>
-        </p:nvSpPr>
-        <p:spPr>
-          <a:xfrm>
-            <a:off x="4692704" y="1999034"/>
-            <a:ext cx="3673182" cy="2643213"/>
-          </a:xfrm>
-        </p:spPr>
-        <p:txBody>
-          <a:bodyPr/>
-          <a:lstStyle/>
-          <a:p>
-            <a:pPr lvl="0"/>
-            <a:r>
-              <a:rPr lang="zh-CN" altLang="en-US"/>
-              <a:t>单击此处编辑母版文本样式</a:t>
-            </a:r>
-          </a:p>
-          <a:p>
-            <a:pPr lvl="1"/>
-            <a:r>
-              <a:rPr lang="zh-CN" altLang="en-US"/>
-              <a:t>第二级</a:t>
-            </a:r>
-          </a:p>
-          <a:p>
-            <a:pPr lvl="2"/>
-            <a:r>
-              <a:rPr lang="zh-CN" altLang="en-US"/>
-              <a:t>第三级</a:t>
-            </a:r>
-          </a:p>
-          <a:p>
-            <a:pPr lvl="3"/>
-            <a:r>
-              <a:rPr lang="zh-CN" altLang="en-US"/>
-              <a:t>第四级</a:t>
-            </a:r>
-          </a:p>
-          <a:p>
-            <a:pPr lvl="4"/>
-            <a:r>
-              <a:rPr lang="zh-CN" altLang="en-US"/>
-              <a:t>第五级</a:t>
-            </a:r>
-          </a:p>
-        </p:txBody>
-      </p:sp>
-      <p:sp>
-        <p:nvSpPr>
-          <p:cNvPr id="7" name="日期占位符 6"/>
-          <p:cNvSpPr>
-            <a:spLocks noGrp="1"/>
-          </p:cNvSpPr>
-          <p:nvPr>
-            <p:ph type="dt" sz="half" idx="10"/>
-          </p:nvPr>
-        </p:nvSpPr>
-        <p:spPr/>
-        <p:txBody>
-          <a:bodyPr/>
-          <a:lstStyle/>
-          <a:p>
-            <a:fld id="{82F288E0-7875-42C4-84C8-98DBBD3BF4D2}" type="datetimeFigureOut">
-              <a:rPr lang="zh-CN" altLang="en-US" smtClean="0"/>
-              <a:t>2023/10/29</a:t>
-            </a:fld>
-            <a:endParaRPr lang="zh-CN" altLang="en-US"/>
-          </a:p>
-        </p:txBody>
-      </p:sp>
-      <p:sp>
-        <p:nvSpPr>
-          <p:cNvPr id="8" name="页脚占位符 7"/>
-          <p:cNvSpPr>
-            <a:spLocks noGrp="1"/>
-          </p:cNvSpPr>
-          <p:nvPr>
-            <p:ph type="ftr" sz="quarter" idx="11"/>
-          </p:nvPr>
-        </p:nvSpPr>
-        <p:spPr/>
-        <p:txBody>
-          <a:bodyPr/>
-          <a:lstStyle/>
-          <a:p>
-            <a:endParaRPr lang="zh-CN" altLang="en-US"/>
-          </a:p>
-        </p:txBody>
-      </p:sp>
-      <p:sp>
-        <p:nvSpPr>
-          <p:cNvPr id="9" name="灯片编号占位符 8"/>
-          <p:cNvSpPr>
-            <a:spLocks noGrp="1"/>
-          </p:cNvSpPr>
-          <p:nvPr>
-            <p:ph type="sldNum" sz="quarter" idx="12"/>
-          </p:nvPr>
-        </p:nvSpPr>
-        <p:spPr/>
-        <p:txBody>
-          <a:bodyPr/>
-          <a:lstStyle/>
-          <a:p>
-            <a:fld id="{7D9BB5D0-35E4-459D-AEF3-FE4D7C45CC19}" type="slidenum">
-              <a:rPr lang="zh-CN" altLang="en-US" smtClean="0"/>
-              <a:t>‹#›</a:t>
-            </a:fld>
-            <a:endParaRPr lang="zh-CN" altLang="en-US"/>
-          </a:p>
-        </p:txBody>
-      </p:sp>
-    </p:spTree>
-  </p:cSld>
-  <p:clrMapOvr>
-    <a:masterClrMapping/>
-  </p:clrMapOvr>
-  <mc:AlternateContent xmlns:mc="http://schemas.openxmlformats.org/markup-compatibility/2006" xmlns:p15="http://schemas.microsoft.com/office/powerpoint/2012/main">
-    <mc:Choice Requires="p15">
-      <p:transition xmlns:p14="http://schemas.microsoft.com/office/powerpoint/2010/main" spd="slow" p14:dur="1250">
-        <p15:prstTrans prst="peelOff"/>
-      </p:transition>
-    </mc:Choice>
-    <mc:Fallback xmlns="">
-      <p:transition spd="slow">
-        <p:fade/>
-      </p:transition>
-    </mc:Fallback>
-  </mc:AlternateContent>
-</p:sldLayout>
-</file>
-
-<file path=ppt/slideLayouts/slideLayout6.xml><?xml version="1.0" encoding="utf-8"?>
-<p:sldLayout xmlns:a="http://schemas.openxmlformats.org/drawingml/2006/main" xmlns:r="http://schemas.openxmlformats.org/officeDocument/2006/relationships" xmlns:p="http://schemas.openxmlformats.org/presentationml/2006/main" type="titleOnly" preserve="1">
-  <p:cSld name="仅标题">
-    <p:spTree>
-      <p:nvGrpSpPr>
-        <p:cNvPr id="1" name=""/>
-        <p:cNvGrpSpPr/>
-        <p:nvPr/>
-      </p:nvGrpSpPr>
-      <p:grpSpPr>
-        <a:xfrm>
-          <a:off x="0" y="0"/>
-          <a:ext cx="0" cy="0"/>
-          <a:chOff x="0" y="0"/>
-          <a:chExt cx="0" cy="0"/>
-        </a:xfrm>
-      </p:grpSpPr>
-      <p:sp>
-        <p:nvSpPr>
-          <p:cNvPr id="2" name="标题 1"/>
-          <p:cNvSpPr>
-            <a:spLocks noGrp="1"/>
-          </p:cNvSpPr>
-          <p:nvPr>
-            <p:ph type="title"/>
-          </p:nvPr>
-        </p:nvSpPr>
-        <p:spPr/>
-        <p:txBody>
-          <a:bodyPr/>
-          <a:lstStyle/>
-          <a:p>
-            <a:r>
-              <a:rPr lang="zh-CN" altLang="en-US"/>
-              <a:t>单击此处编辑母版标题样式</a:t>
-            </a:r>
-          </a:p>
-        </p:txBody>
-      </p:sp>
-      <p:sp>
-        <p:nvSpPr>
-          <p:cNvPr id="3" name="日期占位符 2"/>
-          <p:cNvSpPr>
-            <a:spLocks noGrp="1"/>
-          </p:cNvSpPr>
-          <p:nvPr>
-            <p:ph type="dt" sz="half" idx="10"/>
-          </p:nvPr>
-        </p:nvSpPr>
-        <p:spPr/>
-        <p:txBody>
-          <a:bodyPr/>
-          <a:lstStyle/>
-          <a:p>
-            <a:fld id="{82F288E0-7875-42C4-84C8-98DBBD3BF4D2}" type="datetimeFigureOut">
-              <a:rPr lang="zh-CN" altLang="en-US" smtClean="0"/>
-              <a:t>2023/10/29</a:t>
-            </a:fld>
-            <a:endParaRPr lang="zh-CN" altLang="en-US"/>
-          </a:p>
-        </p:txBody>
-      </p:sp>
-      <p:sp>
-        <p:nvSpPr>
-          <p:cNvPr id="4" name="页脚占位符 3"/>
-          <p:cNvSpPr>
-            <a:spLocks noGrp="1"/>
-          </p:cNvSpPr>
-          <p:nvPr>
-            <p:ph type="ftr" sz="quarter" idx="11"/>
-          </p:nvPr>
-        </p:nvSpPr>
-        <p:spPr/>
-        <p:txBody>
-          <a:bodyPr/>
-          <a:lstStyle/>
-          <a:p>
-            <a:endParaRPr lang="zh-CN" altLang="en-US"/>
-          </a:p>
-        </p:txBody>
-      </p:sp>
-      <p:sp>
-        <p:nvSpPr>
-          <p:cNvPr id="5" name="灯片编号占位符 4"/>
-          <p:cNvSpPr>
-            <a:spLocks noGrp="1"/>
-          </p:cNvSpPr>
-          <p:nvPr>
-            <p:ph type="sldNum" sz="quarter" idx="12"/>
-          </p:nvPr>
-        </p:nvSpPr>
-        <p:spPr/>
-        <p:txBody>
-          <a:bodyPr/>
-          <a:lstStyle/>
-          <a:p>
-            <a:fld id="{7D9BB5D0-35E4-459D-AEF3-FE4D7C45CC19}" type="slidenum">
-              <a:rPr lang="zh-CN" altLang="en-US" smtClean="0"/>
-              <a:t>‹#›</a:t>
-            </a:fld>
-            <a:endParaRPr lang="zh-CN" altLang="en-US"/>
-          </a:p>
-        </p:txBody>
-      </p:sp>
-    </p:spTree>
-  </p:cSld>
-  <p:clrMapOvr>
-    <a:masterClrMapping/>
-  </p:clrMapOvr>
-  <mc:AlternateContent xmlns:mc="http://schemas.openxmlformats.org/markup-compatibility/2006" xmlns:p15="http://schemas.microsoft.com/office/powerpoint/2012/main">
-    <mc:Choice Requires="p15">
-      <p:transition xmlns:p14="http://schemas.microsoft.com/office/powerpoint/2010/main" spd="slow" p14:dur="1250">
-        <p15:prstTrans prst="peelOff"/>
-      </p:transition>
-    </mc:Choice>
-    <mc:Fallback xmlns="">
-      <p:transition spd="slow">
-        <p:fade/>
-      </p:transition>
-    </mc:Fallback>
-  </mc:AlternateContent>
-</p:sldLayout>
-</file>
-
-<file path=ppt/slideLayouts/slideLayout7.xml><?xml version="1.0" encoding="utf-8"?>
 <p:sldLayout xmlns:a="http://schemas.openxmlformats.org/drawingml/2006/main" xmlns:r="http://schemas.openxmlformats.org/officeDocument/2006/relationships" xmlns:p="http://schemas.openxmlformats.org/presentationml/2006/main" type="blank" preserve="1">
   <p:cSld name="空白">
     <p:spTree>
@@ -3191,450 +2221,6 @@
       <p:sp>
         <p:nvSpPr>
           <p:cNvPr id="4" name="灯片编号占位符 3"/>
-          <p:cNvSpPr>
-            <a:spLocks noGrp="1"/>
-          </p:cNvSpPr>
-          <p:nvPr>
-            <p:ph type="sldNum" sz="quarter" idx="12"/>
-          </p:nvPr>
-        </p:nvSpPr>
-        <p:spPr/>
-        <p:txBody>
-          <a:bodyPr/>
-          <a:lstStyle/>
-          <a:p>
-            <a:fld id="{7D9BB5D0-35E4-459D-AEF3-FE4D7C45CC19}" type="slidenum">
-              <a:rPr lang="zh-CN" altLang="en-US" smtClean="0"/>
-              <a:t>‹#›</a:t>
-            </a:fld>
-            <a:endParaRPr lang="zh-CN" altLang="en-US"/>
-          </a:p>
-        </p:txBody>
-      </p:sp>
-    </p:spTree>
-  </p:cSld>
-  <p:clrMapOvr>
-    <a:masterClrMapping/>
-  </p:clrMapOvr>
-  <mc:AlternateContent xmlns:mc="http://schemas.openxmlformats.org/markup-compatibility/2006" xmlns:p15="http://schemas.microsoft.com/office/powerpoint/2012/main">
-    <mc:Choice Requires="p15">
-      <p:transition xmlns:p14="http://schemas.microsoft.com/office/powerpoint/2010/main" spd="slow" p14:dur="1250">
-        <p15:prstTrans prst="peelOff"/>
-      </p:transition>
-    </mc:Choice>
-    <mc:Fallback xmlns="">
-      <p:transition spd="slow">
-        <p:fade/>
-      </p:transition>
-    </mc:Fallback>
-  </mc:AlternateContent>
-</p:sldLayout>
-</file>
-
-<file path=ppt/slideLayouts/slideLayout8.xml><?xml version="1.0" encoding="utf-8"?>
-<p:sldLayout xmlns:a="http://schemas.openxmlformats.org/drawingml/2006/main" xmlns:r="http://schemas.openxmlformats.org/officeDocument/2006/relationships" xmlns:p="http://schemas.openxmlformats.org/presentationml/2006/main" type="picTx" preserve="1">
-  <p:cSld name="图片与标题">
-    <p:spTree>
-      <p:nvGrpSpPr>
-        <p:cNvPr id="1" name=""/>
-        <p:cNvGrpSpPr/>
-        <p:nvPr/>
-      </p:nvGrpSpPr>
-      <p:grpSpPr>
-        <a:xfrm>
-          <a:off x="0" y="0"/>
-          <a:ext cx="0" cy="0"/>
-          <a:chOff x="0" y="0"/>
-          <a:chExt cx="0" cy="0"/>
-        </a:xfrm>
-      </p:grpSpPr>
-      <p:sp>
-        <p:nvSpPr>
-          <p:cNvPr id="2" name="标题 1"/>
-          <p:cNvSpPr>
-            <a:spLocks noGrp="1"/>
-          </p:cNvSpPr>
-          <p:nvPr>
-            <p:ph type="title"/>
-          </p:nvPr>
-        </p:nvSpPr>
-        <p:spPr>
-          <a:xfrm>
-            <a:off x="629841" y="342900"/>
-            <a:ext cx="3124012" cy="1200150"/>
-          </a:xfrm>
-        </p:spPr>
-        <p:txBody>
-          <a:bodyPr anchor="b"/>
-          <a:lstStyle>
-            <a:lvl1pPr>
-              <a:defRPr sz="2400"/>
-            </a:lvl1pPr>
-          </a:lstStyle>
-          <a:p>
-            <a:r>
-              <a:rPr lang="zh-CN" altLang="en-US"/>
-              <a:t>单击此处编辑母版标题样式</a:t>
-            </a:r>
-          </a:p>
-        </p:txBody>
-      </p:sp>
-      <p:sp>
-        <p:nvSpPr>
-          <p:cNvPr id="3" name="图片占位符 2"/>
-          <p:cNvSpPr>
-            <a:spLocks noGrp="1"/>
-          </p:cNvSpPr>
-          <p:nvPr>
-            <p:ph type="pic" idx="1"/>
-          </p:nvPr>
-        </p:nvSpPr>
-        <p:spPr>
-          <a:xfrm>
-            <a:off x="3887391" y="342901"/>
-            <a:ext cx="4629150" cy="4052888"/>
-          </a:xfrm>
-        </p:spPr>
-        <p:txBody>
-          <a:bodyPr/>
-          <a:lstStyle>
-            <a:lvl1pPr marL="0" indent="0">
-              <a:buNone/>
-              <a:defRPr sz="2400"/>
-            </a:lvl1pPr>
-            <a:lvl2pPr marL="342900" indent="0">
-              <a:buNone/>
-              <a:defRPr sz="2100"/>
-            </a:lvl2pPr>
-            <a:lvl3pPr marL="685800" indent="0">
-              <a:buNone/>
-              <a:defRPr sz="1800"/>
-            </a:lvl3pPr>
-            <a:lvl4pPr marL="1028700" indent="0">
-              <a:buNone/>
-              <a:defRPr sz="1500"/>
-            </a:lvl4pPr>
-            <a:lvl5pPr marL="1371600" indent="0">
-              <a:buNone/>
-              <a:defRPr sz="1500"/>
-            </a:lvl5pPr>
-            <a:lvl6pPr marL="1714500" indent="0">
-              <a:buNone/>
-              <a:defRPr sz="1500"/>
-            </a:lvl6pPr>
-            <a:lvl7pPr marL="2057400" indent="0">
-              <a:buNone/>
-              <a:defRPr sz="1500"/>
-            </a:lvl7pPr>
-            <a:lvl8pPr marL="2400300" indent="0">
-              <a:buNone/>
-              <a:defRPr sz="1500"/>
-            </a:lvl8pPr>
-            <a:lvl9pPr marL="2743200" indent="0">
-              <a:buNone/>
-              <a:defRPr sz="1500"/>
-            </a:lvl9pPr>
-          </a:lstStyle>
-          <a:p>
-            <a:endParaRPr lang="zh-CN" altLang="en-US"/>
-          </a:p>
-        </p:txBody>
-      </p:sp>
-      <p:sp>
-        <p:nvSpPr>
-          <p:cNvPr id="4" name="文本占位符 3"/>
-          <p:cNvSpPr>
-            <a:spLocks noGrp="1"/>
-          </p:cNvSpPr>
-          <p:nvPr>
-            <p:ph type="body" sz="half" idx="2"/>
-          </p:nvPr>
-        </p:nvSpPr>
-        <p:spPr>
-          <a:xfrm>
-            <a:off x="629841" y="1543050"/>
-            <a:ext cx="3124012" cy="2858691"/>
-          </a:xfrm>
-        </p:spPr>
-        <p:txBody>
-          <a:bodyPr/>
-          <a:lstStyle>
-            <a:lvl1pPr marL="0" indent="0">
-              <a:buNone/>
-              <a:defRPr sz="1500"/>
-            </a:lvl1pPr>
-            <a:lvl2pPr marL="342900" indent="0">
-              <a:buNone/>
-              <a:defRPr sz="1400"/>
-            </a:lvl2pPr>
-            <a:lvl3pPr marL="685800" indent="0">
-              <a:buNone/>
-              <a:defRPr sz="1200"/>
-            </a:lvl3pPr>
-            <a:lvl4pPr marL="1028700" indent="0">
-              <a:buNone/>
-              <a:defRPr sz="1100"/>
-            </a:lvl4pPr>
-            <a:lvl5pPr marL="1371600" indent="0">
-              <a:buNone/>
-              <a:defRPr sz="1100"/>
-            </a:lvl5pPr>
-            <a:lvl6pPr marL="1714500" indent="0">
-              <a:buNone/>
-              <a:defRPr sz="1100"/>
-            </a:lvl6pPr>
-            <a:lvl7pPr marL="2057400" indent="0">
-              <a:buNone/>
-              <a:defRPr sz="1100"/>
-            </a:lvl7pPr>
-            <a:lvl8pPr marL="2400300" indent="0">
-              <a:buNone/>
-              <a:defRPr sz="1100"/>
-            </a:lvl8pPr>
-            <a:lvl9pPr marL="2743200" indent="0">
-              <a:buNone/>
-              <a:defRPr sz="1100"/>
-            </a:lvl9pPr>
-          </a:lstStyle>
-          <a:p>
-            <a:pPr lvl="0"/>
-            <a:r>
-              <a:rPr lang="zh-CN" altLang="en-US"/>
-              <a:t>单击此处编辑母版文本样式</a:t>
-            </a:r>
-          </a:p>
-        </p:txBody>
-      </p:sp>
-      <p:sp>
-        <p:nvSpPr>
-          <p:cNvPr id="5" name="日期占位符 4"/>
-          <p:cNvSpPr>
-            <a:spLocks noGrp="1"/>
-          </p:cNvSpPr>
-          <p:nvPr>
-            <p:ph type="dt" sz="half" idx="10"/>
-          </p:nvPr>
-        </p:nvSpPr>
-        <p:spPr/>
-        <p:txBody>
-          <a:bodyPr/>
-          <a:lstStyle/>
-          <a:p>
-            <a:fld id="{82F288E0-7875-42C4-84C8-98DBBD3BF4D2}" type="datetimeFigureOut">
-              <a:rPr lang="zh-CN" altLang="en-US" smtClean="0"/>
-              <a:t>2023/10/29</a:t>
-            </a:fld>
-            <a:endParaRPr lang="zh-CN" altLang="en-US"/>
-          </a:p>
-        </p:txBody>
-      </p:sp>
-      <p:sp>
-        <p:nvSpPr>
-          <p:cNvPr id="6" name="页脚占位符 5"/>
-          <p:cNvSpPr>
-            <a:spLocks noGrp="1"/>
-          </p:cNvSpPr>
-          <p:nvPr>
-            <p:ph type="ftr" sz="quarter" idx="11"/>
-          </p:nvPr>
-        </p:nvSpPr>
-        <p:spPr/>
-        <p:txBody>
-          <a:bodyPr/>
-          <a:lstStyle/>
-          <a:p>
-            <a:endParaRPr lang="zh-CN" altLang="en-US"/>
-          </a:p>
-        </p:txBody>
-      </p:sp>
-      <p:sp>
-        <p:nvSpPr>
-          <p:cNvPr id="7" name="灯片编号占位符 6"/>
-          <p:cNvSpPr>
-            <a:spLocks noGrp="1"/>
-          </p:cNvSpPr>
-          <p:nvPr>
-            <p:ph type="sldNum" sz="quarter" idx="12"/>
-          </p:nvPr>
-        </p:nvSpPr>
-        <p:spPr/>
-        <p:txBody>
-          <a:bodyPr/>
-          <a:lstStyle/>
-          <a:p>
-            <a:fld id="{7D9BB5D0-35E4-459D-AEF3-FE4D7C45CC19}" type="slidenum">
-              <a:rPr lang="zh-CN" altLang="en-US" smtClean="0"/>
-              <a:t>‹#›</a:t>
-            </a:fld>
-            <a:endParaRPr lang="zh-CN" altLang="en-US"/>
-          </a:p>
-        </p:txBody>
-      </p:sp>
-    </p:spTree>
-  </p:cSld>
-  <p:clrMapOvr>
-    <a:masterClrMapping/>
-  </p:clrMapOvr>
-  <mc:AlternateContent xmlns:mc="http://schemas.openxmlformats.org/markup-compatibility/2006" xmlns:p15="http://schemas.microsoft.com/office/powerpoint/2012/main">
-    <mc:Choice Requires="p15">
-      <p:transition xmlns:p14="http://schemas.microsoft.com/office/powerpoint/2010/main" spd="slow" p14:dur="1250">
-        <p15:prstTrans prst="peelOff"/>
-      </p:transition>
-    </mc:Choice>
-    <mc:Fallback xmlns="">
-      <p:transition spd="slow">
-        <p:fade/>
-      </p:transition>
-    </mc:Fallback>
-  </mc:AlternateContent>
-</p:sldLayout>
-</file>
-
-<file path=ppt/slideLayouts/slideLayout9.xml><?xml version="1.0" encoding="utf-8"?>
-<p:sldLayout xmlns:a="http://schemas.openxmlformats.org/drawingml/2006/main" xmlns:r="http://schemas.openxmlformats.org/officeDocument/2006/relationships" xmlns:p="http://schemas.openxmlformats.org/presentationml/2006/main" type="vertTitleAndTx" preserve="1">
-  <p:cSld name="竖版">
-    <p:spTree>
-      <p:nvGrpSpPr>
-        <p:cNvPr id="1" name=""/>
-        <p:cNvGrpSpPr/>
-        <p:nvPr/>
-      </p:nvGrpSpPr>
-      <p:grpSpPr>
-        <a:xfrm>
-          <a:off x="0" y="0"/>
-          <a:ext cx="0" cy="0"/>
-          <a:chOff x="0" y="0"/>
-          <a:chExt cx="0" cy="0"/>
-        </a:xfrm>
-      </p:grpSpPr>
-      <p:sp>
-        <p:nvSpPr>
-          <p:cNvPr id="2" name="竖排标题 1"/>
-          <p:cNvSpPr>
-            <a:spLocks noGrp="1"/>
-          </p:cNvSpPr>
-          <p:nvPr>
-            <p:ph type="title" orient="vert"/>
-          </p:nvPr>
-        </p:nvSpPr>
-        <p:spPr>
-          <a:xfrm>
-            <a:off x="6543675" y="273844"/>
-            <a:ext cx="1971675" cy="4358879"/>
-          </a:xfrm>
-        </p:spPr>
-        <p:txBody>
-          <a:bodyPr vert="eaVert"/>
-          <a:lstStyle/>
-          <a:p>
-            <a:r>
-              <a:rPr lang="zh-CN" altLang="en-US"/>
-              <a:t>单击此处编辑母版标题样式</a:t>
-            </a:r>
-          </a:p>
-        </p:txBody>
-      </p:sp>
-      <p:sp>
-        <p:nvSpPr>
-          <p:cNvPr id="3" name="竖排文字占位符 2"/>
-          <p:cNvSpPr>
-            <a:spLocks noGrp="1"/>
-          </p:cNvSpPr>
-          <p:nvPr>
-            <p:ph type="body" orient="vert" idx="1"/>
-          </p:nvPr>
-        </p:nvSpPr>
-        <p:spPr>
-          <a:xfrm>
-            <a:off x="628650" y="273844"/>
-            <a:ext cx="5800725" cy="4358879"/>
-          </a:xfrm>
-        </p:spPr>
-        <p:txBody>
-          <a:bodyPr vert="eaVert"/>
-          <a:lstStyle/>
-          <a:p>
-            <a:pPr lvl="0"/>
-            <a:r>
-              <a:rPr lang="zh-CN" altLang="en-US"/>
-              <a:t>单击此处编辑母版文本样式</a:t>
-            </a:r>
-          </a:p>
-          <a:p>
-            <a:pPr lvl="1"/>
-            <a:r>
-              <a:rPr lang="zh-CN" altLang="en-US"/>
-              <a:t>第二级</a:t>
-            </a:r>
-          </a:p>
-          <a:p>
-            <a:pPr lvl="2"/>
-            <a:r>
-              <a:rPr lang="zh-CN" altLang="en-US"/>
-              <a:t>第三级</a:t>
-            </a:r>
-          </a:p>
-          <a:p>
-            <a:pPr lvl="3"/>
-            <a:r>
-              <a:rPr lang="zh-CN" altLang="en-US"/>
-              <a:t>第四级</a:t>
-            </a:r>
-          </a:p>
-          <a:p>
-            <a:pPr lvl="4"/>
-            <a:r>
-              <a:rPr lang="zh-CN" altLang="en-US"/>
-              <a:t>第五级</a:t>
-            </a:r>
-          </a:p>
-        </p:txBody>
-      </p:sp>
-      <p:sp>
-        <p:nvSpPr>
-          <p:cNvPr id="4" name="日期占位符 3"/>
-          <p:cNvSpPr>
-            <a:spLocks noGrp="1"/>
-          </p:cNvSpPr>
-          <p:nvPr>
-            <p:ph type="dt" sz="half" idx="10"/>
-          </p:nvPr>
-        </p:nvSpPr>
-        <p:spPr/>
-        <p:txBody>
-          <a:bodyPr/>
-          <a:lstStyle/>
-          <a:p>
-            <a:fld id="{82F288E0-7875-42C4-84C8-98DBBD3BF4D2}" type="datetimeFigureOut">
-              <a:rPr lang="zh-CN" altLang="en-US" smtClean="0"/>
-              <a:t>2023/10/29</a:t>
-            </a:fld>
-            <a:endParaRPr lang="zh-CN" altLang="en-US"/>
-          </a:p>
-        </p:txBody>
-      </p:sp>
-      <p:sp>
-        <p:nvSpPr>
-          <p:cNvPr id="5" name="页脚占位符 4"/>
-          <p:cNvSpPr>
-            <a:spLocks noGrp="1"/>
-          </p:cNvSpPr>
-          <p:nvPr>
-            <p:ph type="ftr" sz="quarter" idx="11"/>
-          </p:nvPr>
-        </p:nvSpPr>
-        <p:spPr/>
-        <p:txBody>
-          <a:bodyPr/>
-          <a:lstStyle/>
-          <a:p>
-            <a:endParaRPr lang="zh-CN" altLang="en-US"/>
-          </a:p>
-        </p:txBody>
-      </p:sp>
-      <p:sp>
-        <p:nvSpPr>
-          <p:cNvPr id="6" name="灯片编号占位符 5"/>
           <p:cNvSpPr>
             <a:spLocks noGrp="1"/>
           </p:cNvSpPr>
@@ -3681,7 +2267,7 @@
     <p:bg>
       <p:bgPr>
         <a:blipFill dpi="0" rotWithShape="1">
-          <a:blip r:embed="rId12">
+          <a:blip r:embed="rId6">
             <a:lum/>
           </a:blip>
           <a:srcRect/>
@@ -3924,14 +2510,8 @@
   <p:sldLayoutIdLst>
     <p:sldLayoutId id="2147483649" r:id="rId1"/>
     <p:sldLayoutId id="2147483650" r:id="rId2"/>
-    <p:sldLayoutId id="2147483651" r:id="rId3"/>
-    <p:sldLayoutId id="2147483652" r:id="rId4"/>
-    <p:sldLayoutId id="2147483653" r:id="rId5"/>
-    <p:sldLayoutId id="2147483654" r:id="rId6"/>
-    <p:sldLayoutId id="2147483655" r:id="rId7"/>
-    <p:sldLayoutId id="2147483656" r:id="rId8"/>
-    <p:sldLayoutId id="2147483657" r:id="rId9"/>
-    <p:sldLayoutId id="2147483658" r:id="rId10"/>
+    <p:sldLayoutId id="2147483654" r:id="rId3"/>
+    <p:sldLayoutId id="2147483655" r:id="rId4"/>
   </p:sldLayoutIdLst>
   <mc:AlternateContent xmlns:mc="http://schemas.openxmlformats.org/markup-compatibility/2006" xmlns:p15="http://schemas.microsoft.com/office/powerpoint/2012/main">
     <mc:Choice Requires="p15">
@@ -4248,7 +2828,7 @@
       <p:sp>
         <p:nvSpPr>
           <p:cNvPr id="29" name="TextBox 28">
-            <a:hlinkClick r:id="rId5"/>
+            <a:hlinkClick r:id="rId3"/>
           </p:cNvPr>
           <p:cNvSpPr txBox="1"/>
           <p:nvPr/>
@@ -4276,7 +2856,7 @@
                   <a:srgbClr val="33495E"/>
                 </a:solidFill>
                 <a:latin typeface="+mn-ea"/>
-                <a:hlinkClick r:id="rId5"/>
+                <a:hlinkClick r:id="rId3"/>
               </a:rPr>
               <a:t>教育软件与教育技术</a:t>
             </a:r>
@@ -4286,7 +2866,7 @@
                   <a:srgbClr val="33495E"/>
                 </a:solidFill>
                 <a:latin typeface="+mn-ea"/>
-                <a:hlinkClick r:id="rId5"/>
+                <a:hlinkClick r:id="rId3"/>
               </a:rPr>
               <a:t>：</a:t>
             </a:r>
@@ -4296,7 +2876,7 @@
                   <a:srgbClr val="33495E"/>
                 </a:solidFill>
                 <a:latin typeface="+mn-ea"/>
-                <a:hlinkClick r:id="rId5"/>
+                <a:hlinkClick r:id="rId3"/>
               </a:rPr>
               <a:t>数字</a:t>
             </a:r>
@@ -4306,7 +2886,7 @@
                   <a:srgbClr val="33495E"/>
                 </a:solidFill>
                 <a:latin typeface="+mn-ea"/>
-                <a:hlinkClick r:id="rId5"/>
+                <a:hlinkClick r:id="rId3"/>
               </a:rPr>
               <a:t>思维</a:t>
             </a:r>
@@ -4316,7 +2896,7 @@
                   <a:srgbClr val="33495E"/>
                 </a:solidFill>
                 <a:latin typeface="+mn-ea"/>
-                <a:hlinkClick r:id="rId5"/>
+                <a:hlinkClick r:id="rId3"/>
               </a:rPr>
               <a:t>教育、</a:t>
             </a:r>
@@ -4326,7 +2906,7 @@
                   <a:srgbClr val="33495E"/>
                 </a:solidFill>
                 <a:latin typeface="+mn-ea"/>
-                <a:hlinkClick r:id="rId5"/>
+                <a:hlinkClick r:id="rId3"/>
               </a:rPr>
               <a:t>教育</a:t>
             </a:r>
@@ -4336,7 +2916,7 @@
                   <a:srgbClr val="33495E"/>
                 </a:solidFill>
                 <a:latin typeface="+mn-ea"/>
-                <a:hlinkClick r:id="rId5"/>
+                <a:hlinkClick r:id="rId3"/>
               </a:rPr>
               <a:t>数字</a:t>
             </a:r>
@@ -4346,7 +2926,7 @@
                   <a:srgbClr val="33495E"/>
                 </a:solidFill>
                 <a:latin typeface="+mn-ea"/>
-                <a:hlinkClick r:id="rId5"/>
+                <a:hlinkClick r:id="rId3"/>
               </a:rPr>
               <a:t>思维</a:t>
             </a:r>
@@ -4406,39 +2986,6 @@
           </a:p>
         </p:txBody>
       </p:sp>
-      <p:pic>
-        <p:nvPicPr>
-          <p:cNvPr id="3" name="Audio 2">
-            <a:hlinkClick r:id="" action="ppaction://media"/>
-          </p:cNvPr>
-          <p:cNvPicPr>
-            <a:picLocks noChangeAspect="1"/>
-          </p:cNvPicPr>
-          <p:nvPr>
-            <a:audioFile r:link="rId2"/>
-            <p:extLst>
-              <p:ext uri="{DAA4B4D4-6D71-4841-9C94-3DE7FCFB9230}">
-                <p14:media xmlns:p14="http://schemas.microsoft.com/office/powerpoint/2010/main" r:embed="rId1"/>
-              </p:ext>
-            </p:extLst>
-          </p:nvPr>
-        </p:nvPicPr>
-        <p:blipFill>
-          <a:blip r:embed="rId6"/>
-          <a:stretch>
-            <a:fillRect/>
-          </a:stretch>
-        </p:blipFill>
-        <p:spPr>
-          <a:xfrm>
-            <a:off x="8521700" y="4521200"/>
-            <a:ext cx="406400" cy="406400"/>
-          </a:xfrm>
-          <a:prstGeom prst="rect">
-            <a:avLst/>
-          </a:prstGeom>
-        </p:spPr>
-      </p:pic>
     </p:spTree>
     <p:extLst>
       <p:ext uri="{BB962C8B-B14F-4D97-AF65-F5344CB8AC3E}">
@@ -4449,13 +2996,13 @@
   <p:clrMapOvr>
     <a:masterClrMapping/>
   </p:clrMapOvr>
-  <mc:AlternateContent xmlns:mc="http://schemas.openxmlformats.org/markup-compatibility/2006">
-    <mc:Choice xmlns:p14="http://schemas.microsoft.com/office/powerpoint/2010/main" Requires="p14">
+  <mc:AlternateContent xmlns:mc="http://schemas.openxmlformats.org/markup-compatibility/2006" xmlns:p14="http://schemas.microsoft.com/office/powerpoint/2010/main">
+    <mc:Choice Requires="p14">
       <p:transition spd="slow" p14:dur="1500" advTm="6057">
         <p14:ripple dir="lu"/>
       </p:transition>
     </mc:Choice>
-    <mc:Fallback>
+    <mc:Fallback xmlns="">
       <p:transition spd="slow" advTm="6057">
         <p:fade/>
       </p:transition>
@@ -4464,87 +3011,7 @@
   <p:timing>
     <p:tnLst>
       <p:par>
-        <p:cTn id="1" dur="indefinite" restart="never" nodeType="tmRoot">
-          <p:childTnLst>
-            <p:seq concurrent="1" nextAc="seek">
-              <p:cTn id="2" dur="indefinite" nodeType="mainSeq">
-                <p:childTnLst>
-                  <p:par>
-                    <p:cTn id="3" fill="hold">
-                      <p:stCondLst>
-                        <p:cond delay="indefinite"/>
-                        <p:cond evt="onBegin" delay="0">
-                          <p:tn val="2"/>
-                        </p:cond>
-                      </p:stCondLst>
-                      <p:childTnLst>
-                        <p:par>
-                          <p:cTn id="4" fill="hold">
-                            <p:stCondLst>
-                              <p:cond delay="0"/>
-                            </p:stCondLst>
-                            <p:childTnLst>
-                              <p:par>
-                                <p:cTn id="5" presetID="1" presetClass="mediacall" presetSubtype="0" fill="hold" nodeType="afterEffect">
-                                  <p:stCondLst>
-                                    <p:cond delay="0"/>
-                                  </p:stCondLst>
-                                  <p:childTnLst>
-                                    <p:cmd type="call" cmd="playFrom(0.0)">
-                                      <p:cBhvr>
-                                        <p:cTn id="6" dur="1" fill="hold"/>
-                                        <p:tgtEl>
-                                          <p:spTgt spid="3"/>
-                                        </p:tgtEl>
-                                      </p:cBhvr>
-                                    </p:cmd>
-                                  </p:childTnLst>
-                                </p:cTn>
-                              </p:par>
-                            </p:childTnLst>
-                          </p:cTn>
-                        </p:par>
-                      </p:childTnLst>
-                    </p:cTn>
-                  </p:par>
-                </p:childTnLst>
-              </p:cTn>
-              <p:prevCondLst>
-                <p:cond evt="onPrev" delay="0">
-                  <p:tgtEl>
-                    <p:sldTgt/>
-                  </p:tgtEl>
-                </p:cond>
-              </p:prevCondLst>
-              <p:nextCondLst>
-                <p:cond evt="onNext" delay="0">
-                  <p:tgtEl>
-                    <p:sldTgt/>
-                  </p:tgtEl>
-                </p:cond>
-              </p:nextCondLst>
-            </p:seq>
-            <p:audio isNarration="1">
-              <p:cMediaNode vol="80000" showWhenStopped="0">
-                <p:cTn id="7" fill="hold" display="0">
-                  <p:stCondLst>
-                    <p:cond delay="indefinite"/>
-                  </p:stCondLst>
-                  <p:endCondLst>
-                    <p:cond evt="onStopAudio" delay="0">
-                      <p:tgtEl>
-                        <p:sldTgt/>
-                      </p:tgtEl>
-                    </p:cond>
-                  </p:endCondLst>
-                </p:cTn>
-                <p:tgtEl>
-                  <p:spTgt spid="3"/>
-                </p:tgtEl>
-              </p:cMediaNode>
-            </p:audio>
-          </p:childTnLst>
-        </p:cTn>
+        <p:cTn id="1" dur="indefinite" restart="never" nodeType="tmRoot"/>
       </p:par>
     </p:tnLst>
   </p:timing>
@@ -4571,7 +3038,7 @@
       <p:sp>
         <p:nvSpPr>
           <p:cNvPr id="10" name="文本框 9">
-            <a:hlinkClick r:id="rId5"/>
+            <a:hlinkClick r:id="rId3"/>
           </p:cNvPr>
           <p:cNvSpPr txBox="1"/>
           <p:nvPr/>
@@ -4603,7 +3070,7 @@
                 <a:latin typeface="微软雅黑" panose="020B0503020204020204" pitchFamily="34" charset="-122"/>
                 <a:ea typeface="微软雅黑" panose="020B0503020204020204" pitchFamily="34" charset="-122"/>
                 <a:sym typeface="+mn-ea"/>
-                <a:hlinkClick r:id="rId5"/>
+                <a:hlinkClick r:id="rId3"/>
               </a:rPr>
               <a:t>THANKS</a:t>
             </a:r>
@@ -4723,39 +3190,6 @@
           </a:p>
         </p:txBody>
       </p:sp>
-      <p:pic>
-        <p:nvPicPr>
-          <p:cNvPr id="3" name="Audio 2">
-            <a:hlinkClick r:id="" action="ppaction://media"/>
-          </p:cNvPr>
-          <p:cNvPicPr>
-            <a:picLocks noChangeAspect="1"/>
-          </p:cNvPicPr>
-          <p:nvPr>
-            <a:audioFile r:link="rId2"/>
-            <p:extLst>
-              <p:ext uri="{DAA4B4D4-6D71-4841-9C94-3DE7FCFB9230}">
-                <p14:media xmlns:p14="http://schemas.microsoft.com/office/powerpoint/2010/main" r:embed="rId1"/>
-              </p:ext>
-            </p:extLst>
-          </p:nvPr>
-        </p:nvPicPr>
-        <p:blipFill>
-          <a:blip r:embed="rId6"/>
-          <a:stretch>
-            <a:fillRect/>
-          </a:stretch>
-        </p:blipFill>
-        <p:spPr>
-          <a:xfrm>
-            <a:off x="8521700" y="4521200"/>
-            <a:ext cx="406400" cy="406400"/>
-          </a:xfrm>
-          <a:prstGeom prst="rect">
-            <a:avLst/>
-          </a:prstGeom>
-        </p:spPr>
-      </p:pic>
     </p:spTree>
     <p:extLst>
       <p:ext uri="{BB962C8B-B14F-4D97-AF65-F5344CB8AC3E}">
@@ -4766,13 +3200,13 @@
   <p:clrMapOvr>
     <a:masterClrMapping/>
   </p:clrMapOvr>
-  <mc:AlternateContent xmlns:mc="http://schemas.openxmlformats.org/markup-compatibility/2006">
-    <mc:Choice xmlns:p14="http://schemas.microsoft.com/office/powerpoint/2010/main" Requires="p14">
+  <mc:AlternateContent xmlns:mc="http://schemas.openxmlformats.org/markup-compatibility/2006" xmlns:p14="http://schemas.microsoft.com/office/powerpoint/2010/main">
+    <mc:Choice Requires="p14">
       <p:transition spd="slow" p14:dur="900" advTm="395">
         <p14:warp/>
       </p:transition>
     </mc:Choice>
-    <mc:Fallback>
+    <mc:Fallback xmlns="">
       <p:transition spd="slow" advTm="395">
         <p:fade/>
       </p:transition>
@@ -4781,87 +3215,7 @@
   <p:timing>
     <p:tnLst>
       <p:par>
-        <p:cTn id="1" dur="indefinite" restart="never" nodeType="tmRoot">
-          <p:childTnLst>
-            <p:seq concurrent="1" nextAc="seek">
-              <p:cTn id="2" dur="indefinite" nodeType="mainSeq">
-                <p:childTnLst>
-                  <p:par>
-                    <p:cTn id="3" fill="hold">
-                      <p:stCondLst>
-                        <p:cond delay="indefinite"/>
-                        <p:cond evt="onBegin" delay="0">
-                          <p:tn val="2"/>
-                        </p:cond>
-                      </p:stCondLst>
-                      <p:childTnLst>
-                        <p:par>
-                          <p:cTn id="4" fill="hold">
-                            <p:stCondLst>
-                              <p:cond delay="0"/>
-                            </p:stCondLst>
-                            <p:childTnLst>
-                              <p:par>
-                                <p:cTn id="5" presetID="1" presetClass="mediacall" presetSubtype="0" fill="hold" nodeType="afterEffect">
-                                  <p:stCondLst>
-                                    <p:cond delay="0"/>
-                                  </p:stCondLst>
-                                  <p:childTnLst>
-                                    <p:cmd type="call" cmd="playFrom(0.0)">
-                                      <p:cBhvr>
-                                        <p:cTn id="6" dur="1" fill="hold"/>
-                                        <p:tgtEl>
-                                          <p:spTgt spid="3"/>
-                                        </p:tgtEl>
-                                      </p:cBhvr>
-                                    </p:cmd>
-                                  </p:childTnLst>
-                                </p:cTn>
-                              </p:par>
-                            </p:childTnLst>
-                          </p:cTn>
-                        </p:par>
-                      </p:childTnLst>
-                    </p:cTn>
-                  </p:par>
-                </p:childTnLst>
-              </p:cTn>
-              <p:prevCondLst>
-                <p:cond evt="onPrev" delay="0">
-                  <p:tgtEl>
-                    <p:sldTgt/>
-                  </p:tgtEl>
-                </p:cond>
-              </p:prevCondLst>
-              <p:nextCondLst>
-                <p:cond evt="onNext" delay="0">
-                  <p:tgtEl>
-                    <p:sldTgt/>
-                  </p:tgtEl>
-                </p:cond>
-              </p:nextCondLst>
-            </p:seq>
-            <p:audio isNarration="1">
-              <p:cMediaNode vol="80000" showWhenStopped="0">
-                <p:cTn id="7" fill="hold" display="0">
-                  <p:stCondLst>
-                    <p:cond delay="indefinite"/>
-                  </p:stCondLst>
-                  <p:endCondLst>
-                    <p:cond evt="onStopAudio" delay="0">
-                      <p:tgtEl>
-                        <p:sldTgt/>
-                      </p:tgtEl>
-                    </p:cond>
-                  </p:endCondLst>
-                </p:cTn>
-                <p:tgtEl>
-                  <p:spTgt spid="3"/>
-                </p:tgtEl>
-              </p:cMediaNode>
-            </p:audio>
-          </p:childTnLst>
-        </p:cTn>
+        <p:cTn id="1" dur="indefinite" restart="never" nodeType="tmRoot"/>
       </p:par>
     </p:tnLst>
   </p:timing>
@@ -4894,7 +3248,7 @@
           <p:nvPr/>
         </p:nvPicPr>
         <p:blipFill>
-          <a:blip r:embed="rId5"/>
+          <a:blip r:embed="rId3"/>
           <a:stretch>
             <a:fillRect/>
           </a:stretch>
@@ -4972,7 +3326,7 @@
           <p:nvPr/>
         </p:nvPicPr>
         <p:blipFill>
-          <a:blip r:embed="rId6"/>
+          <a:blip r:embed="rId4"/>
           <a:stretch>
             <a:fillRect/>
           </a:stretch>
@@ -5057,39 +3411,6 @@
           </a:p>
         </p:txBody>
       </p:sp>
-      <p:pic>
-        <p:nvPicPr>
-          <p:cNvPr id="3" name="Audio 2">
-            <a:hlinkClick r:id="" action="ppaction://media"/>
-          </p:cNvPr>
-          <p:cNvPicPr>
-            <a:picLocks noChangeAspect="1"/>
-          </p:cNvPicPr>
-          <p:nvPr>
-            <a:audioFile r:link="rId2"/>
-            <p:extLst>
-              <p:ext uri="{DAA4B4D4-6D71-4841-9C94-3DE7FCFB9230}">
-                <p14:media xmlns:p14="http://schemas.microsoft.com/office/powerpoint/2010/main" r:embed="rId1"/>
-              </p:ext>
-            </p:extLst>
-          </p:nvPr>
-        </p:nvPicPr>
-        <p:blipFill>
-          <a:blip r:embed="rId7"/>
-          <a:stretch>
-            <a:fillRect/>
-          </a:stretch>
-        </p:blipFill>
-        <p:spPr>
-          <a:xfrm>
-            <a:off x="8521700" y="4521200"/>
-            <a:ext cx="406400" cy="406400"/>
-          </a:xfrm>
-          <a:prstGeom prst="rect">
-            <a:avLst/>
-          </a:prstGeom>
-        </p:spPr>
-      </p:pic>
     </p:spTree>
     <p:extLst>
       <p:ext uri="{BB962C8B-B14F-4D97-AF65-F5344CB8AC3E}">
@@ -5100,13 +3421,13 @@
   <p:clrMapOvr>
     <a:masterClrMapping/>
   </p:clrMapOvr>
-  <mc:AlternateContent xmlns:mc="http://schemas.openxmlformats.org/markup-compatibility/2006">
-    <mc:Choice xmlns:p15="http://schemas.microsoft.com/office/powerpoint/2012/main" Requires="p15">
+  <mc:AlternateContent xmlns:mc="http://schemas.openxmlformats.org/markup-compatibility/2006" xmlns:p15="http://schemas.microsoft.com/office/powerpoint/2012/main">
+    <mc:Choice Requires="p15">
       <p:transition xmlns:p14="http://schemas.microsoft.com/office/powerpoint/2010/main" spd="slow" p14:dur="1250" advTm="448">
         <p15:prstTrans prst="peelOff"/>
       </p:transition>
     </mc:Choice>
-    <mc:Fallback>
+    <mc:Fallback xmlns="">
       <p:transition spd="slow" advTm="448">
         <p:fade/>
       </p:transition>
@@ -5115,87 +3436,7 @@
   <p:timing>
     <p:tnLst>
       <p:par>
-        <p:cTn id="1" dur="indefinite" restart="never" nodeType="tmRoot">
-          <p:childTnLst>
-            <p:seq concurrent="1" nextAc="seek">
-              <p:cTn id="2" dur="indefinite" nodeType="mainSeq">
-                <p:childTnLst>
-                  <p:par>
-                    <p:cTn id="3" fill="hold">
-                      <p:stCondLst>
-                        <p:cond delay="indefinite"/>
-                        <p:cond evt="onBegin" delay="0">
-                          <p:tn val="2"/>
-                        </p:cond>
-                      </p:stCondLst>
-                      <p:childTnLst>
-                        <p:par>
-                          <p:cTn id="4" fill="hold">
-                            <p:stCondLst>
-                              <p:cond delay="0"/>
-                            </p:stCondLst>
-                            <p:childTnLst>
-                              <p:par>
-                                <p:cTn id="5" presetID="1" presetClass="mediacall" presetSubtype="0" fill="hold" nodeType="afterEffect">
-                                  <p:stCondLst>
-                                    <p:cond delay="0"/>
-                                  </p:stCondLst>
-                                  <p:childTnLst>
-                                    <p:cmd type="call" cmd="playFrom(0.0)">
-                                      <p:cBhvr>
-                                        <p:cTn id="6" dur="1" fill="hold"/>
-                                        <p:tgtEl>
-                                          <p:spTgt spid="3"/>
-                                        </p:tgtEl>
-                                      </p:cBhvr>
-                                    </p:cmd>
-                                  </p:childTnLst>
-                                </p:cTn>
-                              </p:par>
-                            </p:childTnLst>
-                          </p:cTn>
-                        </p:par>
-                      </p:childTnLst>
-                    </p:cTn>
-                  </p:par>
-                </p:childTnLst>
-              </p:cTn>
-              <p:prevCondLst>
-                <p:cond evt="onPrev" delay="0">
-                  <p:tgtEl>
-                    <p:sldTgt/>
-                  </p:tgtEl>
-                </p:cond>
-              </p:prevCondLst>
-              <p:nextCondLst>
-                <p:cond evt="onNext" delay="0">
-                  <p:tgtEl>
-                    <p:sldTgt/>
-                  </p:tgtEl>
-                </p:cond>
-              </p:nextCondLst>
-            </p:seq>
-            <p:audio isNarration="1">
-              <p:cMediaNode vol="80000" showWhenStopped="0">
-                <p:cTn id="7" fill="hold" display="0">
-                  <p:stCondLst>
-                    <p:cond delay="indefinite"/>
-                  </p:stCondLst>
-                  <p:endCondLst>
-                    <p:cond evt="onStopAudio" delay="0">
-                      <p:tgtEl>
-                        <p:sldTgt/>
-                      </p:tgtEl>
-                    </p:cond>
-                  </p:endCondLst>
-                </p:cTn>
-                <p:tgtEl>
-                  <p:spTgt spid="3"/>
-                </p:tgtEl>
-              </p:cMediaNode>
-            </p:audio>
-          </p:childTnLst>
-        </p:cTn>
+        <p:cTn id="1" dur="indefinite" restart="never" nodeType="tmRoot"/>
       </p:par>
     </p:tnLst>
   </p:timing>
@@ -5228,7 +3469,7 @@
           <p:nvPr/>
         </p:nvPicPr>
         <p:blipFill>
-          <a:blip r:embed="rId5">
+          <a:blip r:embed="rId3">
             <a:extLst>
               <a:ext uri="{28A0092B-C50C-407E-A947-70E740481C1C}">
                 <a14:useLocalDpi xmlns:a14="http://schemas.microsoft.com/office/drawing/2010/main" val="0"/>
@@ -5326,39 +3567,6 @@
           </a:p>
         </p:txBody>
       </p:sp>
-      <p:pic>
-        <p:nvPicPr>
-          <p:cNvPr id="3" name="Audio 2">
-            <a:hlinkClick r:id="" action="ppaction://media"/>
-          </p:cNvPr>
-          <p:cNvPicPr>
-            <a:picLocks noChangeAspect="1"/>
-          </p:cNvPicPr>
-          <p:nvPr>
-            <a:audioFile r:link="rId2"/>
-            <p:extLst>
-              <p:ext uri="{DAA4B4D4-6D71-4841-9C94-3DE7FCFB9230}">
-                <p14:media xmlns:p14="http://schemas.microsoft.com/office/powerpoint/2010/main" r:embed="rId1"/>
-              </p:ext>
-            </p:extLst>
-          </p:nvPr>
-        </p:nvPicPr>
-        <p:blipFill>
-          <a:blip r:embed="rId6"/>
-          <a:stretch>
-            <a:fillRect/>
-          </a:stretch>
-        </p:blipFill>
-        <p:spPr>
-          <a:xfrm>
-            <a:off x="8521700" y="4521200"/>
-            <a:ext cx="406400" cy="406400"/>
-          </a:xfrm>
-          <a:prstGeom prst="rect">
-            <a:avLst/>
-          </a:prstGeom>
-        </p:spPr>
-      </p:pic>
     </p:spTree>
     <p:extLst>
       <p:ext uri="{BB962C8B-B14F-4D97-AF65-F5344CB8AC3E}">
@@ -5369,13 +3577,13 @@
   <p:clrMapOvr>
     <a:masterClrMapping/>
   </p:clrMapOvr>
-  <mc:AlternateContent xmlns:mc="http://schemas.openxmlformats.org/markup-compatibility/2006">
-    <mc:Choice xmlns:p14="http://schemas.microsoft.com/office/powerpoint/2010/main" Requires="p14">
+  <mc:AlternateContent xmlns:mc="http://schemas.openxmlformats.org/markup-compatibility/2006" xmlns:p14="http://schemas.microsoft.com/office/powerpoint/2010/main">
+    <mc:Choice Requires="p14">
       <p:transition spd="slow" p14:dur="1500" advTm="271">
         <p14:ripple dir="lu"/>
       </p:transition>
     </mc:Choice>
-    <mc:Fallback>
+    <mc:Fallback xmlns="">
       <p:transition spd="slow" advTm="271">
         <p:fade/>
       </p:transition>
@@ -5384,87 +3592,7 @@
   <p:timing>
     <p:tnLst>
       <p:par>
-        <p:cTn id="1" dur="indefinite" restart="never" nodeType="tmRoot">
-          <p:childTnLst>
-            <p:seq concurrent="1" nextAc="seek">
-              <p:cTn id="2" dur="indefinite" nodeType="mainSeq">
-                <p:childTnLst>
-                  <p:par>
-                    <p:cTn id="3" fill="hold">
-                      <p:stCondLst>
-                        <p:cond delay="indefinite"/>
-                        <p:cond evt="onBegin" delay="0">
-                          <p:tn val="2"/>
-                        </p:cond>
-                      </p:stCondLst>
-                      <p:childTnLst>
-                        <p:par>
-                          <p:cTn id="4" fill="hold">
-                            <p:stCondLst>
-                              <p:cond delay="0"/>
-                            </p:stCondLst>
-                            <p:childTnLst>
-                              <p:par>
-                                <p:cTn id="5" presetID="1" presetClass="mediacall" presetSubtype="0" fill="hold" nodeType="afterEffect">
-                                  <p:stCondLst>
-                                    <p:cond delay="0"/>
-                                  </p:stCondLst>
-                                  <p:childTnLst>
-                                    <p:cmd type="call" cmd="playFrom(0.0)">
-                                      <p:cBhvr>
-                                        <p:cTn id="6" dur="1" fill="hold"/>
-                                        <p:tgtEl>
-                                          <p:spTgt spid="3"/>
-                                        </p:tgtEl>
-                                      </p:cBhvr>
-                                    </p:cmd>
-                                  </p:childTnLst>
-                                </p:cTn>
-                              </p:par>
-                            </p:childTnLst>
-                          </p:cTn>
-                        </p:par>
-                      </p:childTnLst>
-                    </p:cTn>
-                  </p:par>
-                </p:childTnLst>
-              </p:cTn>
-              <p:prevCondLst>
-                <p:cond evt="onPrev" delay="0">
-                  <p:tgtEl>
-                    <p:sldTgt/>
-                  </p:tgtEl>
-                </p:cond>
-              </p:prevCondLst>
-              <p:nextCondLst>
-                <p:cond evt="onNext" delay="0">
-                  <p:tgtEl>
-                    <p:sldTgt/>
-                  </p:tgtEl>
-                </p:cond>
-              </p:nextCondLst>
-            </p:seq>
-            <p:audio isNarration="1">
-              <p:cMediaNode vol="80000" showWhenStopped="0">
-                <p:cTn id="7" fill="hold" display="0">
-                  <p:stCondLst>
-                    <p:cond delay="indefinite"/>
-                  </p:stCondLst>
-                  <p:endCondLst>
-                    <p:cond evt="onStopAudio" delay="0">
-                      <p:tgtEl>
-                        <p:sldTgt/>
-                      </p:tgtEl>
-                    </p:cond>
-                  </p:endCondLst>
-                </p:cTn>
-                <p:tgtEl>
-                  <p:spTgt spid="3"/>
-                </p:tgtEl>
-              </p:cMediaNode>
-            </p:audio>
-          </p:childTnLst>
-        </p:cTn>
+        <p:cTn id="1" dur="indefinite" restart="never" nodeType="tmRoot"/>
       </p:par>
     </p:tnLst>
   </p:timing>
@@ -6111,39 +4239,6 @@
           </a:p>
         </p:txBody>
       </p:sp>
-      <p:pic>
-        <p:nvPicPr>
-          <p:cNvPr id="4" name="Audio 3">
-            <a:hlinkClick r:id="" action="ppaction://media"/>
-          </p:cNvPr>
-          <p:cNvPicPr>
-            <a:picLocks noChangeAspect="1"/>
-          </p:cNvPicPr>
-          <p:nvPr>
-            <a:audioFile r:link="rId2"/>
-            <p:extLst>
-              <p:ext uri="{DAA4B4D4-6D71-4841-9C94-3DE7FCFB9230}">
-                <p14:media xmlns:p14="http://schemas.microsoft.com/office/powerpoint/2010/main" r:embed="rId1"/>
-              </p:ext>
-            </p:extLst>
-          </p:nvPr>
-        </p:nvPicPr>
-        <p:blipFill>
-          <a:blip r:embed="rId5"/>
-          <a:stretch>
-            <a:fillRect/>
-          </a:stretch>
-        </p:blipFill>
-        <p:spPr>
-          <a:xfrm>
-            <a:off x="8521700" y="4521200"/>
-            <a:ext cx="406400" cy="406400"/>
-          </a:xfrm>
-          <a:prstGeom prst="rect">
-            <a:avLst/>
-          </a:prstGeom>
-        </p:spPr>
-      </p:pic>
     </p:spTree>
     <p:extLst>
       <p:ext uri="{BB962C8B-B14F-4D97-AF65-F5344CB8AC3E}">
@@ -6154,13 +4249,13 @@
   <p:clrMapOvr>
     <a:masterClrMapping/>
   </p:clrMapOvr>
-  <mc:AlternateContent xmlns:mc="http://schemas.openxmlformats.org/markup-compatibility/2006">
-    <mc:Choice xmlns:p15="http://schemas.microsoft.com/office/powerpoint/2012/main" Requires="p15">
+  <mc:AlternateContent xmlns:mc="http://schemas.openxmlformats.org/markup-compatibility/2006" xmlns:p15="http://schemas.microsoft.com/office/powerpoint/2012/main">
+    <mc:Choice Requires="p15">
       <p:transition xmlns:p14="http://schemas.microsoft.com/office/powerpoint/2010/main" spd="slow" p14:dur="1250" advTm="221">
         <p15:prstTrans prst="peelOff"/>
       </p:transition>
     </mc:Choice>
-    <mc:Fallback>
+    <mc:Fallback xmlns="">
       <p:transition spd="slow" advTm="221">
         <p:fade/>
       </p:transition>
@@ -6169,87 +4264,7 @@
   <p:timing>
     <p:tnLst>
       <p:par>
-        <p:cTn id="1" dur="indefinite" restart="never" nodeType="tmRoot">
-          <p:childTnLst>
-            <p:seq concurrent="1" nextAc="seek">
-              <p:cTn id="2" dur="indefinite" nodeType="mainSeq">
-                <p:childTnLst>
-                  <p:par>
-                    <p:cTn id="3" fill="hold">
-                      <p:stCondLst>
-                        <p:cond delay="indefinite"/>
-                        <p:cond evt="onBegin" delay="0">
-                          <p:tn val="2"/>
-                        </p:cond>
-                      </p:stCondLst>
-                      <p:childTnLst>
-                        <p:par>
-                          <p:cTn id="4" fill="hold">
-                            <p:stCondLst>
-                              <p:cond delay="0"/>
-                            </p:stCondLst>
-                            <p:childTnLst>
-                              <p:par>
-                                <p:cTn id="5" presetID="1" presetClass="mediacall" presetSubtype="0" fill="hold" nodeType="afterEffect">
-                                  <p:stCondLst>
-                                    <p:cond delay="0"/>
-                                  </p:stCondLst>
-                                  <p:childTnLst>
-                                    <p:cmd type="call" cmd="playFrom(0.0)">
-                                      <p:cBhvr>
-                                        <p:cTn id="6" dur="1" fill="hold"/>
-                                        <p:tgtEl>
-                                          <p:spTgt spid="4"/>
-                                        </p:tgtEl>
-                                      </p:cBhvr>
-                                    </p:cmd>
-                                  </p:childTnLst>
-                                </p:cTn>
-                              </p:par>
-                            </p:childTnLst>
-                          </p:cTn>
-                        </p:par>
-                      </p:childTnLst>
-                    </p:cTn>
-                  </p:par>
-                </p:childTnLst>
-              </p:cTn>
-              <p:prevCondLst>
-                <p:cond evt="onPrev" delay="0">
-                  <p:tgtEl>
-                    <p:sldTgt/>
-                  </p:tgtEl>
-                </p:cond>
-              </p:prevCondLst>
-              <p:nextCondLst>
-                <p:cond evt="onNext" delay="0">
-                  <p:tgtEl>
-                    <p:sldTgt/>
-                  </p:tgtEl>
-                </p:cond>
-              </p:nextCondLst>
-            </p:seq>
-            <p:audio isNarration="1">
-              <p:cMediaNode vol="80000" showWhenStopped="0">
-                <p:cTn id="7" fill="hold" display="0">
-                  <p:stCondLst>
-                    <p:cond delay="indefinite"/>
-                  </p:stCondLst>
-                  <p:endCondLst>
-                    <p:cond evt="onStopAudio" delay="0">
-                      <p:tgtEl>
-                        <p:sldTgt/>
-                      </p:tgtEl>
-                    </p:cond>
-                  </p:endCondLst>
-                </p:cTn>
-                <p:tgtEl>
-                  <p:spTgt spid="4"/>
-                </p:tgtEl>
-              </p:cMediaNode>
-            </p:audio>
-          </p:childTnLst>
-        </p:cTn>
+        <p:cTn id="1" dur="indefinite" restart="never" nodeType="tmRoot"/>
       </p:par>
     </p:tnLst>
   </p:timing>
@@ -6422,17 +4437,7 @@
                 <a:latin typeface="微软雅黑" panose="020B0503020204020204" pitchFamily="34" charset="-122"/>
                 <a:ea typeface="微软雅黑" panose="020B0503020204020204" pitchFamily="34" charset="-122"/>
               </a:rPr>
-              <a:t>的多重进制的多媒体语言计算”</a:t>
-            </a:r>
-            <a:r>
-              <a:rPr lang="zh-CN" altLang="en-US" sz="2700" dirty="0" smtClean="0">
-                <a:solidFill>
-                  <a:srgbClr val="19B49B"/>
-                </a:solidFill>
-                <a:latin typeface="微软雅黑" panose="020B0503020204020204" pitchFamily="34" charset="-122"/>
-                <a:ea typeface="微软雅黑" panose="020B0503020204020204" pitchFamily="34" charset="-122"/>
-              </a:rPr>
-              <a:t>。</a:t>
+              <a:t>的多重进制的多媒体语言计算”。</a:t>
             </a:r>
             <a:endParaRPr lang="en-US" altLang="zh-CN" sz="2700" dirty="0" smtClean="0">
               <a:solidFill>
@@ -6723,39 +4728,6 @@
           </a:p>
         </p:txBody>
       </p:sp>
-      <p:pic>
-        <p:nvPicPr>
-          <p:cNvPr id="2" name="Audio 1">
-            <a:hlinkClick r:id="" action="ppaction://media"/>
-          </p:cNvPr>
-          <p:cNvPicPr>
-            <a:picLocks noChangeAspect="1"/>
-          </p:cNvPicPr>
-          <p:nvPr>
-            <a:audioFile r:link="rId2"/>
-            <p:extLst>
-              <p:ext uri="{DAA4B4D4-6D71-4841-9C94-3DE7FCFB9230}">
-                <p14:media xmlns:p14="http://schemas.microsoft.com/office/powerpoint/2010/main" r:embed="rId1"/>
-              </p:ext>
-            </p:extLst>
-          </p:nvPr>
-        </p:nvPicPr>
-        <p:blipFill>
-          <a:blip r:embed="rId5"/>
-          <a:stretch>
-            <a:fillRect/>
-          </a:stretch>
-        </p:blipFill>
-        <p:spPr>
-          <a:xfrm>
-            <a:off x="8521700" y="4521200"/>
-            <a:ext cx="406400" cy="406400"/>
-          </a:xfrm>
-          <a:prstGeom prst="rect">
-            <a:avLst/>
-          </a:prstGeom>
-        </p:spPr>
-      </p:pic>
     </p:spTree>
     <p:extLst>
       <p:ext uri="{BB962C8B-B14F-4D97-AF65-F5344CB8AC3E}">
@@ -6766,13 +4738,13 @@
   <p:clrMapOvr>
     <a:masterClrMapping/>
   </p:clrMapOvr>
-  <mc:AlternateContent xmlns:mc="http://schemas.openxmlformats.org/markup-compatibility/2006">
-    <mc:Choice xmlns:p15="http://schemas.microsoft.com/office/powerpoint/2012/main" Requires="p15">
+  <mc:AlternateContent xmlns:mc="http://schemas.openxmlformats.org/markup-compatibility/2006" xmlns:p15="http://schemas.microsoft.com/office/powerpoint/2012/main">
+    <mc:Choice Requires="p15">
       <p:transition xmlns:p14="http://schemas.microsoft.com/office/powerpoint/2010/main" spd="slow" p14:dur="1250" advTm="3148">
         <p15:prstTrans prst="peelOff"/>
       </p:transition>
     </mc:Choice>
-    <mc:Fallback>
+    <mc:Fallback xmlns="">
       <p:transition spd="slow" advTm="3148">
         <p:fade/>
       </p:transition>
@@ -6781,87 +4753,7 @@
   <p:timing>
     <p:tnLst>
       <p:par>
-        <p:cTn id="1" dur="indefinite" restart="never" nodeType="tmRoot">
-          <p:childTnLst>
-            <p:seq concurrent="1" nextAc="seek">
-              <p:cTn id="2" dur="indefinite" nodeType="mainSeq">
-                <p:childTnLst>
-                  <p:par>
-                    <p:cTn id="3" fill="hold">
-                      <p:stCondLst>
-                        <p:cond delay="indefinite"/>
-                        <p:cond evt="onBegin" delay="0">
-                          <p:tn val="2"/>
-                        </p:cond>
-                      </p:stCondLst>
-                      <p:childTnLst>
-                        <p:par>
-                          <p:cTn id="4" fill="hold">
-                            <p:stCondLst>
-                              <p:cond delay="0"/>
-                            </p:stCondLst>
-                            <p:childTnLst>
-                              <p:par>
-                                <p:cTn id="5" presetID="1" presetClass="mediacall" presetSubtype="0" fill="hold" nodeType="afterEffect">
-                                  <p:stCondLst>
-                                    <p:cond delay="0"/>
-                                  </p:stCondLst>
-                                  <p:childTnLst>
-                                    <p:cmd type="call" cmd="playFrom(0.0)">
-                                      <p:cBhvr>
-                                        <p:cTn id="6" dur="1" fill="hold"/>
-                                        <p:tgtEl>
-                                          <p:spTgt spid="2"/>
-                                        </p:tgtEl>
-                                      </p:cBhvr>
-                                    </p:cmd>
-                                  </p:childTnLst>
-                                </p:cTn>
-                              </p:par>
-                            </p:childTnLst>
-                          </p:cTn>
-                        </p:par>
-                      </p:childTnLst>
-                    </p:cTn>
-                  </p:par>
-                </p:childTnLst>
-              </p:cTn>
-              <p:prevCondLst>
-                <p:cond evt="onPrev" delay="0">
-                  <p:tgtEl>
-                    <p:sldTgt/>
-                  </p:tgtEl>
-                </p:cond>
-              </p:prevCondLst>
-              <p:nextCondLst>
-                <p:cond evt="onNext" delay="0">
-                  <p:tgtEl>
-                    <p:sldTgt/>
-                  </p:tgtEl>
-                </p:cond>
-              </p:nextCondLst>
-            </p:seq>
-            <p:audio isNarration="1">
-              <p:cMediaNode vol="80000" showWhenStopped="0">
-                <p:cTn id="7" fill="hold" display="0">
-                  <p:stCondLst>
-                    <p:cond delay="indefinite"/>
-                  </p:stCondLst>
-                  <p:endCondLst>
-                    <p:cond evt="onStopAudio" delay="0">
-                      <p:tgtEl>
-                        <p:sldTgt/>
-                      </p:tgtEl>
-                    </p:cond>
-                  </p:endCondLst>
-                </p:cTn>
-                <p:tgtEl>
-                  <p:spTgt spid="2"/>
-                </p:tgtEl>
-              </p:cMediaNode>
-            </p:audio>
-          </p:childTnLst>
-        </p:cTn>
+        <p:cTn id="1" dur="indefinite" restart="never" nodeType="tmRoot"/>
       </p:par>
     </p:tnLst>
   </p:timing>
@@ -7406,12 +5298,12 @@
           <a:graphicData uri="http://schemas.openxmlformats.org/presentationml/2006/ole">
             <mc:AlternateContent xmlns:mc="http://schemas.openxmlformats.org/markup-compatibility/2006">
               <mc:Choice xmlns:v="urn:schemas-microsoft-com:vml" Requires="v">
-                <p:oleObj spid="_x0000_s5137" name="Picture" r:id="rId6" imgW="4061520" imgH="4699800" progId="Word.Picture.8">
+                <p:oleObj spid="_x0000_s5142" name="Picture" r:id="rId4" imgW="4061520" imgH="4699800" progId="Word.Picture.8">
                   <p:embed/>
                 </p:oleObj>
               </mc:Choice>
               <mc:Fallback>
-                <p:oleObj name="Picture" r:id="rId6" imgW="4061520" imgH="4699800" progId="Word.Picture.8">
+                <p:oleObj name="Picture" r:id="rId4" imgW="4061520" imgH="4699800" progId="Word.Picture.8">
                   <p:embed/>
                   <p:pic>
                     <p:nvPicPr>
@@ -7422,7 +5314,7 @@
                       <p:nvPr/>
                     </p:nvPicPr>
                     <p:blipFill>
-                      <a:blip r:embed="rId7"/>
+                      <a:blip r:embed="rId5"/>
                       <a:srcRect/>
                       <a:stretch>
                         <a:fillRect/>
@@ -7446,39 +5338,6 @@
           </a:graphicData>
         </a:graphic>
       </p:graphicFrame>
-      <p:pic>
-        <p:nvPicPr>
-          <p:cNvPr id="2" name="Audio 1">
-            <a:hlinkClick r:id="" action="ppaction://media"/>
-          </p:cNvPr>
-          <p:cNvPicPr>
-            <a:picLocks noChangeAspect="1"/>
-          </p:cNvPicPr>
-          <p:nvPr>
-            <a:audioFile r:link="rId3"/>
-            <p:extLst>
-              <p:ext uri="{DAA4B4D4-6D71-4841-9C94-3DE7FCFB9230}">
-                <p14:media xmlns:p14="http://schemas.microsoft.com/office/powerpoint/2010/main" r:embed="rId2"/>
-              </p:ext>
-            </p:extLst>
-          </p:nvPr>
-        </p:nvPicPr>
-        <p:blipFill>
-          <a:blip r:embed="rId8"/>
-          <a:stretch>
-            <a:fillRect/>
-          </a:stretch>
-        </p:blipFill>
-        <p:spPr>
-          <a:xfrm>
-            <a:off x="8521700" y="4521200"/>
-            <a:ext cx="406400" cy="406400"/>
-          </a:xfrm>
-          <a:prstGeom prst="rect">
-            <a:avLst/>
-          </a:prstGeom>
-        </p:spPr>
-      </p:pic>
     </p:spTree>
     <p:extLst>
       <p:ext uri="{BB962C8B-B14F-4D97-AF65-F5344CB8AC3E}">
@@ -7489,13 +5348,13 @@
   <p:clrMapOvr>
     <a:masterClrMapping/>
   </p:clrMapOvr>
-  <mc:AlternateContent xmlns:mc="http://schemas.openxmlformats.org/markup-compatibility/2006">
-    <mc:Choice xmlns:p15="http://schemas.microsoft.com/office/powerpoint/2012/main" Requires="p15">
+  <mc:AlternateContent xmlns:mc="http://schemas.openxmlformats.org/markup-compatibility/2006" xmlns:p15="http://schemas.microsoft.com/office/powerpoint/2012/main">
+    <mc:Choice Requires="p15">
       <p:transition xmlns:p14="http://schemas.microsoft.com/office/powerpoint/2010/main" spd="slow" p14:dur="1250" advTm="2659">
         <p15:prstTrans prst="peelOff"/>
       </p:transition>
     </mc:Choice>
-    <mc:Fallback>
+    <mc:Fallback xmlns="">
       <p:transition spd="slow" advTm="2659">
         <p:fade/>
       </p:transition>
@@ -7504,87 +5363,7 @@
   <p:timing>
     <p:tnLst>
       <p:par>
-        <p:cTn id="1" dur="indefinite" restart="never" nodeType="tmRoot">
-          <p:childTnLst>
-            <p:seq concurrent="1" nextAc="seek">
-              <p:cTn id="2" dur="indefinite" nodeType="mainSeq">
-                <p:childTnLst>
-                  <p:par>
-                    <p:cTn id="3" fill="hold">
-                      <p:stCondLst>
-                        <p:cond delay="indefinite"/>
-                        <p:cond evt="onBegin" delay="0">
-                          <p:tn val="2"/>
-                        </p:cond>
-                      </p:stCondLst>
-                      <p:childTnLst>
-                        <p:par>
-                          <p:cTn id="4" fill="hold">
-                            <p:stCondLst>
-                              <p:cond delay="0"/>
-                            </p:stCondLst>
-                            <p:childTnLst>
-                              <p:par>
-                                <p:cTn id="5" presetID="1" presetClass="mediacall" presetSubtype="0" fill="hold" nodeType="afterEffect">
-                                  <p:stCondLst>
-                                    <p:cond delay="0"/>
-                                  </p:stCondLst>
-                                  <p:childTnLst>
-                                    <p:cmd type="call" cmd="playFrom(0.0)">
-                                      <p:cBhvr>
-                                        <p:cTn id="6" dur="1" fill="hold"/>
-                                        <p:tgtEl>
-                                          <p:spTgt spid="2"/>
-                                        </p:tgtEl>
-                                      </p:cBhvr>
-                                    </p:cmd>
-                                  </p:childTnLst>
-                                </p:cTn>
-                              </p:par>
-                            </p:childTnLst>
-                          </p:cTn>
-                        </p:par>
-                      </p:childTnLst>
-                    </p:cTn>
-                  </p:par>
-                </p:childTnLst>
-              </p:cTn>
-              <p:prevCondLst>
-                <p:cond evt="onPrev" delay="0">
-                  <p:tgtEl>
-                    <p:sldTgt/>
-                  </p:tgtEl>
-                </p:cond>
-              </p:prevCondLst>
-              <p:nextCondLst>
-                <p:cond evt="onNext" delay="0">
-                  <p:tgtEl>
-                    <p:sldTgt/>
-                  </p:tgtEl>
-                </p:cond>
-              </p:nextCondLst>
-            </p:seq>
-            <p:audio isNarration="1">
-              <p:cMediaNode vol="80000" showWhenStopped="0">
-                <p:cTn id="7" fill="hold" display="0">
-                  <p:stCondLst>
-                    <p:cond delay="indefinite"/>
-                  </p:stCondLst>
-                  <p:endCondLst>
-                    <p:cond evt="onStopAudio" delay="0">
-                      <p:tgtEl>
-                        <p:sldTgt/>
-                      </p:tgtEl>
-                    </p:cond>
-                  </p:endCondLst>
-                </p:cTn>
-                <p:tgtEl>
-                  <p:spTgt spid="2"/>
-                </p:tgtEl>
-              </p:cMediaNode>
-            </p:audio>
-          </p:childTnLst>
-        </p:cTn>
+        <p:cTn id="1" dur="indefinite" restart="never" nodeType="tmRoot"/>
       </p:par>
     </p:tnLst>
   </p:timing>
@@ -7652,13 +5431,13 @@
       <p:pic>
         <p:nvPicPr>
           <p:cNvPr id="5" name="Picture 4">
-            <a:hlinkClick r:id="rId5"/>
+            <a:hlinkClick r:id="rId3"/>
           </p:cNvPr>
           <p:cNvPicPr/>
           <p:nvPr/>
         </p:nvPicPr>
         <p:blipFill>
-          <a:blip r:embed="rId6">
+          <a:blip r:embed="rId4">
             <a:extLst>
               <a:ext uri="{28A0092B-C50C-407E-A947-70E740481C1C}">
                 <a14:useLocalDpi xmlns:a14="http://schemas.microsoft.com/office/drawing/2010/main" val="0"/>
@@ -7929,39 +5708,6 @@
           </a:p>
         </p:txBody>
       </p:sp>
-      <p:pic>
-        <p:nvPicPr>
-          <p:cNvPr id="3" name="Audio 2">
-            <a:hlinkClick r:id="" action="ppaction://media"/>
-          </p:cNvPr>
-          <p:cNvPicPr>
-            <a:picLocks noChangeAspect="1"/>
-          </p:cNvPicPr>
-          <p:nvPr>
-            <a:audioFile r:link="rId2"/>
-            <p:extLst>
-              <p:ext uri="{DAA4B4D4-6D71-4841-9C94-3DE7FCFB9230}">
-                <p14:media xmlns:p14="http://schemas.microsoft.com/office/powerpoint/2010/main" r:embed="rId1"/>
-              </p:ext>
-            </p:extLst>
-          </p:nvPr>
-        </p:nvPicPr>
-        <p:blipFill>
-          <a:blip r:embed="rId7"/>
-          <a:stretch>
-            <a:fillRect/>
-          </a:stretch>
-        </p:blipFill>
-        <p:spPr>
-          <a:xfrm>
-            <a:off x="8521700" y="4521200"/>
-            <a:ext cx="406400" cy="406400"/>
-          </a:xfrm>
-          <a:prstGeom prst="rect">
-            <a:avLst/>
-          </a:prstGeom>
-        </p:spPr>
-      </p:pic>
     </p:spTree>
     <p:extLst>
       <p:ext uri="{BB962C8B-B14F-4D97-AF65-F5344CB8AC3E}">
@@ -7972,13 +5718,13 @@
   <p:clrMapOvr>
     <a:masterClrMapping/>
   </p:clrMapOvr>
-  <mc:AlternateContent xmlns:mc="http://schemas.openxmlformats.org/markup-compatibility/2006">
-    <mc:Choice xmlns:p15="http://schemas.microsoft.com/office/powerpoint/2012/main" Requires="p15">
+  <mc:AlternateContent xmlns:mc="http://schemas.openxmlformats.org/markup-compatibility/2006" xmlns:p15="http://schemas.microsoft.com/office/powerpoint/2012/main">
+    <mc:Choice Requires="p15">
       <p:transition xmlns:p14="http://schemas.microsoft.com/office/powerpoint/2010/main" spd="slow" p14:dur="1250" advTm="1739">
         <p15:prstTrans prst="peelOff"/>
       </p:transition>
     </mc:Choice>
-    <mc:Fallback>
+    <mc:Fallback xmlns="">
       <p:transition spd="slow" advTm="1739">
         <p:fade/>
       </p:transition>
@@ -7987,87 +5733,7 @@
   <p:timing>
     <p:tnLst>
       <p:par>
-        <p:cTn id="1" dur="indefinite" restart="never" nodeType="tmRoot">
-          <p:childTnLst>
-            <p:seq concurrent="1" nextAc="seek">
-              <p:cTn id="2" dur="indefinite" nodeType="mainSeq">
-                <p:childTnLst>
-                  <p:par>
-                    <p:cTn id="3" fill="hold">
-                      <p:stCondLst>
-                        <p:cond delay="indefinite"/>
-                        <p:cond evt="onBegin" delay="0">
-                          <p:tn val="2"/>
-                        </p:cond>
-                      </p:stCondLst>
-                      <p:childTnLst>
-                        <p:par>
-                          <p:cTn id="4" fill="hold">
-                            <p:stCondLst>
-                              <p:cond delay="0"/>
-                            </p:stCondLst>
-                            <p:childTnLst>
-                              <p:par>
-                                <p:cTn id="5" presetID="1" presetClass="mediacall" presetSubtype="0" fill="hold" nodeType="afterEffect">
-                                  <p:stCondLst>
-                                    <p:cond delay="0"/>
-                                  </p:stCondLst>
-                                  <p:childTnLst>
-                                    <p:cmd type="call" cmd="playFrom(0.0)">
-                                      <p:cBhvr>
-                                        <p:cTn id="6" dur="1" fill="hold"/>
-                                        <p:tgtEl>
-                                          <p:spTgt spid="3"/>
-                                        </p:tgtEl>
-                                      </p:cBhvr>
-                                    </p:cmd>
-                                  </p:childTnLst>
-                                </p:cTn>
-                              </p:par>
-                            </p:childTnLst>
-                          </p:cTn>
-                        </p:par>
-                      </p:childTnLst>
-                    </p:cTn>
-                  </p:par>
-                </p:childTnLst>
-              </p:cTn>
-              <p:prevCondLst>
-                <p:cond evt="onPrev" delay="0">
-                  <p:tgtEl>
-                    <p:sldTgt/>
-                  </p:tgtEl>
-                </p:cond>
-              </p:prevCondLst>
-              <p:nextCondLst>
-                <p:cond evt="onNext" delay="0">
-                  <p:tgtEl>
-                    <p:sldTgt/>
-                  </p:tgtEl>
-                </p:cond>
-              </p:nextCondLst>
-            </p:seq>
-            <p:audio isNarration="1">
-              <p:cMediaNode vol="80000" showWhenStopped="0">
-                <p:cTn id="7" fill="hold" display="0">
-                  <p:stCondLst>
-                    <p:cond delay="indefinite"/>
-                  </p:stCondLst>
-                  <p:endCondLst>
-                    <p:cond evt="onStopAudio" delay="0">
-                      <p:tgtEl>
-                        <p:sldTgt/>
-                      </p:tgtEl>
-                    </p:cond>
-                  </p:endCondLst>
-                </p:cTn>
-                <p:tgtEl>
-                  <p:spTgt spid="3"/>
-                </p:tgtEl>
-              </p:cMediaNode>
-            </p:audio>
-          </p:childTnLst>
-        </p:cTn>
+        <p:cTn id="1" dur="indefinite" restart="never" nodeType="tmRoot"/>
       </p:par>
     </p:tnLst>
   </p:timing>
@@ -8100,7 +5766,7 @@
           <p:nvPr/>
         </p:nvPicPr>
         <p:blipFill rotWithShape="1">
-          <a:blip r:embed="rId5"/>
+          <a:blip r:embed="rId3"/>
           <a:srcRect l="16078" t="8528" r="14488" b="16904"/>
           <a:stretch/>
         </p:blipFill>
@@ -8123,7 +5789,7 @@
           <p:nvPr/>
         </p:nvPicPr>
         <p:blipFill>
-          <a:blip r:embed="rId6">
+          <a:blip r:embed="rId4">
             <a:extLst>
               <a:ext uri="{28A0092B-C50C-407E-A947-70E740481C1C}">
                 <a14:useLocalDpi xmlns:a14="http://schemas.microsoft.com/office/drawing/2010/main" val="0"/>
@@ -8392,39 +6058,6 @@
           </a:p>
         </p:txBody>
       </p:sp>
-      <p:pic>
-        <p:nvPicPr>
-          <p:cNvPr id="4" name="Audio 3">
-            <a:hlinkClick r:id="" action="ppaction://media"/>
-          </p:cNvPr>
-          <p:cNvPicPr>
-            <a:picLocks noChangeAspect="1"/>
-          </p:cNvPicPr>
-          <p:nvPr>
-            <a:audioFile r:link="rId2"/>
-            <p:extLst>
-              <p:ext uri="{DAA4B4D4-6D71-4841-9C94-3DE7FCFB9230}">
-                <p14:media xmlns:p14="http://schemas.microsoft.com/office/powerpoint/2010/main" r:embed="rId1"/>
-              </p:ext>
-            </p:extLst>
-          </p:nvPr>
-        </p:nvPicPr>
-        <p:blipFill>
-          <a:blip r:embed="rId7"/>
-          <a:stretch>
-            <a:fillRect/>
-          </a:stretch>
-        </p:blipFill>
-        <p:spPr>
-          <a:xfrm>
-            <a:off x="8521700" y="4521200"/>
-            <a:ext cx="406400" cy="406400"/>
-          </a:xfrm>
-          <a:prstGeom prst="rect">
-            <a:avLst/>
-          </a:prstGeom>
-        </p:spPr>
-      </p:pic>
     </p:spTree>
     <p:extLst>
       <p:ext uri="{BB962C8B-B14F-4D97-AF65-F5344CB8AC3E}">
@@ -8435,13 +6068,13 @@
   <p:clrMapOvr>
     <a:masterClrMapping/>
   </p:clrMapOvr>
-  <mc:AlternateContent xmlns:mc="http://schemas.openxmlformats.org/markup-compatibility/2006">
-    <mc:Choice xmlns:p15="http://schemas.microsoft.com/office/powerpoint/2012/main" Requires="p15">
+  <mc:AlternateContent xmlns:mc="http://schemas.openxmlformats.org/markup-compatibility/2006" xmlns:p15="http://schemas.microsoft.com/office/powerpoint/2012/main">
+    <mc:Choice Requires="p15">
       <p:transition xmlns:p14="http://schemas.microsoft.com/office/powerpoint/2010/main" spd="slow" p14:dur="1250" advTm="328">
         <p15:prstTrans prst="peelOff"/>
       </p:transition>
     </mc:Choice>
-    <mc:Fallback>
+    <mc:Fallback xmlns="">
       <p:transition spd="slow" advTm="328">
         <p:fade/>
       </p:transition>
@@ -8450,87 +6083,7 @@
   <p:timing>
     <p:tnLst>
       <p:par>
-        <p:cTn id="1" dur="indefinite" restart="never" nodeType="tmRoot">
-          <p:childTnLst>
-            <p:seq concurrent="1" nextAc="seek">
-              <p:cTn id="2" dur="indefinite" nodeType="mainSeq">
-                <p:childTnLst>
-                  <p:par>
-                    <p:cTn id="3" fill="hold">
-                      <p:stCondLst>
-                        <p:cond delay="indefinite"/>
-                        <p:cond evt="onBegin" delay="0">
-                          <p:tn val="2"/>
-                        </p:cond>
-                      </p:stCondLst>
-                      <p:childTnLst>
-                        <p:par>
-                          <p:cTn id="4" fill="hold">
-                            <p:stCondLst>
-                              <p:cond delay="0"/>
-                            </p:stCondLst>
-                            <p:childTnLst>
-                              <p:par>
-                                <p:cTn id="5" presetID="1" presetClass="mediacall" presetSubtype="0" fill="hold" nodeType="afterEffect">
-                                  <p:stCondLst>
-                                    <p:cond delay="0"/>
-                                  </p:stCondLst>
-                                  <p:childTnLst>
-                                    <p:cmd type="call" cmd="playFrom(0.0)">
-                                      <p:cBhvr>
-                                        <p:cTn id="6" dur="1" fill="hold"/>
-                                        <p:tgtEl>
-                                          <p:spTgt spid="4"/>
-                                        </p:tgtEl>
-                                      </p:cBhvr>
-                                    </p:cmd>
-                                  </p:childTnLst>
-                                </p:cTn>
-                              </p:par>
-                            </p:childTnLst>
-                          </p:cTn>
-                        </p:par>
-                      </p:childTnLst>
-                    </p:cTn>
-                  </p:par>
-                </p:childTnLst>
-              </p:cTn>
-              <p:prevCondLst>
-                <p:cond evt="onPrev" delay="0">
-                  <p:tgtEl>
-                    <p:sldTgt/>
-                  </p:tgtEl>
-                </p:cond>
-              </p:prevCondLst>
-              <p:nextCondLst>
-                <p:cond evt="onNext" delay="0">
-                  <p:tgtEl>
-                    <p:sldTgt/>
-                  </p:tgtEl>
-                </p:cond>
-              </p:nextCondLst>
-            </p:seq>
-            <p:audio isNarration="1">
-              <p:cMediaNode vol="80000" showWhenStopped="0">
-                <p:cTn id="7" fill="hold" display="0">
-                  <p:stCondLst>
-                    <p:cond delay="indefinite"/>
-                  </p:stCondLst>
-                  <p:endCondLst>
-                    <p:cond evt="onStopAudio" delay="0">
-                      <p:tgtEl>
-                        <p:sldTgt/>
-                      </p:tgtEl>
-                    </p:cond>
-                  </p:endCondLst>
-                </p:cTn>
-                <p:tgtEl>
-                  <p:spTgt spid="4"/>
-                </p:tgtEl>
-              </p:cMediaNode>
-            </p:audio>
-          </p:childTnLst>
-        </p:cTn>
+        <p:cTn id="1" dur="indefinite" restart="never" nodeType="tmRoot"/>
       </p:par>
     </p:tnLst>
   </p:timing>
@@ -8666,27 +6219,7 @@
                 <a:latin typeface="微软雅黑" panose="020B0503020204020204" pitchFamily="34" charset="-122"/>
                 <a:ea typeface="微软雅黑" panose="020B0503020204020204" pitchFamily="34" charset="-122"/>
               </a:rPr>
-              <a:t>关于</a:t>
-            </a:r>
-            <a:r>
-              <a:rPr lang="zh-CN" altLang="en-US" sz="3200" dirty="0" smtClean="0">
-                <a:solidFill>
-                  <a:srgbClr val="19B49B"/>
-                </a:solidFill>
-                <a:latin typeface="微软雅黑" panose="020B0503020204020204" pitchFamily="34" charset="-122"/>
-                <a:ea typeface="微软雅黑" panose="020B0503020204020204" pitchFamily="34" charset="-122"/>
-              </a:rPr>
-              <a:t>教育数字思维的</a:t>
-            </a:r>
-            <a:r>
-              <a:rPr lang="zh-CN" altLang="en-US" sz="3200" dirty="0" smtClean="0">
-                <a:solidFill>
-                  <a:srgbClr val="19B49B"/>
-                </a:solidFill>
-                <a:latin typeface="微软雅黑" panose="020B0503020204020204" pitchFamily="34" charset="-122"/>
-                <a:ea typeface="微软雅黑" panose="020B0503020204020204" pitchFamily="34" charset="-122"/>
-              </a:rPr>
-              <a:t>说法，错误的是（）：</a:t>
+              <a:t>关于教育数字思维的说法，错误的是（）：</a:t>
             </a:r>
             <a:endParaRPr lang="en-US" altLang="zh-CN" sz="3200" dirty="0">
               <a:solidFill>
@@ -8883,39 +6416,6 @@
           </a:p>
         </p:txBody>
       </p:sp>
-      <p:pic>
-        <p:nvPicPr>
-          <p:cNvPr id="4" name="Audio 3">
-            <a:hlinkClick r:id="" action="ppaction://media"/>
-          </p:cNvPr>
-          <p:cNvPicPr>
-            <a:picLocks noChangeAspect="1"/>
-          </p:cNvPicPr>
-          <p:nvPr>
-            <a:audioFile r:link="rId2"/>
-            <p:extLst>
-              <p:ext uri="{DAA4B4D4-6D71-4841-9C94-3DE7FCFB9230}">
-                <p14:media xmlns:p14="http://schemas.microsoft.com/office/powerpoint/2010/main" r:embed="rId1"/>
-              </p:ext>
-            </p:extLst>
-          </p:nvPr>
-        </p:nvPicPr>
-        <p:blipFill>
-          <a:blip r:embed="rId5"/>
-          <a:stretch>
-            <a:fillRect/>
-          </a:stretch>
-        </p:blipFill>
-        <p:spPr>
-          <a:xfrm>
-            <a:off x="8521700" y="4521200"/>
-            <a:ext cx="406400" cy="406400"/>
-          </a:xfrm>
-          <a:prstGeom prst="rect">
-            <a:avLst/>
-          </a:prstGeom>
-        </p:spPr>
-      </p:pic>
     </p:spTree>
     <p:extLst>
       <p:ext uri="{BB962C8B-B14F-4D97-AF65-F5344CB8AC3E}">
@@ -8926,13 +6426,13 @@
   <p:clrMapOvr>
     <a:masterClrMapping/>
   </p:clrMapOvr>
-  <mc:AlternateContent xmlns:mc="http://schemas.openxmlformats.org/markup-compatibility/2006">
-    <mc:Choice xmlns:p15="http://schemas.microsoft.com/office/powerpoint/2012/main" Requires="p15">
+  <mc:AlternateContent xmlns:mc="http://schemas.openxmlformats.org/markup-compatibility/2006" xmlns:p15="http://schemas.microsoft.com/office/powerpoint/2012/main">
+    <mc:Choice Requires="p15">
       <p:transition xmlns:p14="http://schemas.microsoft.com/office/powerpoint/2010/main" spd="slow" p14:dur="1250" advTm="33">
         <p15:prstTrans prst="peelOff"/>
       </p:transition>
     </mc:Choice>
-    <mc:Fallback>
+    <mc:Fallback xmlns="">
       <p:transition spd="slow" advTm="33">
         <p:fade/>
       </p:transition>
@@ -8941,87 +6441,7 @@
   <p:timing>
     <p:tnLst>
       <p:par>
-        <p:cTn id="1" dur="indefinite" restart="never" nodeType="tmRoot">
-          <p:childTnLst>
-            <p:seq concurrent="1" nextAc="seek">
-              <p:cTn id="2" dur="indefinite" nodeType="mainSeq">
-                <p:childTnLst>
-                  <p:par>
-                    <p:cTn id="3" fill="hold">
-                      <p:stCondLst>
-                        <p:cond delay="indefinite"/>
-                        <p:cond evt="onBegin" delay="0">
-                          <p:tn val="2"/>
-                        </p:cond>
-                      </p:stCondLst>
-                      <p:childTnLst>
-                        <p:par>
-                          <p:cTn id="4" fill="hold">
-                            <p:stCondLst>
-                              <p:cond delay="0"/>
-                            </p:stCondLst>
-                            <p:childTnLst>
-                              <p:par>
-                                <p:cTn id="5" presetID="1" presetClass="mediacall" presetSubtype="0" fill="hold" nodeType="afterEffect">
-                                  <p:stCondLst>
-                                    <p:cond delay="0"/>
-                                  </p:stCondLst>
-                                  <p:childTnLst>
-                                    <p:cmd type="call" cmd="playFrom(0.0)">
-                                      <p:cBhvr>
-                                        <p:cTn id="6" dur="1" fill="hold"/>
-                                        <p:tgtEl>
-                                          <p:spTgt spid="4"/>
-                                        </p:tgtEl>
-                                      </p:cBhvr>
-                                    </p:cmd>
-                                  </p:childTnLst>
-                                </p:cTn>
-                              </p:par>
-                            </p:childTnLst>
-                          </p:cTn>
-                        </p:par>
-                      </p:childTnLst>
-                    </p:cTn>
-                  </p:par>
-                </p:childTnLst>
-              </p:cTn>
-              <p:prevCondLst>
-                <p:cond evt="onPrev" delay="0">
-                  <p:tgtEl>
-                    <p:sldTgt/>
-                  </p:tgtEl>
-                </p:cond>
-              </p:prevCondLst>
-              <p:nextCondLst>
-                <p:cond evt="onNext" delay="0">
-                  <p:tgtEl>
-                    <p:sldTgt/>
-                  </p:tgtEl>
-                </p:cond>
-              </p:nextCondLst>
-            </p:seq>
-            <p:audio isNarration="1">
-              <p:cMediaNode vol="80000" showWhenStopped="0">
-                <p:cTn id="7" fill="hold" display="0">
-                  <p:stCondLst>
-                    <p:cond delay="indefinite"/>
-                  </p:stCondLst>
-                  <p:endCondLst>
-                    <p:cond evt="onStopAudio" delay="0">
-                      <p:tgtEl>
-                        <p:sldTgt/>
-                      </p:tgtEl>
-                    </p:cond>
-                  </p:endCondLst>
-                </p:cTn>
-                <p:tgtEl>
-                  <p:spTgt spid="4"/>
-                </p:tgtEl>
-              </p:cMediaNode>
-            </p:audio>
-          </p:childTnLst>
-        </p:cTn>
+        <p:cTn id="1" dur="indefinite" restart="never" nodeType="tmRoot"/>
       </p:par>
     </p:tnLst>
   </p:timing>
